--- a/S1-CL1-Cloud-Design-Build/delivery/topic_12/Topic_12_Slides.pptx
+++ b/S1-CL1-Cloud-Design-Build/delivery/topic_12/Topic_12_Slides.pptx
@@ -4,35 +4,32 @@
   <p:sldMasterIdLst>
     <p:sldMasterId id="2147483648" r:id="rId1"/>
   </p:sldMasterIdLst>
-  <p:notesMasterIdLst>
-    <p:notesMasterId r:id="rId25"/>
-  </p:notesMasterIdLst>
   <p:sldIdLst>
-    <p:sldId id="256" r:id="rId2"/>
-    <p:sldId id="257" r:id="rId3"/>
-    <p:sldId id="258" r:id="rId4"/>
-    <p:sldId id="259" r:id="rId5"/>
-    <p:sldId id="260" r:id="rId6"/>
-    <p:sldId id="261" r:id="rId7"/>
-    <p:sldId id="262" r:id="rId8"/>
-    <p:sldId id="263" r:id="rId9"/>
-    <p:sldId id="264" r:id="rId10"/>
-    <p:sldId id="265" r:id="rId11"/>
-    <p:sldId id="266" r:id="rId12"/>
-    <p:sldId id="267" r:id="rId13"/>
-    <p:sldId id="268" r:id="rId14"/>
-    <p:sldId id="269" r:id="rId15"/>
-    <p:sldId id="270" r:id="rId16"/>
-    <p:sldId id="271" r:id="rId17"/>
-    <p:sldId id="272" r:id="rId18"/>
-    <p:sldId id="273" r:id="rId19"/>
-    <p:sldId id="274" r:id="rId20"/>
-    <p:sldId id="275" r:id="rId21"/>
-    <p:sldId id="276" r:id="rId22"/>
-    <p:sldId id="277" r:id="rId23"/>
-    <p:sldId id="278" r:id="rId24"/>
+    <p:sldId id="256" r:id="rId7"/>
+    <p:sldId id="257" r:id="rId8"/>
+    <p:sldId id="258" r:id="rId9"/>
+    <p:sldId id="259" r:id="rId10"/>
+    <p:sldId id="260" r:id="rId11"/>
+    <p:sldId id="261" r:id="rId12"/>
+    <p:sldId id="262" r:id="rId13"/>
+    <p:sldId id="263" r:id="rId14"/>
+    <p:sldId id="264" r:id="rId15"/>
+    <p:sldId id="265" r:id="rId16"/>
+    <p:sldId id="266" r:id="rId17"/>
+    <p:sldId id="267" r:id="rId18"/>
+    <p:sldId id="268" r:id="rId19"/>
+    <p:sldId id="269" r:id="rId20"/>
+    <p:sldId id="270" r:id="rId21"/>
+    <p:sldId id="271" r:id="rId22"/>
+    <p:sldId id="272" r:id="rId23"/>
+    <p:sldId id="273" r:id="rId24"/>
+    <p:sldId id="274" r:id="rId25"/>
+    <p:sldId id="275" r:id="rId26"/>
+    <p:sldId id="276" r:id="rId27"/>
+    <p:sldId id="277" r:id="rId28"/>
+    <p:sldId id="278" r:id="rId29"/>
   </p:sldIdLst>
-  <p:sldSz cx="12192000" cy="6858000"/>
+  <p:sldSz cx="12191695" cy="6858000" type="screen4x3"/>
   <p:notesSz cx="6858000" cy="9144000"/>
   <p:defaultTextStyle>
     <a:defPPr>
@@ -129,541 +126,7 @@
       </a:defRPr>
     </a:lvl9pPr>
   </p:defaultTextStyle>
-  <p:extLst>
-    <p:ext uri="{EFAFB233-063F-42B5-8137-9DF3F51BA10A}">
-      <p15:sldGuideLst xmlns:p15="http://schemas.microsoft.com/office/powerpoint/2012/main">
-        <p15:guide id="1" orient="horz" pos="2160">
-          <p15:clr>
-            <a:srgbClr val="A4A3A4"/>
-          </p15:clr>
-        </p15:guide>
-        <p15:guide id="2" pos="2880">
-          <p15:clr>
-            <a:srgbClr val="A4A3A4"/>
-          </p15:clr>
-        </p15:guide>
-      </p15:sldGuideLst>
-    </p:ext>
-  </p:extLst>
 </p:presentation>
-</file>
-
-<file path=ppt/notesMasters/notesMaster1.xml><?xml version="1.0" encoding="utf-8"?>
-<p:notesMaster xmlns:a="http://schemas.openxmlformats.org/drawingml/2006/main" xmlns:r="http://schemas.openxmlformats.org/officeDocument/2006/relationships" xmlns:p="http://schemas.openxmlformats.org/presentationml/2006/main">
-  <p:cSld>
-    <p:bg>
-      <p:bgRef idx="1001">
-        <a:schemeClr val="bg1"/>
-      </p:bgRef>
-    </p:bg>
-    <p:spTree>
-      <p:nvGrpSpPr>
-        <p:cNvPr id="1" name=""/>
-        <p:cNvGrpSpPr/>
-        <p:nvPr/>
-      </p:nvGrpSpPr>
-      <p:grpSpPr>
-        <a:xfrm>
-          <a:off x="0" y="0"/>
-          <a:ext cx="0" cy="0"/>
-          <a:chOff x="0" y="0"/>
-          <a:chExt cx="0" cy="0"/>
-        </a:xfrm>
-      </p:grpSpPr>
-      <p:sp>
-        <p:nvSpPr>
-          <p:cNvPr id="2" name="Header Placeholder 1"/>
-          <p:cNvSpPr>
-            <a:spLocks noGrp="1"/>
-          </p:cNvSpPr>
-          <p:nvPr>
-            <p:ph type="hdr" sz="quarter"/>
-          </p:nvPr>
-        </p:nvSpPr>
-        <p:spPr>
-          <a:xfrm>
-            <a:off x="0" y="0"/>
-            <a:ext cx="2971800" cy="458788"/>
-          </a:xfrm>
-          <a:prstGeom prst="rect">
-            <a:avLst/>
-          </a:prstGeom>
-        </p:spPr>
-        <p:txBody>
-          <a:bodyPr vert="horz" lIns="91440" tIns="45720" rIns="91440" bIns="45720" rtlCol="0"/>
-          <a:lstStyle>
-            <a:lvl1pPr algn="l">
-              <a:defRPr sz="1200"/>
-            </a:lvl1pPr>
-          </a:lstStyle>
-          <a:p>
-            <a:endParaRPr lang="en-AU"/>
-          </a:p>
-        </p:txBody>
-      </p:sp>
-      <p:sp>
-        <p:nvSpPr>
-          <p:cNvPr id="3" name="Date Placeholder 2"/>
-          <p:cNvSpPr>
-            <a:spLocks noGrp="1"/>
-          </p:cNvSpPr>
-          <p:nvPr>
-            <p:ph type="dt" idx="1"/>
-          </p:nvPr>
-        </p:nvSpPr>
-        <p:spPr>
-          <a:xfrm>
-            <a:off x="3884613" y="0"/>
-            <a:ext cx="2971800" cy="458788"/>
-          </a:xfrm>
-          <a:prstGeom prst="rect">
-            <a:avLst/>
-          </a:prstGeom>
-        </p:spPr>
-        <p:txBody>
-          <a:bodyPr vert="horz" lIns="91440" tIns="45720" rIns="91440" bIns="45720" rtlCol="0"/>
-          <a:lstStyle>
-            <a:lvl1pPr algn="r">
-              <a:defRPr sz="1200"/>
-            </a:lvl1pPr>
-          </a:lstStyle>
-          <a:p>
-            <a:fld id="{4C8D1637-AA7E-4D75-94B1-9EBA1E55DCF5}" type="datetimeFigureOut">
-              <a:rPr lang="en-AU" smtClean="0"/>
-              <a:t>4/06/2026</a:t>
-            </a:fld>
-            <a:endParaRPr lang="en-AU"/>
-          </a:p>
-        </p:txBody>
-      </p:sp>
-      <p:sp>
-        <p:nvSpPr>
-          <p:cNvPr id="4" name="Slide Image Placeholder 3"/>
-          <p:cNvSpPr>
-            <a:spLocks noGrp="1" noRot="1" noChangeAspect="1"/>
-          </p:cNvSpPr>
-          <p:nvPr>
-            <p:ph type="sldImg" idx="2"/>
-          </p:nvPr>
-        </p:nvSpPr>
-        <p:spPr>
-          <a:xfrm>
-            <a:off x="685800" y="1143000"/>
-            <a:ext cx="5486400" cy="3086100"/>
-          </a:xfrm>
-          <a:prstGeom prst="rect">
-            <a:avLst/>
-          </a:prstGeom>
-          <a:noFill/>
-          <a:ln w="12700">
-            <a:solidFill>
-              <a:prstClr val="black"/>
-            </a:solidFill>
-          </a:ln>
-        </p:spPr>
-        <p:txBody>
-          <a:bodyPr vert="horz" lIns="91440" tIns="45720" rIns="91440" bIns="45720" rtlCol="0" anchor="ctr"/>
-          <a:lstStyle/>
-          <a:p>
-            <a:endParaRPr lang="en-AU"/>
-          </a:p>
-        </p:txBody>
-      </p:sp>
-      <p:sp>
-        <p:nvSpPr>
-          <p:cNvPr id="5" name="Notes Placeholder 4"/>
-          <p:cNvSpPr>
-            <a:spLocks noGrp="1"/>
-          </p:cNvSpPr>
-          <p:nvPr>
-            <p:ph type="body" sz="quarter" idx="3"/>
-          </p:nvPr>
-        </p:nvSpPr>
-        <p:spPr>
-          <a:xfrm>
-            <a:off x="685800" y="4400550"/>
-            <a:ext cx="5486400" cy="3600450"/>
-          </a:xfrm>
-          <a:prstGeom prst="rect">
-            <a:avLst/>
-          </a:prstGeom>
-        </p:spPr>
-        <p:txBody>
-          <a:bodyPr vert="horz" lIns="91440" tIns="45720" rIns="91440" bIns="45720" rtlCol="0"/>
-          <a:lstStyle/>
-          <a:p>
-            <a:pPr lvl="0"/>
-            <a:r>
-              <a:rPr lang="en-US"/>
-              <a:t>Click to edit Master text styles</a:t>
-            </a:r>
-          </a:p>
-          <a:p>
-            <a:pPr lvl="1"/>
-            <a:r>
-              <a:rPr lang="en-US"/>
-              <a:t>Second level</a:t>
-            </a:r>
-          </a:p>
-          <a:p>
-            <a:pPr lvl="2"/>
-            <a:r>
-              <a:rPr lang="en-US"/>
-              <a:t>Third level</a:t>
-            </a:r>
-          </a:p>
-          <a:p>
-            <a:pPr lvl="3"/>
-            <a:r>
-              <a:rPr lang="en-US"/>
-              <a:t>Fourth level</a:t>
-            </a:r>
-          </a:p>
-          <a:p>
-            <a:pPr lvl="4"/>
-            <a:r>
-              <a:rPr lang="en-US"/>
-              <a:t>Fifth level</a:t>
-            </a:r>
-            <a:endParaRPr lang="en-AU"/>
-          </a:p>
-        </p:txBody>
-      </p:sp>
-      <p:sp>
-        <p:nvSpPr>
-          <p:cNvPr id="6" name="Footer Placeholder 5"/>
-          <p:cNvSpPr>
-            <a:spLocks noGrp="1"/>
-          </p:cNvSpPr>
-          <p:nvPr>
-            <p:ph type="ftr" sz="quarter" idx="4"/>
-          </p:nvPr>
-        </p:nvSpPr>
-        <p:spPr>
-          <a:xfrm>
-            <a:off x="0" y="8685213"/>
-            <a:ext cx="2971800" cy="458787"/>
-          </a:xfrm>
-          <a:prstGeom prst="rect">
-            <a:avLst/>
-          </a:prstGeom>
-        </p:spPr>
-        <p:txBody>
-          <a:bodyPr vert="horz" lIns="91440" tIns="45720" rIns="91440" bIns="45720" rtlCol="0" anchor="b"/>
-          <a:lstStyle>
-            <a:lvl1pPr algn="l">
-              <a:defRPr sz="1200"/>
-            </a:lvl1pPr>
-          </a:lstStyle>
-          <a:p>
-            <a:endParaRPr lang="en-AU"/>
-          </a:p>
-        </p:txBody>
-      </p:sp>
-      <p:sp>
-        <p:nvSpPr>
-          <p:cNvPr id="7" name="Slide Number Placeholder 6"/>
-          <p:cNvSpPr>
-            <a:spLocks noGrp="1"/>
-          </p:cNvSpPr>
-          <p:nvPr>
-            <p:ph type="sldNum" sz="quarter" idx="5"/>
-          </p:nvPr>
-        </p:nvSpPr>
-        <p:spPr>
-          <a:xfrm>
-            <a:off x="3884613" y="8685213"/>
-            <a:ext cx="2971800" cy="458787"/>
-          </a:xfrm>
-          <a:prstGeom prst="rect">
-            <a:avLst/>
-          </a:prstGeom>
-        </p:spPr>
-        <p:txBody>
-          <a:bodyPr vert="horz" lIns="91440" tIns="45720" rIns="91440" bIns="45720" rtlCol="0" anchor="b"/>
-          <a:lstStyle>
-            <a:lvl1pPr algn="r">
-              <a:defRPr sz="1200"/>
-            </a:lvl1pPr>
-          </a:lstStyle>
-          <a:p>
-            <a:fld id="{586177A0-8F30-43DD-974A-0F05CBC18E75}" type="slidenum">
-              <a:rPr lang="en-AU" smtClean="0"/>
-              <a:t>‹#›</a:t>
-            </a:fld>
-            <a:endParaRPr lang="en-AU"/>
-          </a:p>
-        </p:txBody>
-      </p:sp>
-    </p:spTree>
-    <p:extLst>
-      <p:ext uri="{BB962C8B-B14F-4D97-AF65-F5344CB8AC3E}">
-        <p14:creationId xmlns:p14="http://schemas.microsoft.com/office/powerpoint/2010/main" val="1928303244"/>
-      </p:ext>
-    </p:extLst>
-  </p:cSld>
-  <p:clrMap bg1="lt1" tx1="dk1" bg2="lt2" tx2="dk2" accent1="accent1" accent2="accent2" accent3="accent3" accent4="accent4" accent5="accent5" accent6="accent6" hlink="hlink" folHlink="folHlink"/>
-  <p:notesStyle>
-    <a:lvl1pPr marL="0" algn="l" defTabSz="914400" rtl="0" eaLnBrk="1" latinLnBrk="0" hangingPunct="1">
-      <a:defRPr sz="1200" kern="1200">
-        <a:solidFill>
-          <a:schemeClr val="tx1"/>
-        </a:solidFill>
-        <a:latin typeface="+mn-lt"/>
-        <a:ea typeface="+mn-ea"/>
-        <a:cs typeface="+mn-cs"/>
-      </a:defRPr>
-    </a:lvl1pPr>
-    <a:lvl2pPr marL="457200" algn="l" defTabSz="914400" rtl="0" eaLnBrk="1" latinLnBrk="0" hangingPunct="1">
-      <a:defRPr sz="1200" kern="1200">
-        <a:solidFill>
-          <a:schemeClr val="tx1"/>
-        </a:solidFill>
-        <a:latin typeface="+mn-lt"/>
-        <a:ea typeface="+mn-ea"/>
-        <a:cs typeface="+mn-cs"/>
-      </a:defRPr>
-    </a:lvl2pPr>
-    <a:lvl3pPr marL="914400" algn="l" defTabSz="914400" rtl="0" eaLnBrk="1" latinLnBrk="0" hangingPunct="1">
-      <a:defRPr sz="1200" kern="1200">
-        <a:solidFill>
-          <a:schemeClr val="tx1"/>
-        </a:solidFill>
-        <a:latin typeface="+mn-lt"/>
-        <a:ea typeface="+mn-ea"/>
-        <a:cs typeface="+mn-cs"/>
-      </a:defRPr>
-    </a:lvl3pPr>
-    <a:lvl4pPr marL="1371600" algn="l" defTabSz="914400" rtl="0" eaLnBrk="1" latinLnBrk="0" hangingPunct="1">
-      <a:defRPr sz="1200" kern="1200">
-        <a:solidFill>
-          <a:schemeClr val="tx1"/>
-        </a:solidFill>
-        <a:latin typeface="+mn-lt"/>
-        <a:ea typeface="+mn-ea"/>
-        <a:cs typeface="+mn-cs"/>
-      </a:defRPr>
-    </a:lvl4pPr>
-    <a:lvl5pPr marL="1828800" algn="l" defTabSz="914400" rtl="0" eaLnBrk="1" latinLnBrk="0" hangingPunct="1">
-      <a:defRPr sz="1200" kern="1200">
-        <a:solidFill>
-          <a:schemeClr val="tx1"/>
-        </a:solidFill>
-        <a:latin typeface="+mn-lt"/>
-        <a:ea typeface="+mn-ea"/>
-        <a:cs typeface="+mn-cs"/>
-      </a:defRPr>
-    </a:lvl5pPr>
-    <a:lvl6pPr marL="2286000" algn="l" defTabSz="914400" rtl="0" eaLnBrk="1" latinLnBrk="0" hangingPunct="1">
-      <a:defRPr sz="1200" kern="1200">
-        <a:solidFill>
-          <a:schemeClr val="tx1"/>
-        </a:solidFill>
-        <a:latin typeface="+mn-lt"/>
-        <a:ea typeface="+mn-ea"/>
-        <a:cs typeface="+mn-cs"/>
-      </a:defRPr>
-    </a:lvl6pPr>
-    <a:lvl7pPr marL="2743200" algn="l" defTabSz="914400" rtl="0" eaLnBrk="1" latinLnBrk="0" hangingPunct="1">
-      <a:defRPr sz="1200" kern="1200">
-        <a:solidFill>
-          <a:schemeClr val="tx1"/>
-        </a:solidFill>
-        <a:latin typeface="+mn-lt"/>
-        <a:ea typeface="+mn-ea"/>
-        <a:cs typeface="+mn-cs"/>
-      </a:defRPr>
-    </a:lvl7pPr>
-    <a:lvl8pPr marL="3200400" algn="l" defTabSz="914400" rtl="0" eaLnBrk="1" latinLnBrk="0" hangingPunct="1">
-      <a:defRPr sz="1200" kern="1200">
-        <a:solidFill>
-          <a:schemeClr val="tx1"/>
-        </a:solidFill>
-        <a:latin typeface="+mn-lt"/>
-        <a:ea typeface="+mn-ea"/>
-        <a:cs typeface="+mn-cs"/>
-      </a:defRPr>
-    </a:lvl8pPr>
-    <a:lvl9pPr marL="3657600" algn="l" defTabSz="914400" rtl="0" eaLnBrk="1" latinLnBrk="0" hangingPunct="1">
-      <a:defRPr sz="1200" kern="1200">
-        <a:solidFill>
-          <a:schemeClr val="tx1"/>
-        </a:solidFill>
-        <a:latin typeface="+mn-lt"/>
-        <a:ea typeface="+mn-ea"/>
-        <a:cs typeface="+mn-cs"/>
-      </a:defRPr>
-    </a:lvl9pPr>
-  </p:notesStyle>
-</p:notesMaster>
-</file>
-
-<file path=ppt/notesSlides/notesSlide1.xml><?xml version="1.0" encoding="utf-8"?>
-<p:notes xmlns:a="http://schemas.openxmlformats.org/drawingml/2006/main" xmlns:r="http://schemas.openxmlformats.org/officeDocument/2006/relationships" xmlns:p="http://schemas.openxmlformats.org/presentationml/2006/main">
-  <p:cSld>
-    <p:spTree>
-      <p:nvGrpSpPr>
-        <p:cNvPr id="1" name=""/>
-        <p:cNvGrpSpPr/>
-        <p:nvPr/>
-      </p:nvGrpSpPr>
-      <p:grpSpPr>
-        <a:xfrm>
-          <a:off x="0" y="0"/>
-          <a:ext cx="0" cy="0"/>
-          <a:chOff x="0" y="0"/>
-          <a:chExt cx="0" cy="0"/>
-        </a:xfrm>
-      </p:grpSpPr>
-      <p:sp>
-        <p:nvSpPr>
-          <p:cNvPr id="2" name="Slide Image Placeholder 1"/>
-          <p:cNvSpPr>
-            <a:spLocks noGrp="1" noRot="1" noChangeAspect="1"/>
-          </p:cNvSpPr>
-          <p:nvPr>
-            <p:ph type="sldImg"/>
-          </p:nvPr>
-        </p:nvSpPr>
-        <p:spPr/>
-      </p:sp>
-      <p:sp>
-        <p:nvSpPr>
-          <p:cNvPr id="3" name="Notes Placeholder 2"/>
-          <p:cNvSpPr>
-            <a:spLocks noGrp="1"/>
-          </p:cNvSpPr>
-          <p:nvPr>
-            <p:ph type="body" idx="1"/>
-          </p:nvPr>
-        </p:nvSpPr>
-        <p:spPr/>
-        <p:txBody>
-          <a:bodyPr/>
-          <a:lstStyle/>
-          <a:p>
-            <a:endParaRPr lang="en-AU" dirty="0"/>
-          </a:p>
-        </p:txBody>
-      </p:sp>
-      <p:sp>
-        <p:nvSpPr>
-          <p:cNvPr id="4" name="Slide Number Placeholder 3"/>
-          <p:cNvSpPr>
-            <a:spLocks noGrp="1"/>
-          </p:cNvSpPr>
-          <p:nvPr>
-            <p:ph type="sldNum" sz="quarter" idx="5"/>
-          </p:nvPr>
-        </p:nvSpPr>
-        <p:spPr/>
-        <p:txBody>
-          <a:bodyPr/>
-          <a:lstStyle/>
-          <a:p>
-            <a:fld id="{586177A0-8F30-43DD-974A-0F05CBC18E75}" type="slidenum">
-              <a:rPr lang="en-AU" smtClean="0"/>
-              <a:t>13</a:t>
-            </a:fld>
-            <a:endParaRPr lang="en-AU"/>
-          </a:p>
-        </p:txBody>
-      </p:sp>
-    </p:spTree>
-    <p:extLst>
-      <p:ext uri="{BB962C8B-B14F-4D97-AF65-F5344CB8AC3E}">
-        <p14:creationId xmlns:p14="http://schemas.microsoft.com/office/powerpoint/2010/main" val="2761581665"/>
-      </p:ext>
-    </p:extLst>
-  </p:cSld>
-  <p:clrMapOvr>
-    <a:masterClrMapping/>
-  </p:clrMapOvr>
-</p:notes>
-</file>
-
-<file path=ppt/notesSlides/notesSlide2.xml><?xml version="1.0" encoding="utf-8"?>
-<p:notes xmlns:a="http://schemas.openxmlformats.org/drawingml/2006/main" xmlns:r="http://schemas.openxmlformats.org/officeDocument/2006/relationships" xmlns:p="http://schemas.openxmlformats.org/presentationml/2006/main">
-  <p:cSld>
-    <p:spTree>
-      <p:nvGrpSpPr>
-        <p:cNvPr id="1" name=""/>
-        <p:cNvGrpSpPr/>
-        <p:nvPr/>
-      </p:nvGrpSpPr>
-      <p:grpSpPr>
-        <a:xfrm>
-          <a:off x="0" y="0"/>
-          <a:ext cx="0" cy="0"/>
-          <a:chOff x="0" y="0"/>
-          <a:chExt cx="0" cy="0"/>
-        </a:xfrm>
-      </p:grpSpPr>
-      <p:sp>
-        <p:nvSpPr>
-          <p:cNvPr id="2" name="Slide Image Placeholder 1"/>
-          <p:cNvSpPr>
-            <a:spLocks noGrp="1" noRot="1" noChangeAspect="1"/>
-          </p:cNvSpPr>
-          <p:nvPr>
-            <p:ph type="sldImg"/>
-          </p:nvPr>
-        </p:nvSpPr>
-        <p:spPr/>
-      </p:sp>
-      <p:sp>
-        <p:nvSpPr>
-          <p:cNvPr id="3" name="Notes Placeholder 2"/>
-          <p:cNvSpPr>
-            <a:spLocks noGrp="1"/>
-          </p:cNvSpPr>
-          <p:nvPr>
-            <p:ph type="body" idx="1"/>
-          </p:nvPr>
-        </p:nvSpPr>
-        <p:spPr/>
-        <p:txBody>
-          <a:bodyPr/>
-          <a:lstStyle/>
-          <a:p>
-            <a:endParaRPr lang="en-AU" dirty="0"/>
-          </a:p>
-        </p:txBody>
-      </p:sp>
-      <p:sp>
-        <p:nvSpPr>
-          <p:cNvPr id="4" name="Slide Number Placeholder 3"/>
-          <p:cNvSpPr>
-            <a:spLocks noGrp="1"/>
-          </p:cNvSpPr>
-          <p:nvPr>
-            <p:ph type="sldNum" sz="quarter" idx="5"/>
-          </p:nvPr>
-        </p:nvSpPr>
-        <p:spPr/>
-        <p:txBody>
-          <a:bodyPr/>
-          <a:lstStyle/>
-          <a:p>
-            <a:fld id="{586177A0-8F30-43DD-974A-0F05CBC18E75}" type="slidenum">
-              <a:rPr lang="en-AU" smtClean="0"/>
-              <a:t>19</a:t>
-            </a:fld>
-            <a:endParaRPr lang="en-AU"/>
-          </a:p>
-        </p:txBody>
-      </p:sp>
-    </p:spTree>
-    <p:extLst>
-      <p:ext uri="{BB962C8B-B14F-4D97-AF65-F5344CB8AC3E}">
-        <p14:creationId xmlns:p14="http://schemas.microsoft.com/office/powerpoint/2010/main" val="3716108106"/>
-      </p:ext>
-    </p:extLst>
-  </p:cSld>
-  <p:clrMapOvr>
-    <a:masterClrMapping/>
-  </p:clrMapOvr>
-</p:notes>
 </file>
 
 <file path=ppt/slideLayouts/slideLayout1.xml><?xml version="1.0" encoding="utf-8"?>
@@ -704,9 +167,10 @@
           <a:lstStyle/>
           <a:p>
             <a:r>
-              <a:rPr lang="en-US"/>
+              <a:rPr lang="en-US" smtClean="0"/>
               <a:t>Click to edit Master title style</a:t>
             </a:r>
+            <a:endParaRPr lang="en-US"/>
           </a:p>
         </p:txBody>
       </p:sp>
@@ -822,9 +286,10 @@
           </a:lstStyle>
           <a:p>
             <a:r>
-              <a:rPr lang="en-US"/>
+              <a:rPr lang="en-US" smtClean="0"/>
               <a:t>Click to edit Master subtitle style</a:t>
             </a:r>
+            <a:endParaRPr lang="en-US"/>
           </a:p>
         </p:txBody>
       </p:sp>
@@ -845,7 +310,7 @@
           <a:p>
             <a:fld id="{5BCAD085-E8A6-8845-BD4E-CB4CCA059FC4}" type="datetimeFigureOut">
               <a:rPr lang="en-US" smtClean="0"/>
-              <a:t>6/4/2026</a:t>
+              <a:t>1/27/13</a:t>
             </a:fld>
             <a:endParaRPr lang="en-US"/>
           </a:p>
@@ -939,9 +404,10 @@
           <a:lstStyle/>
           <a:p>
             <a:r>
-              <a:rPr lang="en-US"/>
+              <a:rPr lang="en-US" smtClean="0"/>
               <a:t>Click to edit Master title style</a:t>
             </a:r>
+            <a:endParaRPr lang="en-US"/>
           </a:p>
         </p:txBody>
       </p:sp>
@@ -962,37 +428,38 @@
           <a:p>
             <a:pPr lvl="0"/>
             <a:r>
-              <a:rPr lang="en-US"/>
+              <a:rPr lang="en-US" smtClean="0"/>
               <a:t>Click to edit Master text styles</a:t>
             </a:r>
           </a:p>
           <a:p>
             <a:pPr lvl="1"/>
             <a:r>
-              <a:rPr lang="en-US"/>
+              <a:rPr lang="en-US" smtClean="0"/>
               <a:t>Second level</a:t>
             </a:r>
           </a:p>
           <a:p>
             <a:pPr lvl="2"/>
             <a:r>
-              <a:rPr lang="en-US"/>
+              <a:rPr lang="en-US" smtClean="0"/>
               <a:t>Third level</a:t>
             </a:r>
           </a:p>
           <a:p>
             <a:pPr lvl="3"/>
             <a:r>
-              <a:rPr lang="en-US"/>
+              <a:rPr lang="en-US" smtClean="0"/>
               <a:t>Fourth level</a:t>
             </a:r>
           </a:p>
           <a:p>
             <a:pPr lvl="4"/>
             <a:r>
-              <a:rPr lang="en-US"/>
+              <a:rPr lang="en-US" smtClean="0"/>
               <a:t>Fifth level</a:t>
             </a:r>
+            <a:endParaRPr lang="en-US"/>
           </a:p>
         </p:txBody>
       </p:sp>
@@ -1013,7 +480,7 @@
           <a:p>
             <a:fld id="{5BCAD085-E8A6-8845-BD4E-CB4CCA059FC4}" type="datetimeFigureOut">
               <a:rPr lang="en-US" smtClean="0"/>
-              <a:t>6/4/2026</a:t>
+              <a:t>1/27/13</a:t>
             </a:fld>
             <a:endParaRPr lang="en-US"/>
           </a:p>
@@ -1112,9 +579,10 @@
           <a:lstStyle/>
           <a:p>
             <a:r>
-              <a:rPr lang="en-US"/>
+              <a:rPr lang="en-US" smtClean="0"/>
               <a:t>Click to edit Master title style</a:t>
             </a:r>
+            <a:endParaRPr lang="en-US"/>
           </a:p>
         </p:txBody>
       </p:sp>
@@ -1140,37 +608,38 @@
           <a:p>
             <a:pPr lvl="0"/>
             <a:r>
-              <a:rPr lang="en-US"/>
+              <a:rPr lang="en-US" smtClean="0"/>
               <a:t>Click to edit Master text styles</a:t>
             </a:r>
           </a:p>
           <a:p>
             <a:pPr lvl="1"/>
             <a:r>
-              <a:rPr lang="en-US"/>
+              <a:rPr lang="en-US" smtClean="0"/>
               <a:t>Second level</a:t>
             </a:r>
           </a:p>
           <a:p>
             <a:pPr lvl="2"/>
             <a:r>
-              <a:rPr lang="en-US"/>
+              <a:rPr lang="en-US" smtClean="0"/>
               <a:t>Third level</a:t>
             </a:r>
           </a:p>
           <a:p>
             <a:pPr lvl="3"/>
             <a:r>
-              <a:rPr lang="en-US"/>
+              <a:rPr lang="en-US" smtClean="0"/>
               <a:t>Fourth level</a:t>
             </a:r>
           </a:p>
           <a:p>
             <a:pPr lvl="4"/>
             <a:r>
-              <a:rPr lang="en-US"/>
+              <a:rPr lang="en-US" smtClean="0"/>
               <a:t>Fifth level</a:t>
             </a:r>
+            <a:endParaRPr lang="en-US"/>
           </a:p>
         </p:txBody>
       </p:sp>
@@ -1191,7 +660,7 @@
           <a:p>
             <a:fld id="{5BCAD085-E8A6-8845-BD4E-CB4CCA059FC4}" type="datetimeFigureOut">
               <a:rPr lang="en-US" smtClean="0"/>
-              <a:t>6/4/2026</a:t>
+              <a:t>1/27/13</a:t>
             </a:fld>
             <a:endParaRPr lang="en-US"/>
           </a:p>
@@ -1285,9 +754,10 @@
           <a:lstStyle/>
           <a:p>
             <a:r>
-              <a:rPr lang="en-US"/>
+              <a:rPr lang="en-US" smtClean="0"/>
               <a:t>Click to edit Master title style</a:t>
             </a:r>
+            <a:endParaRPr lang="en-US"/>
           </a:p>
         </p:txBody>
       </p:sp>
@@ -1308,37 +778,38 @@
           <a:p>
             <a:pPr lvl="0"/>
             <a:r>
-              <a:rPr lang="en-US"/>
+              <a:rPr lang="en-US" smtClean="0"/>
               <a:t>Click to edit Master text styles</a:t>
             </a:r>
           </a:p>
           <a:p>
             <a:pPr lvl="1"/>
             <a:r>
-              <a:rPr lang="en-US"/>
+              <a:rPr lang="en-US" smtClean="0"/>
               <a:t>Second level</a:t>
             </a:r>
           </a:p>
           <a:p>
             <a:pPr lvl="2"/>
             <a:r>
-              <a:rPr lang="en-US"/>
+              <a:rPr lang="en-US" smtClean="0"/>
               <a:t>Third level</a:t>
             </a:r>
           </a:p>
           <a:p>
             <a:pPr lvl="3"/>
             <a:r>
-              <a:rPr lang="en-US"/>
+              <a:rPr lang="en-US" smtClean="0"/>
               <a:t>Fourth level</a:t>
             </a:r>
           </a:p>
           <a:p>
             <a:pPr lvl="4"/>
             <a:r>
-              <a:rPr lang="en-US"/>
+              <a:rPr lang="en-US" smtClean="0"/>
               <a:t>Fifth level</a:t>
             </a:r>
+            <a:endParaRPr lang="en-US"/>
           </a:p>
         </p:txBody>
       </p:sp>
@@ -1359,7 +830,7 @@
           <a:p>
             <a:fld id="{5BCAD085-E8A6-8845-BD4E-CB4CCA059FC4}" type="datetimeFigureOut">
               <a:rPr lang="en-US" smtClean="0"/>
-              <a:t>6/4/2026</a:t>
+              <a:t>1/27/13</a:t>
             </a:fld>
             <a:endParaRPr lang="en-US"/>
           </a:p>
@@ -1462,9 +933,10 @@
           </a:lstStyle>
           <a:p>
             <a:r>
-              <a:rPr lang="en-US"/>
+              <a:rPr lang="en-US" smtClean="0"/>
               <a:t>Click to edit Master title style</a:t>
             </a:r>
+            <a:endParaRPr lang="en-US"/>
           </a:p>
         </p:txBody>
       </p:sp>
@@ -1581,7 +1053,7 @@
           <a:p>
             <a:pPr lvl="0"/>
             <a:r>
-              <a:rPr lang="en-US"/>
+              <a:rPr lang="en-US" smtClean="0"/>
               <a:t>Click to edit Master text styles</a:t>
             </a:r>
           </a:p>
@@ -1604,7 +1076,7 @@
           <a:p>
             <a:fld id="{5BCAD085-E8A6-8845-BD4E-CB4CCA059FC4}" type="datetimeFigureOut">
               <a:rPr lang="en-US" smtClean="0"/>
-              <a:t>6/4/2026</a:t>
+              <a:t>1/27/13</a:t>
             </a:fld>
             <a:endParaRPr lang="en-US"/>
           </a:p>
@@ -1698,9 +1170,10 @@
           <a:lstStyle/>
           <a:p>
             <a:r>
-              <a:rPr lang="en-US"/>
+              <a:rPr lang="en-US" smtClean="0"/>
               <a:t>Click to edit Master title style</a:t>
             </a:r>
+            <a:endParaRPr lang="en-US"/>
           </a:p>
         </p:txBody>
       </p:sp>
@@ -1754,37 +1227,38 @@
           <a:p>
             <a:pPr lvl="0"/>
             <a:r>
-              <a:rPr lang="en-US"/>
+              <a:rPr lang="en-US" smtClean="0"/>
               <a:t>Click to edit Master text styles</a:t>
             </a:r>
           </a:p>
           <a:p>
             <a:pPr lvl="1"/>
             <a:r>
-              <a:rPr lang="en-US"/>
+              <a:rPr lang="en-US" smtClean="0"/>
               <a:t>Second level</a:t>
             </a:r>
           </a:p>
           <a:p>
             <a:pPr lvl="2"/>
             <a:r>
-              <a:rPr lang="en-US"/>
+              <a:rPr lang="en-US" smtClean="0"/>
               <a:t>Third level</a:t>
             </a:r>
           </a:p>
           <a:p>
             <a:pPr lvl="3"/>
             <a:r>
-              <a:rPr lang="en-US"/>
+              <a:rPr lang="en-US" smtClean="0"/>
               <a:t>Fourth level</a:t>
             </a:r>
           </a:p>
           <a:p>
             <a:pPr lvl="4"/>
             <a:r>
-              <a:rPr lang="en-US"/>
+              <a:rPr lang="en-US" smtClean="0"/>
               <a:t>Fifth level</a:t>
             </a:r>
+            <a:endParaRPr lang="en-US"/>
           </a:p>
         </p:txBody>
       </p:sp>
@@ -1838,37 +1312,38 @@
           <a:p>
             <a:pPr lvl="0"/>
             <a:r>
-              <a:rPr lang="en-US"/>
+              <a:rPr lang="en-US" smtClean="0"/>
               <a:t>Click to edit Master text styles</a:t>
             </a:r>
           </a:p>
           <a:p>
             <a:pPr lvl="1"/>
             <a:r>
-              <a:rPr lang="en-US"/>
+              <a:rPr lang="en-US" smtClean="0"/>
               <a:t>Second level</a:t>
             </a:r>
           </a:p>
           <a:p>
             <a:pPr lvl="2"/>
             <a:r>
-              <a:rPr lang="en-US"/>
+              <a:rPr lang="en-US" smtClean="0"/>
               <a:t>Third level</a:t>
             </a:r>
           </a:p>
           <a:p>
             <a:pPr lvl="3"/>
             <a:r>
-              <a:rPr lang="en-US"/>
+              <a:rPr lang="en-US" smtClean="0"/>
               <a:t>Fourth level</a:t>
             </a:r>
           </a:p>
           <a:p>
             <a:pPr lvl="4"/>
             <a:r>
-              <a:rPr lang="en-US"/>
+              <a:rPr lang="en-US" smtClean="0"/>
               <a:t>Fifth level</a:t>
             </a:r>
+            <a:endParaRPr lang="en-US"/>
           </a:p>
         </p:txBody>
       </p:sp>
@@ -1889,7 +1364,7 @@
           <a:p>
             <a:fld id="{5BCAD085-E8A6-8845-BD4E-CB4CCA059FC4}" type="datetimeFigureOut">
               <a:rPr lang="en-US" smtClean="0"/>
-              <a:t>6/4/2026</a:t>
+              <a:t>1/27/13</a:t>
             </a:fld>
             <a:endParaRPr lang="en-US"/>
           </a:p>
@@ -1987,9 +1462,10 @@
           </a:lstStyle>
           <a:p>
             <a:r>
-              <a:rPr lang="en-US"/>
+              <a:rPr lang="en-US" smtClean="0"/>
               <a:t>Click to edit Master title style</a:t>
             </a:r>
+            <a:endParaRPr lang="en-US"/>
           </a:p>
         </p:txBody>
       </p:sp>
@@ -2052,7 +1528,7 @@
           <a:p>
             <a:pPr lvl="0"/>
             <a:r>
-              <a:rPr lang="en-US"/>
+              <a:rPr lang="en-US" smtClean="0"/>
               <a:t>Click to edit Master text styles</a:t>
             </a:r>
           </a:p>
@@ -2108,37 +1584,38 @@
           <a:p>
             <a:pPr lvl="0"/>
             <a:r>
-              <a:rPr lang="en-US"/>
+              <a:rPr lang="en-US" smtClean="0"/>
               <a:t>Click to edit Master text styles</a:t>
             </a:r>
           </a:p>
           <a:p>
             <a:pPr lvl="1"/>
             <a:r>
-              <a:rPr lang="en-US"/>
+              <a:rPr lang="en-US" smtClean="0"/>
               <a:t>Second level</a:t>
             </a:r>
           </a:p>
           <a:p>
             <a:pPr lvl="2"/>
             <a:r>
-              <a:rPr lang="en-US"/>
+              <a:rPr lang="en-US" smtClean="0"/>
               <a:t>Third level</a:t>
             </a:r>
           </a:p>
           <a:p>
             <a:pPr lvl="3"/>
             <a:r>
-              <a:rPr lang="en-US"/>
+              <a:rPr lang="en-US" smtClean="0"/>
               <a:t>Fourth level</a:t>
             </a:r>
           </a:p>
           <a:p>
             <a:pPr lvl="4"/>
             <a:r>
-              <a:rPr lang="en-US"/>
+              <a:rPr lang="en-US" smtClean="0"/>
               <a:t>Fifth level</a:t>
             </a:r>
+            <a:endParaRPr lang="en-US"/>
           </a:p>
         </p:txBody>
       </p:sp>
@@ -2201,7 +1678,7 @@
           <a:p>
             <a:pPr lvl="0"/>
             <a:r>
-              <a:rPr lang="en-US"/>
+              <a:rPr lang="en-US" smtClean="0"/>
               <a:t>Click to edit Master text styles</a:t>
             </a:r>
           </a:p>
@@ -2257,37 +1734,38 @@
           <a:p>
             <a:pPr lvl="0"/>
             <a:r>
-              <a:rPr lang="en-US"/>
+              <a:rPr lang="en-US" smtClean="0"/>
               <a:t>Click to edit Master text styles</a:t>
             </a:r>
           </a:p>
           <a:p>
             <a:pPr lvl="1"/>
             <a:r>
-              <a:rPr lang="en-US"/>
+              <a:rPr lang="en-US" smtClean="0"/>
               <a:t>Second level</a:t>
             </a:r>
           </a:p>
           <a:p>
             <a:pPr lvl="2"/>
             <a:r>
-              <a:rPr lang="en-US"/>
+              <a:rPr lang="en-US" smtClean="0"/>
               <a:t>Third level</a:t>
             </a:r>
           </a:p>
           <a:p>
             <a:pPr lvl="3"/>
             <a:r>
-              <a:rPr lang="en-US"/>
+              <a:rPr lang="en-US" smtClean="0"/>
               <a:t>Fourth level</a:t>
             </a:r>
           </a:p>
           <a:p>
             <a:pPr lvl="4"/>
             <a:r>
-              <a:rPr lang="en-US"/>
+              <a:rPr lang="en-US" smtClean="0"/>
               <a:t>Fifth level</a:t>
             </a:r>
+            <a:endParaRPr lang="en-US"/>
           </a:p>
         </p:txBody>
       </p:sp>
@@ -2308,7 +1786,7 @@
           <a:p>
             <a:fld id="{5BCAD085-E8A6-8845-BD4E-CB4CCA059FC4}" type="datetimeFigureOut">
               <a:rPr lang="en-US" smtClean="0"/>
-              <a:t>6/4/2026</a:t>
+              <a:t>1/27/13</a:t>
             </a:fld>
             <a:endParaRPr lang="en-US"/>
           </a:p>
@@ -2402,9 +1880,10 @@
           <a:lstStyle/>
           <a:p>
             <a:r>
-              <a:rPr lang="en-US"/>
+              <a:rPr lang="en-US" smtClean="0"/>
               <a:t>Click to edit Master title style</a:t>
             </a:r>
+            <a:endParaRPr lang="en-US"/>
           </a:p>
         </p:txBody>
       </p:sp>
@@ -2425,7 +1904,7 @@
           <a:p>
             <a:fld id="{5BCAD085-E8A6-8845-BD4E-CB4CCA059FC4}" type="datetimeFigureOut">
               <a:rPr lang="en-US" smtClean="0"/>
-              <a:t>6/4/2026</a:t>
+              <a:t>1/27/13</a:t>
             </a:fld>
             <a:endParaRPr lang="en-US"/>
           </a:p>
@@ -2520,7 +1999,7 @@
           <a:p>
             <a:fld id="{5BCAD085-E8A6-8845-BD4E-CB4CCA059FC4}" type="datetimeFigureOut">
               <a:rPr lang="en-US" smtClean="0"/>
-              <a:t>6/4/2026</a:t>
+              <a:t>1/27/13</a:t>
             </a:fld>
             <a:endParaRPr lang="en-US"/>
           </a:p>
@@ -2623,9 +2102,10 @@
           </a:lstStyle>
           <a:p>
             <a:r>
-              <a:rPr lang="en-US"/>
+              <a:rPr lang="en-US" smtClean="0"/>
               <a:t>Click to edit Master title style</a:t>
             </a:r>
+            <a:endParaRPr lang="en-US"/>
           </a:p>
         </p:txBody>
       </p:sp>
@@ -2679,37 +2159,38 @@
           <a:p>
             <a:pPr lvl="0"/>
             <a:r>
-              <a:rPr lang="en-US"/>
+              <a:rPr lang="en-US" smtClean="0"/>
               <a:t>Click to edit Master text styles</a:t>
             </a:r>
           </a:p>
           <a:p>
             <a:pPr lvl="1"/>
             <a:r>
-              <a:rPr lang="en-US"/>
+              <a:rPr lang="en-US" smtClean="0"/>
               <a:t>Second level</a:t>
             </a:r>
           </a:p>
           <a:p>
             <a:pPr lvl="2"/>
             <a:r>
-              <a:rPr lang="en-US"/>
+              <a:rPr lang="en-US" smtClean="0"/>
               <a:t>Third level</a:t>
             </a:r>
           </a:p>
           <a:p>
             <a:pPr lvl="3"/>
             <a:r>
-              <a:rPr lang="en-US"/>
+              <a:rPr lang="en-US" smtClean="0"/>
               <a:t>Fourth level</a:t>
             </a:r>
           </a:p>
           <a:p>
             <a:pPr lvl="4"/>
             <a:r>
-              <a:rPr lang="en-US"/>
+              <a:rPr lang="en-US" smtClean="0"/>
               <a:t>Fifth level</a:t>
             </a:r>
+            <a:endParaRPr lang="en-US"/>
           </a:p>
         </p:txBody>
       </p:sp>
@@ -2772,7 +2253,7 @@
           <a:p>
             <a:pPr lvl="0"/>
             <a:r>
-              <a:rPr lang="en-US"/>
+              <a:rPr lang="en-US" smtClean="0"/>
               <a:t>Click to edit Master text styles</a:t>
             </a:r>
           </a:p>
@@ -2795,7 +2276,7 @@
           <a:p>
             <a:fld id="{5BCAD085-E8A6-8845-BD4E-CB4CCA059FC4}" type="datetimeFigureOut">
               <a:rPr lang="en-US" smtClean="0"/>
-              <a:t>6/4/2026</a:t>
+              <a:t>1/27/13</a:t>
             </a:fld>
             <a:endParaRPr lang="en-US"/>
           </a:p>
@@ -2898,9 +2379,10 @@
           </a:lstStyle>
           <a:p>
             <a:r>
-              <a:rPr lang="en-US"/>
+              <a:rPr lang="en-US" smtClean="0"/>
               <a:t>Click to edit Master title style</a:t>
             </a:r>
+            <a:endParaRPr lang="en-US"/>
           </a:p>
         </p:txBody>
       </p:sp>
@@ -3024,7 +2506,7 @@
           <a:p>
             <a:pPr lvl="0"/>
             <a:r>
-              <a:rPr lang="en-US"/>
+              <a:rPr lang="en-US" smtClean="0"/>
               <a:t>Click to edit Master text styles</a:t>
             </a:r>
           </a:p>
@@ -3047,7 +2529,7 @@
           <a:p>
             <a:fld id="{5BCAD085-E8A6-8845-BD4E-CB4CCA059FC4}" type="datetimeFigureOut">
               <a:rPr lang="en-US" smtClean="0"/>
-              <a:t>6/4/2026</a:t>
+              <a:t>1/27/13</a:t>
             </a:fld>
             <a:endParaRPr lang="en-US"/>
           </a:p>
@@ -3156,9 +2638,10 @@
           <a:lstStyle/>
           <a:p>
             <a:r>
-              <a:rPr lang="en-US"/>
+              <a:rPr lang="en-US" smtClean="0"/>
               <a:t>Click to edit Master title style</a:t>
             </a:r>
+            <a:endParaRPr lang="en-US"/>
           </a:p>
         </p:txBody>
       </p:sp>
@@ -3189,37 +2672,38 @@
           <a:p>
             <a:pPr lvl="0"/>
             <a:r>
-              <a:rPr lang="en-US"/>
+              <a:rPr lang="en-US" smtClean="0"/>
               <a:t>Click to edit Master text styles</a:t>
             </a:r>
           </a:p>
           <a:p>
             <a:pPr lvl="1"/>
             <a:r>
-              <a:rPr lang="en-US"/>
+              <a:rPr lang="en-US" smtClean="0"/>
               <a:t>Second level</a:t>
             </a:r>
           </a:p>
           <a:p>
             <a:pPr lvl="2"/>
             <a:r>
-              <a:rPr lang="en-US"/>
+              <a:rPr lang="en-US" smtClean="0"/>
               <a:t>Third level</a:t>
             </a:r>
           </a:p>
           <a:p>
             <a:pPr lvl="3"/>
             <a:r>
-              <a:rPr lang="en-US"/>
+              <a:rPr lang="en-US" smtClean="0"/>
               <a:t>Fourth level</a:t>
             </a:r>
           </a:p>
           <a:p>
             <a:pPr lvl="4"/>
             <a:r>
-              <a:rPr lang="en-US"/>
+              <a:rPr lang="en-US" smtClean="0"/>
               <a:t>Fifth level</a:t>
             </a:r>
+            <a:endParaRPr lang="en-US"/>
           </a:p>
         </p:txBody>
       </p:sp>
@@ -3258,7 +2742,7 @@
           <a:p>
             <a:fld id="{5BCAD085-E8A6-8845-BD4E-CB4CCA059FC4}" type="datetimeFigureOut">
               <a:rPr lang="en-US" smtClean="0"/>
-              <a:t>6/4/2026</a:t>
+              <a:t>1/27/13</a:t>
             </a:fld>
             <a:endParaRPr lang="en-US"/>
           </a:p>
@@ -3617,7 +3101,7 @@
 </file>
 
 <file path=ppt/slides/slide1.xml><?xml version="1.0" encoding="utf-8"?>
-<p:sld xmlns:a="http://schemas.openxmlformats.org/drawingml/2006/main" xmlns:r="http://schemas.openxmlformats.org/officeDocument/2006/relationships" xmlns:p="http://schemas.openxmlformats.org/presentationml/2006/main">
+<p:sld xmlns:a="http://schemas.openxmlformats.org/drawingml/2006/main" xmlns:p="http://schemas.openxmlformats.org/presentationml/2006/main" xmlns:r="http://schemas.openxmlformats.org/officeDocument/2006/relationships">
   <p:cSld>
     <p:bg>
       <p:bgPr>
@@ -3633,14 +3117,7 @@
         <p:cNvGrpSpPr/>
         <p:nvPr/>
       </p:nvGrpSpPr>
-      <p:grpSpPr>
-        <a:xfrm>
-          <a:off x="0" y="0"/>
-          <a:ext cx="0" cy="0"/>
-          <a:chOff x="0" y="0"/>
-          <a:chExt cx="0" cy="0"/>
-        </a:xfrm>
-      </p:grpSpPr>
+      <p:grpSpPr/>
       <p:sp>
         <p:nvSpPr>
           <p:cNvPr id="2" name="Rectangle 1"/>
@@ -3682,7 +3159,6 @@
           <a:lstStyle/>
           <a:p>
             <a:pPr algn="ctr"/>
-            <a:endParaRPr/>
           </a:p>
         </p:txBody>
       </p:sp>
@@ -3703,7 +3179,7 @@
           <a:noFill/>
         </p:spPr>
         <p:txBody>
-          <a:bodyPr wrap="square" lIns="0" tIns="0" rIns="0" bIns="0" anchor="t">
+          <a:bodyPr wrap="square" anchor="t" lIns="0" rIns="0" tIns="0" bIns="0">
             <a:spAutoFit/>
           </a:bodyPr>
           <a:lstStyle/>
@@ -3769,7 +3245,7 @@
           <a:noFill/>
         </p:spPr>
         <p:txBody>
-          <a:bodyPr wrap="square" lIns="0" tIns="0" rIns="0" bIns="0" anchor="t">
+          <a:bodyPr wrap="square" anchor="t" lIns="0" rIns="0" tIns="0" bIns="0">
             <a:spAutoFit/>
           </a:bodyPr>
           <a:lstStyle/>
@@ -3804,7 +3280,7 @@
 </file>
 
 <file path=ppt/slides/slide10.xml><?xml version="1.0" encoding="utf-8"?>
-<p:sld xmlns:a="http://schemas.openxmlformats.org/drawingml/2006/main" xmlns:r="http://schemas.openxmlformats.org/officeDocument/2006/relationships" xmlns:p="http://schemas.openxmlformats.org/presentationml/2006/main">
+<p:sld xmlns:a="http://schemas.openxmlformats.org/drawingml/2006/main" xmlns:p="http://schemas.openxmlformats.org/presentationml/2006/main" xmlns:r="http://schemas.openxmlformats.org/officeDocument/2006/relationships">
   <p:cSld>
     <p:bg>
       <p:bgPr>
@@ -3820,14 +3296,7 @@
         <p:cNvGrpSpPr/>
         <p:nvPr/>
       </p:nvGrpSpPr>
-      <p:grpSpPr>
-        <a:xfrm>
-          <a:off x="0" y="0"/>
-          <a:ext cx="0" cy="0"/>
-          <a:chOff x="0" y="0"/>
-          <a:chExt cx="0" cy="0"/>
-        </a:xfrm>
-      </p:grpSpPr>
+      <p:grpSpPr/>
       <p:sp>
         <p:nvSpPr>
           <p:cNvPr id="2" name="TextBox 1"/>
@@ -3837,7 +3306,7 @@
         <p:spPr>
           <a:xfrm>
             <a:off x="640080" y="457200"/>
-            <a:ext cx="10881360" cy="430887"/>
+            <a:ext cx="10881360" cy="960120"/>
           </a:xfrm>
           <a:prstGeom prst="rect">
             <a:avLst/>
@@ -3845,35 +3314,36 @@
           <a:noFill/>
         </p:spPr>
         <p:txBody>
-          <a:bodyPr wrap="square" lIns="0" tIns="0" rIns="0" bIns="0" anchor="t">
+          <a:bodyPr wrap="square" anchor="t" lIns="0" rIns="0" tIns="0" bIns="0">
             <a:spAutoFit/>
           </a:bodyPr>
           <a:lstStyle/>
           <a:p>
             <a:r>
-              <a:rPr sz="2800" b="1" i="0" dirty="0">
+              <a:rPr sz="2800" b="1" i="0">
                 <a:solidFill>
                   <a:srgbClr val="2A2929"/>
                 </a:solidFill>
                 <a:latin typeface="Roboto"/>
               </a:rPr>
-              <a:t>Design redundancy — remove the </a:t>
-            </a:r>
-            <a:r>
-              <a:rPr sz="2800" b="1" i="0" dirty="0" err="1">
-                <a:solidFill>
-                  <a:srgbClr val="2A2929"/>
-                </a:solidFill>
-                <a:latin typeface="Roboto"/>
-              </a:rPr>
-              <a:t>SPoFs</a:t>
-            </a:r>
-            <a:endParaRPr sz="2800" b="1" i="0" dirty="0">
-              <a:solidFill>
-                <a:srgbClr val="2A2929"/>
-              </a:solidFill>
-              <a:latin typeface="Roboto"/>
-            </a:endParaRPr>
+              <a:t>Design redundancy — remove the SPoFs</a:t>
+            </a:r>
+          </a:p>
+          <a:p>
+            <a:pPr>
+              <a:spcBef>
+                <a:spcPts val="200"/>
+              </a:spcBef>
+            </a:pPr>
+            <a:r>
+              <a:rPr sz="1800" b="0" i="1">
+                <a:solidFill>
+                  <a:srgbClr val="D68E10"/>
+                </a:solidFill>
+                <a:latin typeface="Roboto Light"/>
+              </a:rPr>
+              <a:t>ICTCLD502 · Design HA S9</a:t>
+            </a:r>
           </a:p>
         </p:txBody>
       </p:sp>
@@ -3885,7 +3355,7 @@
         </p:nvSpPr>
         <p:spPr>
           <a:xfrm>
-            <a:off x="658368" y="895961"/>
+            <a:off x="658368" y="1371600"/>
             <a:ext cx="1463040" cy="50800"/>
           </a:xfrm>
           <a:prstGeom prst="rect">
@@ -3918,7 +3388,6 @@
           <a:lstStyle/>
           <a:p>
             <a:pPr algn="ctr"/>
-            <a:endParaRPr/>
           </a:p>
         </p:txBody>
       </p:sp>
@@ -3931,7 +3400,7 @@
         <p:spPr>
           <a:xfrm>
             <a:off x="658368" y="1691640"/>
-            <a:ext cx="5486400" cy="2277418"/>
+            <a:ext cx="10881360" cy="4480560"/>
           </a:xfrm>
           <a:prstGeom prst="rect">
             <a:avLst/>
@@ -3939,7 +3408,7 @@
           <a:noFill/>
         </p:spPr>
         <p:txBody>
-          <a:bodyPr wrap="square" lIns="0" tIns="0" rIns="0" bIns="0" anchor="t">
+          <a:bodyPr wrap="square" anchor="t" lIns="0" rIns="0" tIns="0" bIns="0">
             <a:spAutoFit/>
           </a:bodyPr>
           <a:lstStyle/>
@@ -3993,7 +3462,16 @@
                 </a:solidFill>
                 <a:latin typeface="Roboto"/>
               </a:rPr>
-              <a:t>■  For each SPOF, add redundancy across compute, storage and network so no single failure stops the service.</a:t>
+              <a:t>■  </a:t>
+            </a:r>
+            <a:r>
+              <a:rPr sz="1800" b="1" i="0">
+                <a:solidFill>
+                  <a:srgbClr val="27B5CE"/>
+                </a:solidFill>
+                <a:latin typeface="Roboto"/>
+              </a:rPr>
+              <a:t>For each SPOF, add redundancy across compute, storage and network so no single failure stops the service.</a:t>
             </a:r>
           </a:p>
           <a:p>
@@ -4070,7 +3548,6 @@
           <a:lstStyle/>
           <a:p>
             <a:pPr algn="ctr"/>
-            <a:endParaRPr/>
           </a:p>
         </p:txBody>
       </p:sp>
@@ -4091,7 +3568,7 @@
           <a:noFill/>
         </p:spPr>
         <p:txBody>
-          <a:bodyPr wrap="square" lIns="0" tIns="0" rIns="0" bIns="0" anchor="t">
+          <a:bodyPr wrap="square" anchor="t" lIns="0" rIns="0" tIns="0" bIns="0">
             <a:spAutoFit/>
           </a:bodyPr>
           <a:lstStyle/>
@@ -4134,7 +3611,7 @@
           <a:noFill/>
         </p:spPr>
         <p:txBody>
-          <a:bodyPr wrap="square" lIns="0" tIns="0" rIns="0" bIns="0" anchor="t">
+          <a:bodyPr wrap="square" anchor="t" lIns="0" rIns="0" tIns="0" bIns="0">
             <a:spAutoFit/>
           </a:bodyPr>
           <a:lstStyle/>
@@ -4152,53 +3629,6 @@
           </a:p>
         </p:txBody>
       </p:sp>
-      <p:pic>
-        <p:nvPicPr>
-          <p:cNvPr id="8" name="Picture 2" descr="A basic three tier architecture with an Auto Scaling group.">
-            <a:extLst>
-              <a:ext uri="{FF2B5EF4-FFF2-40B4-BE49-F238E27FC236}">
-                <a16:creationId xmlns:a16="http://schemas.microsoft.com/office/drawing/2014/main" id="{896E272D-552D-600A-3C0F-69F0FD842A5B}"/>
-              </a:ext>
-            </a:extLst>
-          </p:cNvPr>
-          <p:cNvPicPr>
-            <a:picLocks noChangeAspect="1" noChangeArrowheads="1"/>
-          </p:cNvPicPr>
-          <p:nvPr/>
-        </p:nvPicPr>
-        <p:blipFill rotWithShape="1">
-          <a:blip r:embed="rId2">
-            <a:extLst>
-              <a:ext uri="{28A0092B-C50C-407E-A947-70E740481C1C}">
-                <a14:useLocalDpi xmlns:a14="http://schemas.microsoft.com/office/drawing/2010/main" val="0"/>
-              </a:ext>
-            </a:extLst>
-          </a:blip>
-          <a:srcRect l="909" t="10126" r="890" b="5522"/>
-          <a:stretch>
-            <a:fillRect/>
-          </a:stretch>
-        </p:blipFill>
-        <p:spPr bwMode="auto">
-          <a:xfrm>
-            <a:off x="6961487" y="1422400"/>
-            <a:ext cx="4742833" cy="3785992"/>
-          </a:xfrm>
-          <a:prstGeom prst="rect">
-            <a:avLst/>
-          </a:prstGeom>
-          <a:noFill/>
-          <a:extLst>
-            <a:ext uri="{909E8E84-426E-40DD-AFC4-6F175D3DCCD1}">
-              <a14:hiddenFill xmlns:a14="http://schemas.microsoft.com/office/drawing/2010/main">
-                <a:solidFill>
-                  <a:srgbClr val="FFFFFF"/>
-                </a:solidFill>
-              </a14:hiddenFill>
-            </a:ext>
-          </a:extLst>
-        </p:spPr>
-      </p:pic>
     </p:spTree>
   </p:cSld>
   <p:clrMapOvr>
@@ -4208,7 +3638,7 @@
 </file>
 
 <file path=ppt/slides/slide11.xml><?xml version="1.0" encoding="utf-8"?>
-<p:sld xmlns:a="http://schemas.openxmlformats.org/drawingml/2006/main" xmlns:r="http://schemas.openxmlformats.org/officeDocument/2006/relationships" xmlns:p="http://schemas.openxmlformats.org/presentationml/2006/main">
+<p:sld xmlns:a="http://schemas.openxmlformats.org/drawingml/2006/main" xmlns:p="http://schemas.openxmlformats.org/presentationml/2006/main" xmlns:r="http://schemas.openxmlformats.org/officeDocument/2006/relationships">
   <p:cSld>
     <p:bg>
       <p:bgPr>
@@ -4224,14 +3654,7 @@
         <p:cNvGrpSpPr/>
         <p:nvPr/>
       </p:nvGrpSpPr>
-      <p:grpSpPr>
-        <a:xfrm>
-          <a:off x="0" y="0"/>
-          <a:ext cx="0" cy="0"/>
-          <a:chOff x="0" y="0"/>
-          <a:chExt cx="0" cy="0"/>
-        </a:xfrm>
-      </p:grpSpPr>
+      <p:grpSpPr/>
       <p:sp>
         <p:nvSpPr>
           <p:cNvPr id="2" name="TextBox 1"/>
@@ -4241,7 +3664,7 @@
         <p:spPr>
           <a:xfrm>
             <a:off x="640080" y="457200"/>
-            <a:ext cx="10881360" cy="733534"/>
+            <a:ext cx="10881360" cy="960120"/>
           </a:xfrm>
           <a:prstGeom prst="rect">
             <a:avLst/>
@@ -4249,13 +3672,13 @@
           <a:noFill/>
         </p:spPr>
         <p:txBody>
-          <a:bodyPr wrap="square" lIns="0" tIns="0" rIns="0" bIns="0" anchor="t">
+          <a:bodyPr wrap="square" anchor="t" lIns="0" rIns="0" tIns="0" bIns="0">
             <a:spAutoFit/>
           </a:bodyPr>
           <a:lstStyle/>
           <a:p>
             <a:r>
-              <a:rPr sz="2800" b="1" i="0" dirty="0">
+              <a:rPr sz="2800" b="1" i="0">
                 <a:solidFill>
                   <a:srgbClr val="2A2929"/>
                 </a:solidFill>
@@ -4271,13 +3694,13 @@
               </a:spcBef>
             </a:pPr>
             <a:r>
-              <a:rPr sz="1800" b="0" i="1" dirty="0">
+              <a:rPr sz="1800" b="0" i="1">
                 <a:solidFill>
                   <a:srgbClr val="D68E10"/>
                 </a:solidFill>
                 <a:latin typeface="Roboto Light"/>
               </a:rPr>
-              <a:t>ACA M10 S41</a:t>
+              <a:t>ACA M10 S41 · ICTCLD502 · Design HA S7–S8</a:t>
             </a:r>
           </a:p>
         </p:txBody>
@@ -4323,7 +3746,6 @@
           <a:lstStyle/>
           <a:p>
             <a:pPr algn="ctr"/>
-            <a:endParaRPr/>
           </a:p>
         </p:txBody>
       </p:sp>
@@ -4344,7 +3766,7 @@
           <a:noFill/>
         </p:spPr>
         <p:txBody>
-          <a:bodyPr wrap="square" lIns="0" tIns="0" rIns="0" bIns="0" anchor="t">
+          <a:bodyPr wrap="square" anchor="t" lIns="0" rIns="0" tIns="0" bIns="0">
             <a:spAutoFit/>
           </a:bodyPr>
           <a:lstStyle/>
@@ -4398,7 +3820,16 @@
                 </a:solidFill>
                 <a:latin typeface="Roboto"/>
               </a:rPr>
-              <a:t>■  The load balancer routes only to healthy targets; the ASG keeps capacity in each AZ; the database fails over automatically.</a:t>
+              <a:t>■  </a:t>
+            </a:r>
+            <a:r>
+              <a:rPr sz="1700" b="1" i="0">
+                <a:solidFill>
+                  <a:srgbClr val="27B5CE"/>
+                </a:solidFill>
+                <a:latin typeface="Roboto"/>
+              </a:rPr>
+              <a:t>The load balancer routes only to healthy targets; the ASG keeps capacity in each AZ; the database fails over automatically.</a:t>
             </a:r>
           </a:p>
           <a:p>
@@ -4434,9 +3865,33 @@
           </a:p>
         </p:txBody>
       </p:sp>
-      <p:sp>
-        <p:nvSpPr>
-          <p:cNvPr id="7" name="Rectangle 6"/>
+      <p:pic>
+        <p:nvPicPr>
+          <p:cNvPr id="5" name="Picture 4" descr="cross-az-ha-architecture.png"/>
+          <p:cNvPicPr>
+            <a:picLocks noChangeAspect="1"/>
+          </p:cNvPicPr>
+          <p:nvPr/>
+        </p:nvPicPr>
+        <p:blipFill>
+          <a:blip r:embed="rId2"/>
+          <a:stretch>
+            <a:fillRect/>
+          </a:stretch>
+        </p:blipFill>
+        <p:spPr>
+          <a:xfrm>
+            <a:off x="6581104" y="1783080"/>
+            <a:ext cx="4760031" cy="4023360"/>
+          </a:xfrm>
+          <a:prstGeom prst="rect">
+            <a:avLst/>
+          </a:prstGeom>
+        </p:spPr>
+      </p:pic>
+      <p:sp>
+        <p:nvSpPr>
+          <p:cNvPr id="6" name="Rectangle 5"/>
           <p:cNvSpPr/>
           <p:nvPr/>
         </p:nvSpPr>
@@ -4475,7 +3930,49 @@
           <a:lstStyle/>
           <a:p>
             <a:pPr algn="ctr"/>
-            <a:endParaRPr/>
+          </a:p>
+        </p:txBody>
+      </p:sp>
+      <p:sp>
+        <p:nvSpPr>
+          <p:cNvPr id="7" name="TextBox 6"/>
+          <p:cNvSpPr txBox="1"/>
+          <p:nvPr/>
+        </p:nvSpPr>
+        <p:spPr>
+          <a:xfrm>
+            <a:off x="502920" y="6400800"/>
+            <a:ext cx="5486400" cy="320040"/>
+          </a:xfrm>
+          <a:prstGeom prst="rect">
+            <a:avLst/>
+          </a:prstGeom>
+          <a:noFill/>
+        </p:spPr>
+        <p:txBody>
+          <a:bodyPr wrap="square" anchor="t" lIns="0" rIns="0" tIns="0" bIns="0">
+            <a:spAutoFit/>
+          </a:bodyPr>
+          <a:lstStyle/>
+          <a:p>
+            <a:r>
+              <a:rPr sz="1100" b="1" i="0">
+                <a:solidFill>
+                  <a:srgbClr val="2A2929"/>
+                </a:solidFill>
+                <a:latin typeface="Roboto"/>
+              </a:rPr>
+              <a:t>Kangan </a:t>
+            </a:r>
+            <a:r>
+              <a:rPr sz="1100" b="1" i="0">
+                <a:solidFill>
+                  <a:srgbClr val="D68E10"/>
+                </a:solidFill>
+                <a:latin typeface="Roboto"/>
+              </a:rPr>
+              <a:t>Institute</a:t>
+            </a:r>
           </a:p>
         </p:txBody>
       </p:sp>
@@ -4487,8 +3984,8 @@
         </p:nvSpPr>
         <p:spPr>
           <a:xfrm>
-            <a:off x="502920" y="6400800"/>
-            <a:ext cx="5486400" cy="320040"/>
+            <a:off x="10515600" y="6400800"/>
+            <a:ext cx="1188720" cy="320040"/>
           </a:xfrm>
           <a:prstGeom prst="rect">
             <a:avLst/>
@@ -4496,54 +3993,11 @@
           <a:noFill/>
         </p:spPr>
         <p:txBody>
-          <a:bodyPr wrap="square" lIns="0" tIns="0" rIns="0" bIns="0" anchor="t">
+          <a:bodyPr wrap="square" anchor="t" lIns="0" rIns="0" tIns="0" bIns="0">
             <a:spAutoFit/>
           </a:bodyPr>
           <a:lstStyle/>
           <a:p>
-            <a:r>
-              <a:rPr sz="1100" b="1" i="0">
-                <a:solidFill>
-                  <a:srgbClr val="2A2929"/>
-                </a:solidFill>
-                <a:latin typeface="Roboto"/>
-              </a:rPr>
-              <a:t>Kangan </a:t>
-            </a:r>
-            <a:r>
-              <a:rPr sz="1100" b="1" i="0">
-                <a:solidFill>
-                  <a:srgbClr val="D68E10"/>
-                </a:solidFill>
-                <a:latin typeface="Roboto"/>
-              </a:rPr>
-              <a:t>Institute</a:t>
-            </a:r>
-          </a:p>
-        </p:txBody>
-      </p:sp>
-      <p:sp>
-        <p:nvSpPr>
-          <p:cNvPr id="9" name="TextBox 8"/>
-          <p:cNvSpPr txBox="1"/>
-          <p:nvPr/>
-        </p:nvSpPr>
-        <p:spPr>
-          <a:xfrm>
-            <a:off x="10515600" y="6400800"/>
-            <a:ext cx="1188720" cy="320040"/>
-          </a:xfrm>
-          <a:prstGeom prst="rect">
-            <a:avLst/>
-          </a:prstGeom>
-          <a:noFill/>
-        </p:spPr>
-        <p:txBody>
-          <a:bodyPr wrap="square" lIns="0" tIns="0" rIns="0" bIns="0" anchor="t">
-            <a:spAutoFit/>
-          </a:bodyPr>
-          <a:lstStyle/>
-          <a:p>
             <a:pPr algn="r"/>
             <a:r>
               <a:rPr sz="1100" b="0" i="0">
@@ -4557,42 +4011,6 @@
           </a:p>
         </p:txBody>
       </p:sp>
-      <p:pic>
-        <p:nvPicPr>
-          <p:cNvPr id="10" name="Picture 9">
-            <a:extLst>
-              <a:ext uri="{FF2B5EF4-FFF2-40B4-BE49-F238E27FC236}">
-                <a16:creationId xmlns:a16="http://schemas.microsoft.com/office/drawing/2014/main" id="{784E2C81-01DD-ECFA-0D66-C11A2559D794}"/>
-              </a:ext>
-            </a:extLst>
-          </p:cNvPr>
-          <p:cNvPicPr>
-            <a:picLocks noChangeAspect="1"/>
-          </p:cNvPicPr>
-          <p:nvPr/>
-        </p:nvPicPr>
-        <p:blipFill>
-          <a:blip r:embed="rId2">
-            <a:extLst>
-              <a:ext uri="{28A0092B-C50C-407E-A947-70E740481C1C}">
-                <a14:useLocalDpi xmlns:a14="http://schemas.microsoft.com/office/drawing/2010/main" val="0"/>
-              </a:ext>
-            </a:extLst>
-          </a:blip>
-          <a:stretch>
-            <a:fillRect/>
-          </a:stretch>
-        </p:blipFill>
-        <p:spPr>
-          <a:xfrm>
-            <a:off x="7206890" y="457200"/>
-            <a:ext cx="3667543" cy="5515102"/>
-          </a:xfrm>
-          <a:prstGeom prst="rect">
-            <a:avLst/>
-          </a:prstGeom>
-        </p:spPr>
-      </p:pic>
     </p:spTree>
   </p:cSld>
   <p:clrMapOvr>
@@ -4602,7 +4020,7 @@
 </file>
 
 <file path=ppt/slides/slide12.xml><?xml version="1.0" encoding="utf-8"?>
-<p:sld xmlns:a="http://schemas.openxmlformats.org/drawingml/2006/main" xmlns:r="http://schemas.openxmlformats.org/officeDocument/2006/relationships" xmlns:p="http://schemas.openxmlformats.org/presentationml/2006/main">
+<p:sld xmlns:a="http://schemas.openxmlformats.org/drawingml/2006/main" xmlns:p="http://schemas.openxmlformats.org/presentationml/2006/main" xmlns:r="http://schemas.openxmlformats.org/officeDocument/2006/relationships">
   <p:cSld>
     <p:bg>
       <p:bgPr>
@@ -4618,14 +4036,7 @@
         <p:cNvGrpSpPr/>
         <p:nvPr/>
       </p:nvGrpSpPr>
-      <p:grpSpPr>
-        <a:xfrm>
-          <a:off x="0" y="0"/>
-          <a:ext cx="0" cy="0"/>
-          <a:chOff x="0" y="0"/>
-          <a:chExt cx="0" cy="0"/>
-        </a:xfrm>
-      </p:grpSpPr>
+      <p:grpSpPr/>
       <p:sp>
         <p:nvSpPr>
           <p:cNvPr id="2" name="TextBox 1"/>
@@ -4643,7 +4054,7 @@
           <a:noFill/>
         </p:spPr>
         <p:txBody>
-          <a:bodyPr wrap="square" lIns="0" tIns="0" rIns="0" bIns="0" anchor="t">
+          <a:bodyPr wrap="square" anchor="t" lIns="0" rIns="0" tIns="0" bIns="0">
             <a:spAutoFit/>
           </a:bodyPr>
           <a:lstStyle/>
@@ -4717,7 +4128,6 @@
           <a:lstStyle/>
           <a:p>
             <a:pPr algn="ctr"/>
-            <a:endParaRPr/>
           </a:p>
         </p:txBody>
       </p:sp>
@@ -4738,7 +4148,7 @@
           <a:noFill/>
         </p:spPr>
         <p:txBody>
-          <a:bodyPr wrap="square" lIns="0" tIns="0" rIns="0" bIns="0" anchor="t">
+          <a:bodyPr wrap="square" anchor="t" lIns="0" rIns="0" tIns="0" bIns="0">
             <a:spAutoFit/>
           </a:bodyPr>
           <a:lstStyle/>
@@ -4854,7 +4264,16 @@
                 </a:solidFill>
                 <a:latin typeface="Roboto"/>
               </a:rPr>
-              <a:t>■  Single NAT gateway → a NAT gateway per AZ.</a:t>
+              <a:t>■  </a:t>
+            </a:r>
+            <a:r>
+              <a:rPr sz="1800" b="1" i="0">
+                <a:solidFill>
+                  <a:srgbClr val="27B5CE"/>
+                </a:solidFill>
+                <a:latin typeface="Roboto"/>
+              </a:rPr>
+              <a:t>Single NAT gateway → a NAT gateway per AZ.</a:t>
             </a:r>
           </a:p>
         </p:txBody>
@@ -4900,7 +4319,6 @@
           <a:lstStyle/>
           <a:p>
             <a:pPr algn="ctr"/>
-            <a:endParaRPr/>
           </a:p>
         </p:txBody>
       </p:sp>
@@ -4921,7 +4339,7 @@
           <a:noFill/>
         </p:spPr>
         <p:txBody>
-          <a:bodyPr wrap="square" lIns="0" tIns="0" rIns="0" bIns="0" anchor="t">
+          <a:bodyPr wrap="square" anchor="t" lIns="0" rIns="0" tIns="0" bIns="0">
             <a:spAutoFit/>
           </a:bodyPr>
           <a:lstStyle/>
@@ -4964,7 +4382,7 @@
           <a:noFill/>
         </p:spPr>
         <p:txBody>
-          <a:bodyPr wrap="square" lIns="0" tIns="0" rIns="0" bIns="0" anchor="t">
+          <a:bodyPr wrap="square" anchor="t" lIns="0" rIns="0" tIns="0" bIns="0">
             <a:spAutoFit/>
           </a:bodyPr>
           <a:lstStyle/>
@@ -4991,7 +4409,7 @@
 </file>
 
 <file path=ppt/slides/slide13.xml><?xml version="1.0" encoding="utf-8"?>
-<p:sld xmlns:a="http://schemas.openxmlformats.org/drawingml/2006/main" xmlns:r="http://schemas.openxmlformats.org/officeDocument/2006/relationships" xmlns:p="http://schemas.openxmlformats.org/presentationml/2006/main">
+<p:sld xmlns:a="http://schemas.openxmlformats.org/drawingml/2006/main" xmlns:p="http://schemas.openxmlformats.org/presentationml/2006/main" xmlns:r="http://schemas.openxmlformats.org/officeDocument/2006/relationships">
   <p:cSld>
     <p:bg>
       <p:bgPr>
@@ -5007,14 +4425,7 @@
         <p:cNvGrpSpPr/>
         <p:nvPr/>
       </p:nvGrpSpPr>
-      <p:grpSpPr>
-        <a:xfrm>
-          <a:off x="0" y="0"/>
-          <a:ext cx="0" cy="0"/>
-          <a:chOff x="0" y="0"/>
-          <a:chExt cx="0" cy="0"/>
-        </a:xfrm>
-      </p:grpSpPr>
+      <p:grpSpPr/>
       <p:sp>
         <p:nvSpPr>
           <p:cNvPr id="2" name="TextBox 1"/>
@@ -5032,7 +4443,7 @@
           <a:noFill/>
         </p:spPr>
         <p:txBody>
-          <a:bodyPr wrap="square" lIns="0" tIns="0" rIns="0" bIns="0" anchor="t">
+          <a:bodyPr wrap="square" anchor="t" lIns="0" rIns="0" tIns="0" bIns="0">
             <a:spAutoFit/>
           </a:bodyPr>
           <a:lstStyle/>
@@ -5106,7 +4517,6 @@
           <a:lstStyle/>
           <a:p>
             <a:pPr algn="ctr"/>
-            <a:endParaRPr/>
           </a:p>
         </p:txBody>
       </p:sp>
@@ -5119,7 +4529,7 @@
         <p:spPr>
           <a:xfrm>
             <a:off x="658368" y="1691640"/>
-            <a:ext cx="10563814" cy="1404102"/>
+            <a:ext cx="10881360" cy="4480560"/>
           </a:xfrm>
           <a:prstGeom prst="rect">
             <a:avLst/>
@@ -5127,7 +4537,7 @@
           <a:noFill/>
         </p:spPr>
         <p:txBody>
-          <a:bodyPr wrap="square" lIns="0" tIns="0" rIns="0" bIns="0" anchor="t">
+          <a:bodyPr wrap="square" anchor="t" lIns="0" rIns="0" tIns="0" bIns="0">
             <a:spAutoFit/>
           </a:bodyPr>
           <a:lstStyle/>
@@ -5144,7 +4554,7 @@
               </a:spcAft>
             </a:pPr>
             <a:r>
-              <a:rPr sz="1800" b="1" i="0" dirty="0">
+              <a:rPr sz="1800" b="1" i="0">
                 <a:solidFill>
                   <a:srgbClr val="EDAB0C"/>
                 </a:solidFill>
@@ -5153,7 +4563,7 @@
               <a:t>■  </a:t>
             </a:r>
             <a:r>
-              <a:rPr sz="1800" b="0" i="0" dirty="0">
+              <a:rPr sz="1800" b="0" i="0">
                 <a:solidFill>
                   <a:srgbClr val="2A2929"/>
                 </a:solidFill>
@@ -5175,13 +4585,22 @@
               </a:spcAft>
             </a:pPr>
             <a:r>
-              <a:rPr sz="1800" b="1" i="0" dirty="0">
+              <a:rPr sz="1800" b="1" i="0">
                 <a:solidFill>
                   <a:srgbClr val="27B5CE"/>
                 </a:solidFill>
                 <a:latin typeface="Roboto"/>
               </a:rPr>
-              <a:t>■  RPO is unchanged (backups); RTO drops to minutes for an AZ or instance failure via automatic failover.</a:t>
+              <a:t>■  </a:t>
+            </a:r>
+            <a:r>
+              <a:rPr sz="1800" b="1" i="0">
+                <a:solidFill>
+                  <a:srgbClr val="27B5CE"/>
+                </a:solidFill>
+                <a:latin typeface="Roboto"/>
+              </a:rPr>
+              <a:t>RPO is unchanged (backups); RTO drops to minutes for an AZ or instance failure via automatic failover.</a:t>
             </a:r>
           </a:p>
           <a:p>
@@ -5197,7 +4616,7 @@
               </a:spcAft>
             </a:pPr>
             <a:r>
-              <a:rPr sz="1800" b="1" i="0" dirty="0">
+              <a:rPr sz="1800" b="1" i="0">
                 <a:solidFill>
                   <a:srgbClr val="EDAB0C"/>
                 </a:solidFill>
@@ -5206,7 +4625,7 @@
               <a:t>■  </a:t>
             </a:r>
             <a:r>
-              <a:rPr sz="1800" b="0" i="0" dirty="0">
+              <a:rPr sz="1800" b="0" i="0">
                 <a:solidFill>
                   <a:srgbClr val="2A2929"/>
                 </a:solidFill>
@@ -5258,7 +4677,6 @@
           <a:lstStyle/>
           <a:p>
             <a:pPr algn="ctr"/>
-            <a:endParaRPr/>
           </a:p>
         </p:txBody>
       </p:sp>
@@ -5279,7 +4697,7 @@
           <a:noFill/>
         </p:spPr>
         <p:txBody>
-          <a:bodyPr wrap="square" lIns="0" tIns="0" rIns="0" bIns="0" anchor="t">
+          <a:bodyPr wrap="square" anchor="t" lIns="0" rIns="0" tIns="0" bIns="0">
             <a:spAutoFit/>
           </a:bodyPr>
           <a:lstStyle/>
@@ -5322,7 +4740,7 @@
           <a:noFill/>
         </p:spPr>
         <p:txBody>
-          <a:bodyPr wrap="square" lIns="0" tIns="0" rIns="0" bIns="0" anchor="t">
+          <a:bodyPr wrap="square" anchor="t" lIns="0" rIns="0" tIns="0" bIns="0">
             <a:spAutoFit/>
           </a:bodyPr>
           <a:lstStyle/>
@@ -5340,36 +4758,6 @@
           </a:p>
         </p:txBody>
       </p:sp>
-      <p:pic>
-        <p:nvPicPr>
-          <p:cNvPr id="8" name="Picture 7">
-            <a:extLst>
-              <a:ext uri="{FF2B5EF4-FFF2-40B4-BE49-F238E27FC236}">
-                <a16:creationId xmlns:a16="http://schemas.microsoft.com/office/drawing/2014/main" id="{A81E23F8-15FC-42AC-00DE-E18463DC88B8}"/>
-              </a:ext>
-            </a:extLst>
-          </p:cNvPr>
-          <p:cNvPicPr>
-            <a:picLocks noChangeAspect="1"/>
-          </p:cNvPicPr>
-          <p:nvPr/>
-        </p:nvPicPr>
-        <p:blipFill>
-          <a:blip r:embed="rId3"/>
-          <a:stretch>
-            <a:fillRect/>
-          </a:stretch>
-        </p:blipFill>
-        <p:spPr>
-          <a:xfrm>
-            <a:off x="2196984" y="3364982"/>
-            <a:ext cx="7486582" cy="2891753"/>
-          </a:xfrm>
-          <a:prstGeom prst="rect">
-            <a:avLst/>
-          </a:prstGeom>
-        </p:spPr>
-      </p:pic>
     </p:spTree>
   </p:cSld>
   <p:clrMapOvr>
@@ -5379,7 +4767,7 @@
 </file>
 
 <file path=ppt/slides/slide14.xml><?xml version="1.0" encoding="utf-8"?>
-<p:sld xmlns:a="http://schemas.openxmlformats.org/drawingml/2006/main" xmlns:r="http://schemas.openxmlformats.org/officeDocument/2006/relationships" xmlns:p="http://schemas.openxmlformats.org/presentationml/2006/main">
+<p:sld xmlns:a="http://schemas.openxmlformats.org/drawingml/2006/main" xmlns:p="http://schemas.openxmlformats.org/presentationml/2006/main" xmlns:r="http://schemas.openxmlformats.org/officeDocument/2006/relationships">
   <p:cSld>
     <p:bg>
       <p:bgPr>
@@ -5395,14 +4783,7 @@
         <p:cNvGrpSpPr/>
         <p:nvPr/>
       </p:nvGrpSpPr>
-      <p:grpSpPr>
-        <a:xfrm>
-          <a:off x="0" y="0"/>
-          <a:ext cx="0" cy="0"/>
-          <a:chOff x="0" y="0"/>
-          <a:chExt cx="0" cy="0"/>
-        </a:xfrm>
-      </p:grpSpPr>
+      <p:grpSpPr/>
       <p:sp>
         <p:nvSpPr>
           <p:cNvPr id="2" name="Rectangle 1"/>
@@ -5444,7 +4825,6 @@
           <a:lstStyle/>
           <a:p>
             <a:pPr algn="ctr"/>
-            <a:endParaRPr/>
           </a:p>
         </p:txBody>
       </p:sp>
@@ -5518,7 +4898,7 @@
           <a:noFill/>
         </p:spPr>
         <p:txBody>
-          <a:bodyPr wrap="square" lIns="0" tIns="0" rIns="0" bIns="0" anchor="ctr">
+          <a:bodyPr wrap="square" anchor="ctr" lIns="0" rIns="0" tIns="0" bIns="0">
             <a:spAutoFit/>
           </a:bodyPr>
           <a:lstStyle/>
@@ -5552,7 +4932,7 @@
           <a:noFill/>
         </p:spPr>
         <p:txBody>
-          <a:bodyPr wrap="square" lIns="0" tIns="0" rIns="0" bIns="0" anchor="t">
+          <a:bodyPr wrap="square" anchor="t" lIns="0" rIns="0" tIns="0" bIns="0">
             <a:spAutoFit/>
           </a:bodyPr>
           <a:lstStyle/>
@@ -5725,7 +5105,6 @@
           <a:lstStyle/>
           <a:p>
             <a:pPr algn="ctr"/>
-            <a:endParaRPr/>
           </a:p>
         </p:txBody>
       </p:sp>
@@ -5746,7 +5125,7 @@
           <a:noFill/>
         </p:spPr>
         <p:txBody>
-          <a:bodyPr wrap="square" lIns="0" tIns="0" rIns="0" bIns="0" anchor="ctr">
+          <a:bodyPr wrap="square" anchor="ctr" lIns="0" rIns="0" tIns="0" bIns="0">
             <a:spAutoFit/>
           </a:bodyPr>
           <a:lstStyle/>
@@ -5804,7 +5183,6 @@
           <a:lstStyle/>
           <a:p>
             <a:pPr algn="ctr"/>
-            <a:endParaRPr/>
           </a:p>
         </p:txBody>
       </p:sp>
@@ -5825,7 +5203,7 @@
           <a:noFill/>
         </p:spPr>
         <p:txBody>
-          <a:bodyPr wrap="square" lIns="0" tIns="0" rIns="0" bIns="0" anchor="t">
+          <a:bodyPr wrap="square" anchor="t" lIns="0" rIns="0" tIns="0" bIns="0">
             <a:spAutoFit/>
           </a:bodyPr>
           <a:lstStyle/>
@@ -5868,7 +5246,7 @@
           <a:noFill/>
         </p:spPr>
         <p:txBody>
-          <a:bodyPr wrap="square" lIns="0" tIns="0" rIns="0" bIns="0" anchor="t">
+          <a:bodyPr wrap="square" anchor="t" lIns="0" rIns="0" tIns="0" bIns="0">
             <a:spAutoFit/>
           </a:bodyPr>
           <a:lstStyle/>
@@ -5895,7 +5273,7 @@
 </file>
 
 <file path=ppt/slides/slide15.xml><?xml version="1.0" encoding="utf-8"?>
-<p:sld xmlns:a="http://schemas.openxmlformats.org/drawingml/2006/main" xmlns:r="http://schemas.openxmlformats.org/officeDocument/2006/relationships" xmlns:p="http://schemas.openxmlformats.org/presentationml/2006/main">
+<p:sld xmlns:a="http://schemas.openxmlformats.org/drawingml/2006/main" xmlns:p="http://schemas.openxmlformats.org/presentationml/2006/main" xmlns:r="http://schemas.openxmlformats.org/officeDocument/2006/relationships">
   <p:cSld>
     <p:bg>
       <p:bgPr>
@@ -5911,14 +5289,7 @@
         <p:cNvGrpSpPr/>
         <p:nvPr/>
       </p:nvGrpSpPr>
-      <p:grpSpPr>
-        <a:xfrm>
-          <a:off x="0" y="0"/>
-          <a:ext cx="0" cy="0"/>
-          <a:chOff x="0" y="0"/>
-          <a:chExt cx="0" cy="0"/>
-        </a:xfrm>
-      </p:grpSpPr>
+      <p:grpSpPr/>
       <p:sp>
         <p:nvSpPr>
           <p:cNvPr id="2" name="TextBox 1"/>
@@ -5936,7 +5307,7 @@
           <a:noFill/>
         </p:spPr>
         <p:txBody>
-          <a:bodyPr wrap="square" lIns="0" tIns="0" rIns="0" bIns="0" anchor="t">
+          <a:bodyPr wrap="square" anchor="t" lIns="0" rIns="0" tIns="0" bIns="0">
             <a:spAutoFit/>
           </a:bodyPr>
           <a:lstStyle/>
@@ -6010,7 +5381,6 @@
           <a:lstStyle/>
           <a:p>
             <a:pPr algn="ctr"/>
-            <a:endParaRPr/>
           </a:p>
         </p:txBody>
       </p:sp>
@@ -6057,7 +5427,6 @@
           <a:lstStyle/>
           <a:p>
             <a:pPr algn="ctr"/>
-            <a:endParaRPr/>
           </a:p>
         </p:txBody>
       </p:sp>
@@ -6102,7 +5471,6 @@
           <a:lstStyle/>
           <a:p>
             <a:pPr algn="ctr"/>
-            <a:endParaRPr/>
           </a:p>
         </p:txBody>
       </p:sp>
@@ -6123,7 +5491,7 @@
           <a:noFill/>
         </p:spPr>
         <p:txBody>
-          <a:bodyPr wrap="square" lIns="0" tIns="0" rIns="0" bIns="0" anchor="ctr">
+          <a:bodyPr wrap="square" anchor="ctr" lIns="0" rIns="0" tIns="0" bIns="0">
             <a:spAutoFit/>
           </a:bodyPr>
           <a:lstStyle/>
@@ -6188,7 +5556,6 @@
           <a:lstStyle/>
           <a:p>
             <a:pPr algn="ctr"/>
-            <a:endParaRPr/>
           </a:p>
         </p:txBody>
       </p:sp>
@@ -6233,7 +5600,6 @@
           <a:lstStyle/>
           <a:p>
             <a:pPr algn="ctr"/>
-            <a:endParaRPr/>
           </a:p>
         </p:txBody>
       </p:sp>
@@ -6254,7 +5620,7 @@
           <a:noFill/>
         </p:spPr>
         <p:txBody>
-          <a:bodyPr wrap="square" lIns="0" tIns="0" rIns="0" bIns="0" anchor="ctr">
+          <a:bodyPr wrap="square" anchor="ctr" lIns="0" rIns="0" tIns="0" bIns="0">
             <a:spAutoFit/>
           </a:bodyPr>
           <a:lstStyle/>
@@ -6319,7 +5685,6 @@
           <a:lstStyle/>
           <a:p>
             <a:pPr algn="ctr"/>
-            <a:endParaRPr/>
           </a:p>
         </p:txBody>
       </p:sp>
@@ -6364,7 +5729,6 @@
           <a:lstStyle/>
           <a:p>
             <a:pPr algn="ctr"/>
-            <a:endParaRPr/>
           </a:p>
         </p:txBody>
       </p:sp>
@@ -6385,7 +5749,7 @@
           <a:noFill/>
         </p:spPr>
         <p:txBody>
-          <a:bodyPr wrap="square" lIns="0" tIns="0" rIns="0" bIns="0" anchor="ctr">
+          <a:bodyPr wrap="square" anchor="ctr" lIns="0" rIns="0" tIns="0" bIns="0">
             <a:spAutoFit/>
           </a:bodyPr>
           <a:lstStyle/>
@@ -6450,7 +5814,6 @@
           <a:lstStyle/>
           <a:p>
             <a:pPr algn="ctr"/>
-            <a:endParaRPr/>
           </a:p>
         </p:txBody>
       </p:sp>
@@ -6495,7 +5858,6 @@
           <a:lstStyle/>
           <a:p>
             <a:pPr algn="ctr"/>
-            <a:endParaRPr/>
           </a:p>
         </p:txBody>
       </p:sp>
@@ -6516,7 +5878,7 @@
           <a:noFill/>
         </p:spPr>
         <p:txBody>
-          <a:bodyPr wrap="square" lIns="0" tIns="0" rIns="0" bIns="0" anchor="ctr">
+          <a:bodyPr wrap="square" anchor="ctr" lIns="0" rIns="0" tIns="0" bIns="0">
             <a:spAutoFit/>
           </a:bodyPr>
           <a:lstStyle/>
@@ -6579,7 +5941,6 @@
           <a:lstStyle/>
           <a:p>
             <a:pPr algn="ctr"/>
-            <a:endParaRPr/>
           </a:p>
         </p:txBody>
       </p:sp>
@@ -6600,7 +5961,7 @@
           <a:noFill/>
         </p:spPr>
         <p:txBody>
-          <a:bodyPr wrap="square" lIns="0" tIns="0" rIns="0" bIns="0" anchor="t">
+          <a:bodyPr wrap="square" anchor="t" lIns="0" rIns="0" tIns="0" bIns="0">
             <a:spAutoFit/>
           </a:bodyPr>
           <a:lstStyle/>
@@ -6643,7 +6004,7 @@
           <a:noFill/>
         </p:spPr>
         <p:txBody>
-          <a:bodyPr wrap="square" lIns="0" tIns="0" rIns="0" bIns="0" anchor="t">
+          <a:bodyPr wrap="square" anchor="t" lIns="0" rIns="0" tIns="0" bIns="0">
             <a:spAutoFit/>
           </a:bodyPr>
           <a:lstStyle/>
@@ -6670,7 +6031,7 @@
 </file>
 
 <file path=ppt/slides/slide16.xml><?xml version="1.0" encoding="utf-8"?>
-<p:sld xmlns:a="http://schemas.openxmlformats.org/drawingml/2006/main" xmlns:r="http://schemas.openxmlformats.org/officeDocument/2006/relationships" xmlns:p="http://schemas.openxmlformats.org/presentationml/2006/main">
+<p:sld xmlns:a="http://schemas.openxmlformats.org/drawingml/2006/main" xmlns:p="http://schemas.openxmlformats.org/presentationml/2006/main" xmlns:r="http://schemas.openxmlformats.org/officeDocument/2006/relationships">
   <p:cSld>
     <p:bg>
       <p:bgPr>
@@ -6686,14 +6047,7 @@
         <p:cNvGrpSpPr/>
         <p:nvPr/>
       </p:nvGrpSpPr>
-      <p:grpSpPr>
-        <a:xfrm>
-          <a:off x="0" y="0"/>
-          <a:ext cx="0" cy="0"/>
-          <a:chOff x="0" y="0"/>
-          <a:chExt cx="0" cy="0"/>
-        </a:xfrm>
-      </p:grpSpPr>
+      <p:grpSpPr/>
       <p:sp>
         <p:nvSpPr>
           <p:cNvPr id="2" name="Rectangle 1"/>
@@ -6735,7 +6089,6 @@
           <a:lstStyle/>
           <a:p>
             <a:pPr algn="ctr"/>
-            <a:endParaRPr/>
           </a:p>
         </p:txBody>
       </p:sp>
@@ -6756,7 +6109,7 @@
           <a:noFill/>
         </p:spPr>
         <p:txBody>
-          <a:bodyPr wrap="square" lIns="0" tIns="0" rIns="0" bIns="0" anchor="t">
+          <a:bodyPr wrap="square" anchor="t" lIns="0" rIns="0" tIns="0" bIns="0">
             <a:spAutoFit/>
           </a:bodyPr>
           <a:lstStyle/>
@@ -6790,7 +6143,7 @@
           <a:noFill/>
         </p:spPr>
         <p:txBody>
-          <a:bodyPr wrap="square" lIns="0" tIns="0" rIns="0" bIns="0" anchor="t">
+          <a:bodyPr wrap="square" anchor="t" lIns="0" rIns="0" tIns="0" bIns="0">
             <a:spAutoFit/>
           </a:bodyPr>
           <a:lstStyle/>
@@ -6880,7 +6233,6 @@
           <a:lstStyle/>
           <a:p>
             <a:pPr algn="ctr"/>
-            <a:endParaRPr/>
           </a:p>
         </p:txBody>
       </p:sp>
@@ -6901,7 +6253,7 @@
           <a:noFill/>
         </p:spPr>
         <p:txBody>
-          <a:bodyPr wrap="square" lIns="0" tIns="0" rIns="0" bIns="0" anchor="t">
+          <a:bodyPr wrap="square" anchor="t" lIns="0" rIns="0" tIns="0" bIns="0">
             <a:spAutoFit/>
           </a:bodyPr>
           <a:lstStyle/>
@@ -6944,13 +6296,21 @@
           <a:noFill/>
         </p:spPr>
         <p:txBody>
-          <a:bodyPr wrap="square" lIns="0" tIns="0" rIns="0" bIns="0" anchor="t">
+          <a:bodyPr wrap="square" anchor="t" lIns="0" rIns="0" tIns="0" bIns="0">
             <a:spAutoFit/>
           </a:bodyPr>
           <a:lstStyle/>
           <a:p>
             <a:pPr algn="r"/>
-            <a:endParaRPr/>
+            <a:r>
+              <a:rPr sz="1100" b="0" i="0">
+                <a:solidFill>
+                  <a:srgbClr val="7A7A7A"/>
+                </a:solidFill>
+                <a:latin typeface="Roboto"/>
+              </a:rPr>
+              <a:t/>
+            </a:r>
           </a:p>
         </p:txBody>
       </p:sp>
@@ -6963,7 +6323,7 @@
 </file>
 
 <file path=ppt/slides/slide17.xml><?xml version="1.0" encoding="utf-8"?>
-<p:sld xmlns:a="http://schemas.openxmlformats.org/drawingml/2006/main" xmlns:r="http://schemas.openxmlformats.org/officeDocument/2006/relationships" xmlns:p="http://schemas.openxmlformats.org/presentationml/2006/main">
+<p:sld xmlns:a="http://schemas.openxmlformats.org/drawingml/2006/main" xmlns:p="http://schemas.openxmlformats.org/presentationml/2006/main" xmlns:r="http://schemas.openxmlformats.org/officeDocument/2006/relationships">
   <p:cSld>
     <p:bg>
       <p:bgPr>
@@ -6979,14 +6339,7 @@
         <p:cNvGrpSpPr/>
         <p:nvPr/>
       </p:nvGrpSpPr>
-      <p:grpSpPr>
-        <a:xfrm>
-          <a:off x="0" y="0"/>
-          <a:ext cx="0" cy="0"/>
-          <a:chOff x="0" y="0"/>
-          <a:chExt cx="0" cy="0"/>
-        </a:xfrm>
-      </p:grpSpPr>
+      <p:grpSpPr/>
       <p:sp>
         <p:nvSpPr>
           <p:cNvPr id="2" name="TextBox 1"/>
@@ -6996,7 +6349,7 @@
         <p:spPr>
           <a:xfrm>
             <a:off x="640080" y="457200"/>
-            <a:ext cx="10881360" cy="430887"/>
+            <a:ext cx="10881360" cy="960120"/>
           </a:xfrm>
           <a:prstGeom prst="rect">
             <a:avLst/>
@@ -7004,19 +6357,35 @@
           <a:noFill/>
         </p:spPr>
         <p:txBody>
-          <a:bodyPr wrap="square" lIns="0" tIns="0" rIns="0" bIns="0" anchor="t">
+          <a:bodyPr wrap="square" anchor="t" lIns="0" rIns="0" tIns="0" bIns="0">
             <a:spAutoFit/>
           </a:bodyPr>
           <a:lstStyle/>
           <a:p>
             <a:r>
-              <a:rPr sz="2800" b="1" i="0" dirty="0">
+              <a:rPr sz="2800" b="1" i="0">
                 <a:solidFill>
                   <a:srgbClr val="2A2929"/>
                 </a:solidFill>
                 <a:latin typeface="Roboto"/>
               </a:rPr>
               <a:t>What an HA design documents</a:t>
+            </a:r>
+          </a:p>
+          <a:p>
+            <a:pPr>
+              <a:spcBef>
+                <a:spcPts val="200"/>
+              </a:spcBef>
+            </a:pPr>
+            <a:r>
+              <a:rPr sz="1800" b="0" i="1">
+                <a:solidFill>
+                  <a:srgbClr val="D68E10"/>
+                </a:solidFill>
+                <a:latin typeface="Roboto Light"/>
+              </a:rPr>
+              <a:t>ICTCLD502 · Design HA S14</a:t>
             </a:r>
           </a:p>
         </p:txBody>
@@ -7029,7 +6398,7 @@
         </p:nvSpPr>
         <p:spPr>
           <a:xfrm>
-            <a:off x="658368" y="926187"/>
+            <a:off x="658368" y="1371600"/>
             <a:ext cx="1463040" cy="50800"/>
           </a:xfrm>
           <a:prstGeom prst="rect">
@@ -7062,7 +6431,6 @@
           <a:lstStyle/>
           <a:p>
             <a:pPr algn="ctr"/>
-            <a:endParaRPr/>
           </a:p>
         </p:txBody>
       </p:sp>
@@ -7083,7 +6451,7 @@
           <a:noFill/>
         </p:spPr>
         <p:txBody>
-          <a:bodyPr wrap="square" lIns="0" tIns="0" rIns="0" bIns="0" anchor="t">
+          <a:bodyPr wrap="square" anchor="t" lIns="0" rIns="0" tIns="0" bIns="0">
             <a:spAutoFit/>
           </a:bodyPr>
           <a:lstStyle/>
@@ -7199,7 +6567,16 @@
                 </a:solidFill>
                 <a:latin typeface="Roboto"/>
               </a:rPr>
-              <a:t>■  RTO/RPO table — recovery objectives per component and overall; scaling plans — what scales, how, and the trigger.</a:t>
+              <a:t>■  </a:t>
+            </a:r>
+            <a:r>
+              <a:rPr sz="1800" b="1" i="0">
+                <a:solidFill>
+                  <a:srgbClr val="205F61"/>
+                </a:solidFill>
+                <a:latin typeface="Roboto"/>
+              </a:rPr>
+              <a:t>RTO/RPO table — recovery objectives per component and overall; scaling plans — what scales, how, and the trigger.</a:t>
             </a:r>
           </a:p>
         </p:txBody>
@@ -7245,7 +6622,6 @@
           <a:lstStyle/>
           <a:p>
             <a:pPr algn="ctr"/>
-            <a:endParaRPr/>
           </a:p>
         </p:txBody>
       </p:sp>
@@ -7266,7 +6642,7 @@
           <a:noFill/>
         </p:spPr>
         <p:txBody>
-          <a:bodyPr wrap="square" lIns="0" tIns="0" rIns="0" bIns="0" anchor="t">
+          <a:bodyPr wrap="square" anchor="t" lIns="0" rIns="0" tIns="0" bIns="0">
             <a:spAutoFit/>
           </a:bodyPr>
           <a:lstStyle/>
@@ -7309,7 +6685,7 @@
           <a:noFill/>
         </p:spPr>
         <p:txBody>
-          <a:bodyPr wrap="square" lIns="0" tIns="0" rIns="0" bIns="0" anchor="t">
+          <a:bodyPr wrap="square" anchor="t" lIns="0" rIns="0" tIns="0" bIns="0">
             <a:spAutoFit/>
           </a:bodyPr>
           <a:lstStyle/>
@@ -7336,7 +6712,7 @@
 </file>
 
 <file path=ppt/slides/slide18.xml><?xml version="1.0" encoding="utf-8"?>
-<p:sld xmlns:a="http://schemas.openxmlformats.org/drawingml/2006/main" xmlns:r="http://schemas.openxmlformats.org/officeDocument/2006/relationships" xmlns:p="http://schemas.openxmlformats.org/presentationml/2006/main">
+<p:sld xmlns:a="http://schemas.openxmlformats.org/drawingml/2006/main" xmlns:p="http://schemas.openxmlformats.org/presentationml/2006/main" xmlns:r="http://schemas.openxmlformats.org/officeDocument/2006/relationships">
   <p:cSld>
     <p:bg>
       <p:bgPr>
@@ -7352,14 +6728,7 @@
         <p:cNvGrpSpPr/>
         <p:nvPr/>
       </p:nvGrpSpPr>
-      <p:grpSpPr>
-        <a:xfrm>
-          <a:off x="0" y="0"/>
-          <a:ext cx="0" cy="0"/>
-          <a:chOff x="0" y="0"/>
-          <a:chExt cx="0" cy="0"/>
-        </a:xfrm>
-      </p:grpSpPr>
+      <p:grpSpPr/>
       <p:sp>
         <p:nvSpPr>
           <p:cNvPr id="2" name="TextBox 1"/>
@@ -7369,7 +6738,7 @@
         <p:spPr>
           <a:xfrm>
             <a:off x="640080" y="457200"/>
-            <a:ext cx="10881360" cy="430887"/>
+            <a:ext cx="10881360" cy="960120"/>
           </a:xfrm>
           <a:prstGeom prst="rect">
             <a:avLst/>
@@ -7377,19 +6746,35 @@
           <a:noFill/>
         </p:spPr>
         <p:txBody>
-          <a:bodyPr wrap="square" lIns="0" tIns="0" rIns="0" bIns="0" anchor="t">
+          <a:bodyPr wrap="square" anchor="t" lIns="0" rIns="0" tIns="0" bIns="0">
             <a:spAutoFit/>
           </a:bodyPr>
           <a:lstStyle/>
           <a:p>
             <a:r>
-              <a:rPr sz="2800" b="1" i="0" dirty="0">
+              <a:rPr sz="2800" b="1" i="0">
                 <a:solidFill>
                   <a:srgbClr val="2A2929"/>
                 </a:solidFill>
                 <a:latin typeface="Roboto"/>
               </a:rPr>
               <a:t>Draw the HA topology</a:t>
+            </a:r>
+          </a:p>
+          <a:p>
+            <a:pPr>
+              <a:spcBef>
+                <a:spcPts val="200"/>
+              </a:spcBef>
+            </a:pPr>
+            <a:r>
+              <a:rPr sz="1800" b="0" i="1">
+                <a:solidFill>
+                  <a:srgbClr val="D68E10"/>
+                </a:solidFill>
+                <a:latin typeface="Roboto Light"/>
+              </a:rPr>
+              <a:t>ICTCLD502 · Evaluating availability S12–S14</a:t>
             </a:r>
           </a:p>
         </p:txBody>
@@ -7402,7 +6787,7 @@
         </p:nvSpPr>
         <p:spPr>
           <a:xfrm>
-            <a:off x="658368" y="932906"/>
+            <a:off x="658368" y="1371600"/>
             <a:ext cx="1463040" cy="50800"/>
           </a:xfrm>
           <a:prstGeom prst="rect">
@@ -7435,7 +6820,6 @@
           <a:lstStyle/>
           <a:p>
             <a:pPr algn="ctr"/>
-            <a:endParaRPr/>
           </a:p>
         </p:txBody>
       </p:sp>
@@ -7448,7 +6832,7 @@
         <p:spPr>
           <a:xfrm>
             <a:off x="658368" y="1691640"/>
-            <a:ext cx="5687014" cy="3243837"/>
+            <a:ext cx="10881360" cy="4480560"/>
           </a:xfrm>
           <a:prstGeom prst="rect">
             <a:avLst/>
@@ -7456,7 +6840,7 @@
           <a:noFill/>
         </p:spPr>
         <p:txBody>
-          <a:bodyPr wrap="square" lIns="0" tIns="0" rIns="0" bIns="0" anchor="t">
+          <a:bodyPr wrap="square" anchor="t" lIns="0" rIns="0" tIns="0" bIns="0">
             <a:spAutoFit/>
           </a:bodyPr>
           <a:lstStyle/>
@@ -7473,7 +6857,7 @@
               </a:spcAft>
             </a:pPr>
             <a:r>
-              <a:rPr sz="1800" b="1" i="0" dirty="0">
+              <a:rPr sz="1800" b="1" i="0">
                 <a:solidFill>
                   <a:srgbClr val="EDAB0C"/>
                 </a:solidFill>
@@ -7482,7 +6866,7 @@
               <a:t>■  </a:t>
             </a:r>
             <a:r>
-              <a:rPr sz="1800" b="0" i="0" dirty="0">
+              <a:rPr sz="1800" b="0" i="0">
                 <a:solidFill>
                   <a:srgbClr val="2A2929"/>
                 </a:solidFill>
@@ -7504,7 +6888,7 @@
               </a:spcAft>
             </a:pPr>
             <a:r>
-              <a:rPr sz="1800" b="1" i="0" dirty="0">
+              <a:rPr sz="1800" b="1" i="0">
                 <a:solidFill>
                   <a:srgbClr val="EDAB0C"/>
                 </a:solidFill>
@@ -7513,7 +6897,7 @@
               <a:t>■  </a:t>
             </a:r>
             <a:r>
-              <a:rPr sz="1800" b="0" i="0" dirty="0">
+              <a:rPr sz="1800" b="0" i="0">
                 <a:solidFill>
                   <a:srgbClr val="2A2929"/>
                 </a:solidFill>
@@ -7535,93 +6919,23 @@
               </a:spcAft>
             </a:pPr>
             <a:r>
-              <a:rPr sz="1800" b="1" i="0" dirty="0">
+              <a:rPr sz="1800" b="1" i="0">
                 <a:solidFill>
                   <a:srgbClr val="205F61"/>
                 </a:solidFill>
                 <a:latin typeface="Roboto"/>
               </a:rPr>
-              <a:t>■  Use the scenario's network-diagram conventions (the same draw.io style as the baseline diagram).</a:t>
-            </a:r>
-            <a:endParaRPr lang="en-US" sz="1800" b="1" i="0" dirty="0">
-              <a:solidFill>
-                <a:srgbClr val="205F61"/>
-              </a:solidFill>
-              <a:latin typeface="Roboto"/>
-            </a:endParaRPr>
-          </a:p>
-          <a:p>
-            <a:pPr marL="0" indent="0">
-              <a:lnSpc>
-                <a:spcPct val="105000"/>
-              </a:lnSpc>
-              <a:spcBef>
-                <a:spcPts val="0"/>
-              </a:spcBef>
-              <a:spcAft>
-                <a:spcPts val="1000"/>
-              </a:spcAft>
-            </a:pPr>
-            <a:endParaRPr lang="en-AU" b="1" dirty="0">
-              <a:solidFill>
-                <a:srgbClr val="205F61"/>
-              </a:solidFill>
-              <a:latin typeface="Roboto"/>
-            </a:endParaRPr>
-          </a:p>
-          <a:p>
-            <a:pPr>
-              <a:lnSpc>
-                <a:spcPct val="105000"/>
-              </a:lnSpc>
-              <a:spcAft>
-                <a:spcPts val="1000"/>
-              </a:spcAft>
-            </a:pPr>
-            <a:r>
-              <a:rPr lang="en-AU" dirty="0">
-                <a:latin typeface="Roboto" panose="02000000000000000000" pitchFamily="2" charset="0"/>
-                <a:ea typeface="Roboto" panose="02000000000000000000" pitchFamily="2" charset="0"/>
-                <a:cs typeface="Roboto" panose="02000000000000000000" pitchFamily="2" charset="0"/>
-              </a:rPr>
-              <a:t>Lesson: </a:t>
-            </a:r>
-            <a:r>
-              <a:rPr lang="en-AU" dirty="0">
-                <a:latin typeface="Roboto" panose="02000000000000000000" pitchFamily="2" charset="0"/>
-                <a:ea typeface="Roboto" panose="02000000000000000000" pitchFamily="2" charset="0"/>
-                <a:cs typeface="Roboto" panose="02000000000000000000" pitchFamily="2" charset="0"/>
-                <a:hlinkClick r:id="rId2"/>
-              </a:rPr>
-              <a:t>https://drawio-app.com/network-diagrams/</a:t>
-            </a:r>
-            <a:r>
-              <a:rPr lang="en-AU" dirty="0">
-                <a:latin typeface="Roboto" panose="02000000000000000000" pitchFamily="2" charset="0"/>
-                <a:ea typeface="Roboto" panose="02000000000000000000" pitchFamily="2" charset="0"/>
-                <a:cs typeface="Roboto" panose="02000000000000000000" pitchFamily="2" charset="0"/>
-              </a:rPr>
-              <a:t> </a:t>
-            </a:r>
-          </a:p>
-          <a:p>
-            <a:pPr marL="0" indent="0">
-              <a:lnSpc>
-                <a:spcPct val="105000"/>
-              </a:lnSpc>
-              <a:spcBef>
-                <a:spcPts val="0"/>
-              </a:spcBef>
-              <a:spcAft>
-                <a:spcPts val="1000"/>
-              </a:spcAft>
-            </a:pPr>
-            <a:endParaRPr sz="1800" b="1" i="0" dirty="0">
-              <a:solidFill>
-                <a:srgbClr val="205F61"/>
-              </a:solidFill>
-              <a:latin typeface="Roboto"/>
-            </a:endParaRPr>
+              <a:t>■  </a:t>
+            </a:r>
+            <a:r>
+              <a:rPr sz="1800" b="1" i="0">
+                <a:solidFill>
+                  <a:srgbClr val="205F61"/>
+                </a:solidFill>
+                <a:latin typeface="Roboto"/>
+              </a:rPr>
+              <a:t>Use the scenario's network-diagram conventions (the same draw.io style as the baseline diagram).</a:t>
+            </a:r>
           </a:p>
         </p:txBody>
       </p:sp>
@@ -7666,7 +6980,6 @@
           <a:lstStyle/>
           <a:p>
             <a:pPr algn="ctr"/>
-            <a:endParaRPr/>
           </a:p>
         </p:txBody>
       </p:sp>
@@ -7687,7 +7000,7 @@
           <a:noFill/>
         </p:spPr>
         <p:txBody>
-          <a:bodyPr wrap="square" lIns="0" tIns="0" rIns="0" bIns="0" anchor="t">
+          <a:bodyPr wrap="square" anchor="t" lIns="0" rIns="0" tIns="0" bIns="0">
             <a:spAutoFit/>
           </a:bodyPr>
           <a:lstStyle/>
@@ -7730,7 +7043,7 @@
           <a:noFill/>
         </p:spPr>
         <p:txBody>
-          <a:bodyPr wrap="square" lIns="0" tIns="0" rIns="0" bIns="0" anchor="t">
+          <a:bodyPr wrap="square" anchor="t" lIns="0" rIns="0" tIns="0" bIns="0">
             <a:spAutoFit/>
           </a:bodyPr>
           <a:lstStyle/>
@@ -7748,52 +7061,6 @@
           </a:p>
         </p:txBody>
       </p:sp>
-      <p:pic>
-        <p:nvPicPr>
-          <p:cNvPr id="8" name="Picture 2" descr="AWS Diagram - Learn What is a AWS Architecture Diagram and More&#10;&#10;From https://www.smartdraw.com/aws-diagram&#10;">
-            <a:extLst>
-              <a:ext uri="{FF2B5EF4-FFF2-40B4-BE49-F238E27FC236}">
-                <a16:creationId xmlns:a16="http://schemas.microsoft.com/office/drawing/2014/main" id="{E6B22434-F66D-5EEA-29EC-B5CCF15210CC}"/>
-              </a:ext>
-            </a:extLst>
-          </p:cNvPr>
-          <p:cNvPicPr>
-            <a:picLocks noChangeAspect="1" noChangeArrowheads="1"/>
-          </p:cNvPicPr>
-          <p:nvPr/>
-        </p:nvPicPr>
-        <p:blipFill>
-          <a:blip r:embed="rId3">
-            <a:extLst>
-              <a:ext uri="{28A0092B-C50C-407E-A947-70E740481C1C}">
-                <a14:useLocalDpi xmlns:a14="http://schemas.microsoft.com/office/drawing/2010/main" val="0"/>
-              </a:ext>
-            </a:extLst>
-          </a:blip>
-          <a:stretch>
-            <a:fillRect/>
-          </a:stretch>
-        </p:blipFill>
-        <p:spPr bwMode="auto">
-          <a:xfrm>
-            <a:off x="6240475" y="1050405"/>
-            <a:ext cx="5632871" cy="4533774"/>
-          </a:xfrm>
-          <a:prstGeom prst="rect">
-            <a:avLst/>
-          </a:prstGeom>
-          <a:noFill/>
-          <a:extLst>
-            <a:ext uri="{909E8E84-426E-40DD-AFC4-6F175D3DCCD1}">
-              <a14:hiddenFill xmlns:a14="http://schemas.microsoft.com/office/drawing/2010/main">
-                <a:solidFill>
-                  <a:srgbClr val="FFFFFF"/>
-                </a:solidFill>
-              </a14:hiddenFill>
-            </a:ext>
-          </a:extLst>
-        </p:spPr>
-      </p:pic>
     </p:spTree>
   </p:cSld>
   <p:clrMapOvr>
@@ -7803,7 +7070,7 @@
 </file>
 
 <file path=ppt/slides/slide19.xml><?xml version="1.0" encoding="utf-8"?>
-<p:sld xmlns:a="http://schemas.openxmlformats.org/drawingml/2006/main" xmlns:r="http://schemas.openxmlformats.org/officeDocument/2006/relationships" xmlns:p="http://schemas.openxmlformats.org/presentationml/2006/main">
+<p:sld xmlns:a="http://schemas.openxmlformats.org/drawingml/2006/main" xmlns:p="http://schemas.openxmlformats.org/presentationml/2006/main" xmlns:r="http://schemas.openxmlformats.org/officeDocument/2006/relationships">
   <p:cSld>
     <p:bg>
       <p:bgPr>
@@ -7819,14 +7086,7 @@
         <p:cNvGrpSpPr/>
         <p:nvPr/>
       </p:nvGrpSpPr>
-      <p:grpSpPr>
-        <a:xfrm>
-          <a:off x="0" y="0"/>
-          <a:ext cx="0" cy="0"/>
-          <a:chOff x="0" y="0"/>
-          <a:chExt cx="0" cy="0"/>
-        </a:xfrm>
-      </p:grpSpPr>
+      <p:grpSpPr/>
       <p:sp>
         <p:nvSpPr>
           <p:cNvPr id="2" name="TextBox 1"/>
@@ -7836,7 +7096,7 @@
         <p:spPr>
           <a:xfrm>
             <a:off x="640080" y="457200"/>
-            <a:ext cx="10881360" cy="430887"/>
+            <a:ext cx="10881360" cy="960120"/>
           </a:xfrm>
           <a:prstGeom prst="rect">
             <a:avLst/>
@@ -7844,19 +7104,35 @@
           <a:noFill/>
         </p:spPr>
         <p:txBody>
-          <a:bodyPr wrap="square" lIns="0" tIns="0" rIns="0" bIns="0" anchor="t">
+          <a:bodyPr wrap="square" anchor="t" lIns="0" rIns="0" tIns="0" bIns="0">
             <a:spAutoFit/>
           </a:bodyPr>
           <a:lstStyle/>
           <a:p>
             <a:r>
-              <a:rPr sz="2800" b="1" i="0" dirty="0">
+              <a:rPr sz="2800" b="1" i="0">
                 <a:solidFill>
                   <a:srgbClr val="2A2929"/>
                 </a:solidFill>
                 <a:latin typeface="Roboto"/>
               </a:rPr>
               <a:t>Plan the implementation &amp; simulation</a:t>
+            </a:r>
+          </a:p>
+          <a:p>
+            <a:pPr>
+              <a:spcBef>
+                <a:spcPts val="200"/>
+              </a:spcBef>
+            </a:pPr>
+            <a:r>
+              <a:rPr sz="1800" b="0" i="1">
+                <a:solidFill>
+                  <a:srgbClr val="D68E10"/>
+                </a:solidFill>
+                <a:latin typeface="Roboto Light"/>
+              </a:rPr>
+              <a:t>sets up Topic 13</a:t>
             </a:r>
           </a:p>
         </p:txBody>
@@ -7869,7 +7145,7 @@
         </p:nvSpPr>
         <p:spPr>
           <a:xfrm>
-            <a:off x="640080" y="1027279"/>
+            <a:off x="658368" y="1371600"/>
             <a:ext cx="1463040" cy="50800"/>
           </a:xfrm>
           <a:prstGeom prst="rect">
@@ -7902,7 +7178,6 @@
           <a:lstStyle/>
           <a:p>
             <a:pPr algn="ctr"/>
-            <a:endParaRPr/>
           </a:p>
         </p:txBody>
       </p:sp>
@@ -7923,7 +7198,7 @@
           <a:noFill/>
         </p:spPr>
         <p:txBody>
-          <a:bodyPr wrap="square" lIns="0" tIns="0" rIns="0" bIns="0" anchor="t">
+          <a:bodyPr wrap="square" anchor="t" lIns="0" rIns="0" tIns="0" bIns="0">
             <a:spAutoFit/>
           </a:bodyPr>
           <a:lstStyle/>
@@ -7977,7 +7252,16 @@
                 </a:solidFill>
                 <a:latin typeface="Roboto"/>
               </a:rPr>
-              <a:t>■  Simulation plan — the failures and resizes you'll run to prove fault tolerance (AZ/instance failure, database failover, resize under load).</a:t>
+              <a:t>■  </a:t>
+            </a:r>
+            <a:r>
+              <a:rPr sz="1800" b="1" i="0">
+                <a:solidFill>
+                  <a:srgbClr val="205F61"/>
+                </a:solidFill>
+                <a:latin typeface="Roboto"/>
+              </a:rPr>
+              <a:t>Simulation plan — the failures and resizes you'll run to prove fault tolerance (AZ/instance failure, database failover, resize under load).</a:t>
             </a:r>
           </a:p>
           <a:p>
@@ -8054,7 +7338,6 @@
           <a:lstStyle/>
           <a:p>
             <a:pPr algn="ctr"/>
-            <a:endParaRPr/>
           </a:p>
         </p:txBody>
       </p:sp>
@@ -8075,7 +7358,7 @@
           <a:noFill/>
         </p:spPr>
         <p:txBody>
-          <a:bodyPr wrap="square" lIns="0" tIns="0" rIns="0" bIns="0" anchor="t">
+          <a:bodyPr wrap="square" anchor="t" lIns="0" rIns="0" tIns="0" bIns="0">
             <a:spAutoFit/>
           </a:bodyPr>
           <a:lstStyle/>
@@ -8118,7 +7401,7 @@
           <a:noFill/>
         </p:spPr>
         <p:txBody>
-          <a:bodyPr wrap="square" lIns="0" tIns="0" rIns="0" bIns="0" anchor="t">
+          <a:bodyPr wrap="square" anchor="t" lIns="0" rIns="0" tIns="0" bIns="0">
             <a:spAutoFit/>
           </a:bodyPr>
           <a:lstStyle/>
@@ -8145,7 +7428,7 @@
 </file>
 
 <file path=ppt/slides/slide2.xml><?xml version="1.0" encoding="utf-8"?>
-<p:sld xmlns:a="http://schemas.openxmlformats.org/drawingml/2006/main" xmlns:r="http://schemas.openxmlformats.org/officeDocument/2006/relationships" xmlns:p="http://schemas.openxmlformats.org/presentationml/2006/main">
+<p:sld xmlns:a="http://schemas.openxmlformats.org/drawingml/2006/main" xmlns:p="http://schemas.openxmlformats.org/presentationml/2006/main" xmlns:r="http://schemas.openxmlformats.org/officeDocument/2006/relationships">
   <p:cSld>
     <p:bg>
       <p:bgPr>
@@ -8161,14 +7444,7 @@
         <p:cNvGrpSpPr/>
         <p:nvPr/>
       </p:nvGrpSpPr>
-      <p:grpSpPr>
-        <a:xfrm>
-          <a:off x="0" y="0"/>
-          <a:ext cx="0" cy="0"/>
-          <a:chOff x="0" y="0"/>
-          <a:chExt cx="0" cy="0"/>
-        </a:xfrm>
-      </p:grpSpPr>
+      <p:grpSpPr/>
       <p:sp>
         <p:nvSpPr>
           <p:cNvPr id="2" name="TextBox 1"/>
@@ -8186,7 +7462,7 @@
           <a:noFill/>
         </p:spPr>
         <p:txBody>
-          <a:bodyPr wrap="square" lIns="0" tIns="0" rIns="0" bIns="0" anchor="t">
+          <a:bodyPr wrap="square" anchor="t" lIns="0" rIns="0" tIns="0" bIns="0">
             <a:spAutoFit/>
           </a:bodyPr>
           <a:lstStyle/>
@@ -8260,7 +7536,6 @@
           <a:lstStyle/>
           <a:p>
             <a:pPr algn="ctr"/>
-            <a:endParaRPr/>
           </a:p>
         </p:txBody>
       </p:sp>
@@ -8281,7 +7556,7 @@
           <a:noFill/>
         </p:spPr>
         <p:txBody>
-          <a:bodyPr wrap="square" lIns="0" tIns="0" rIns="0" bIns="0" anchor="t">
+          <a:bodyPr wrap="square" anchor="t" lIns="0" rIns="0" tIns="0" bIns="0">
             <a:spAutoFit/>
           </a:bodyPr>
           <a:lstStyle/>
@@ -8335,7 +7610,16 @@
                 </a:solidFill>
                 <a:latin typeface="Roboto"/>
               </a:rPr>
-              <a:t>■  You design the upgrade yourself — the baseline and the HA requirements are your inputs, not a finished answer.</a:t>
+              <a:t>■  </a:t>
+            </a:r>
+            <a:r>
+              <a:rPr sz="1800" b="1" i="0">
+                <a:solidFill>
+                  <a:srgbClr val="92268F"/>
+                </a:solidFill>
+                <a:latin typeface="Roboto"/>
+              </a:rPr>
+              <a:t>You design the upgrade yourself — the baseline and the HA requirements are your inputs, not a finished answer.</a:t>
             </a:r>
           </a:p>
           <a:p>
@@ -8443,7 +7727,6 @@
           <a:lstStyle/>
           <a:p>
             <a:pPr algn="ctr"/>
-            <a:endParaRPr/>
           </a:p>
         </p:txBody>
       </p:sp>
@@ -8464,7 +7747,7 @@
           <a:noFill/>
         </p:spPr>
         <p:txBody>
-          <a:bodyPr wrap="square" lIns="0" tIns="0" rIns="0" bIns="0" anchor="t">
+          <a:bodyPr wrap="square" anchor="t" lIns="0" rIns="0" tIns="0" bIns="0">
             <a:spAutoFit/>
           </a:bodyPr>
           <a:lstStyle/>
@@ -8507,7 +7790,7 @@
           <a:noFill/>
         </p:spPr>
         <p:txBody>
-          <a:bodyPr wrap="square" lIns="0" tIns="0" rIns="0" bIns="0" anchor="t">
+          <a:bodyPr wrap="square" anchor="t" lIns="0" rIns="0" tIns="0" bIns="0">
             <a:spAutoFit/>
           </a:bodyPr>
           <a:lstStyle/>
@@ -8534,7 +7817,7 @@
 </file>
 
 <file path=ppt/slides/slide20.xml><?xml version="1.0" encoding="utf-8"?>
-<p:sld xmlns:a="http://schemas.openxmlformats.org/drawingml/2006/main" xmlns:r="http://schemas.openxmlformats.org/officeDocument/2006/relationships" xmlns:p="http://schemas.openxmlformats.org/presentationml/2006/main">
+<p:sld xmlns:a="http://schemas.openxmlformats.org/drawingml/2006/main" xmlns:p="http://schemas.openxmlformats.org/presentationml/2006/main" xmlns:r="http://schemas.openxmlformats.org/officeDocument/2006/relationships">
   <p:cSld>
     <p:bg>
       <p:bgPr>
@@ -8550,14 +7833,7 @@
         <p:cNvGrpSpPr/>
         <p:nvPr/>
       </p:nvGrpSpPr>
-      <p:grpSpPr>
-        <a:xfrm>
-          <a:off x="0" y="0"/>
-          <a:ext cx="0" cy="0"/>
-          <a:chOff x="0" y="0"/>
-          <a:chExt cx="0" cy="0"/>
-        </a:xfrm>
-      </p:grpSpPr>
+      <p:grpSpPr/>
       <p:sp>
         <p:nvSpPr>
           <p:cNvPr id="2" name="Rectangle 1"/>
@@ -8599,7 +7875,6 @@
           <a:lstStyle/>
           <a:p>
             <a:pPr algn="ctr"/>
-            <a:endParaRPr/>
           </a:p>
         </p:txBody>
       </p:sp>
@@ -8673,7 +7948,7 @@
           <a:noFill/>
         </p:spPr>
         <p:txBody>
-          <a:bodyPr wrap="square" lIns="0" tIns="0" rIns="0" bIns="0" anchor="ctr">
+          <a:bodyPr wrap="square" anchor="ctr" lIns="0" rIns="0" tIns="0" bIns="0">
             <a:spAutoFit/>
           </a:bodyPr>
           <a:lstStyle/>
@@ -8707,7 +7982,7 @@
           <a:noFill/>
         </p:spPr>
         <p:txBody>
-          <a:bodyPr wrap="square" lIns="0" tIns="0" rIns="0" bIns="0" anchor="t">
+          <a:bodyPr wrap="square" anchor="t" lIns="0" rIns="0" tIns="0" bIns="0">
             <a:spAutoFit/>
           </a:bodyPr>
           <a:lstStyle/>
@@ -8823,7 +8098,16 @@
                 </a:solidFill>
                 <a:latin typeface="Roboto"/>
               </a:rPr>
-              <a:t>■  This is the deliverable — the design you'll implement next.</a:t>
+              <a:t>■  </a:t>
+            </a:r>
+            <a:r>
+              <a:rPr sz="1700" b="1" i="0">
+                <a:solidFill>
+                  <a:srgbClr val="205F61"/>
+                </a:solidFill>
+                <a:latin typeface="Roboto"/>
+              </a:rPr>
+              <a:t>This is the deliverable — the design you'll implement next.</a:t>
             </a:r>
           </a:p>
         </p:txBody>
@@ -8871,7 +8155,6 @@
           <a:lstStyle/>
           <a:p>
             <a:pPr algn="ctr"/>
-            <a:endParaRPr/>
           </a:p>
         </p:txBody>
       </p:sp>
@@ -8892,7 +8175,7 @@
           <a:noFill/>
         </p:spPr>
         <p:txBody>
-          <a:bodyPr wrap="square" lIns="0" tIns="0" rIns="0" bIns="0" anchor="ctr">
+          <a:bodyPr wrap="square" anchor="ctr" lIns="0" rIns="0" tIns="0" bIns="0">
             <a:spAutoFit/>
           </a:bodyPr>
           <a:lstStyle/>
@@ -8950,7 +8233,6 @@
           <a:lstStyle/>
           <a:p>
             <a:pPr algn="ctr"/>
-            <a:endParaRPr/>
           </a:p>
         </p:txBody>
       </p:sp>
@@ -8971,7 +8253,7 @@
           <a:noFill/>
         </p:spPr>
         <p:txBody>
-          <a:bodyPr wrap="square" lIns="0" tIns="0" rIns="0" bIns="0" anchor="t">
+          <a:bodyPr wrap="square" anchor="t" lIns="0" rIns="0" tIns="0" bIns="0">
             <a:spAutoFit/>
           </a:bodyPr>
           <a:lstStyle/>
@@ -9014,7 +8296,7 @@
           <a:noFill/>
         </p:spPr>
         <p:txBody>
-          <a:bodyPr wrap="square" lIns="0" tIns="0" rIns="0" bIns="0" anchor="t">
+          <a:bodyPr wrap="square" anchor="t" lIns="0" rIns="0" tIns="0" bIns="0">
             <a:spAutoFit/>
           </a:bodyPr>
           <a:lstStyle/>
@@ -9041,7 +8323,7 @@
 </file>
 
 <file path=ppt/slides/slide21.xml><?xml version="1.0" encoding="utf-8"?>
-<p:sld xmlns:a="http://schemas.openxmlformats.org/drawingml/2006/main" xmlns:r="http://schemas.openxmlformats.org/officeDocument/2006/relationships" xmlns:p="http://schemas.openxmlformats.org/presentationml/2006/main">
+<p:sld xmlns:a="http://schemas.openxmlformats.org/drawingml/2006/main" xmlns:p="http://schemas.openxmlformats.org/presentationml/2006/main" xmlns:r="http://schemas.openxmlformats.org/officeDocument/2006/relationships">
   <p:cSld>
     <p:bg>
       <p:bgPr>
@@ -9057,14 +8339,7 @@
         <p:cNvGrpSpPr/>
         <p:nvPr/>
       </p:nvGrpSpPr>
-      <p:grpSpPr>
-        <a:xfrm>
-          <a:off x="0" y="0"/>
-          <a:ext cx="0" cy="0"/>
-          <a:chOff x="0" y="0"/>
-          <a:chExt cx="0" cy="0"/>
-        </a:xfrm>
-      </p:grpSpPr>
+      <p:grpSpPr/>
       <p:sp>
         <p:nvSpPr>
           <p:cNvPr id="2" name="TextBox 1"/>
@@ -9082,7 +8357,7 @@
           <a:noFill/>
         </p:spPr>
         <p:txBody>
-          <a:bodyPr wrap="square" lIns="0" tIns="0" rIns="0" bIns="0" anchor="t">
+          <a:bodyPr wrap="square" anchor="t" lIns="0" rIns="0" tIns="0" bIns="0">
             <a:spAutoFit/>
           </a:bodyPr>
           <a:lstStyle/>
@@ -9156,7 +8431,6 @@
           <a:lstStyle/>
           <a:p>
             <a:pPr algn="ctr"/>
-            <a:endParaRPr/>
           </a:p>
         </p:txBody>
       </p:sp>
@@ -9203,7 +8477,6 @@
           <a:lstStyle/>
           <a:p>
             <a:pPr algn="ctr"/>
-            <a:endParaRPr/>
           </a:p>
         </p:txBody>
       </p:sp>
@@ -9248,7 +8521,6 @@
           <a:lstStyle/>
           <a:p>
             <a:pPr algn="ctr"/>
-            <a:endParaRPr/>
           </a:p>
         </p:txBody>
       </p:sp>
@@ -9269,7 +8541,7 @@
           <a:noFill/>
         </p:spPr>
         <p:txBody>
-          <a:bodyPr wrap="square" lIns="0" tIns="0" rIns="0" bIns="0" anchor="ctr">
+          <a:bodyPr wrap="square" anchor="ctr" lIns="0" rIns="0" tIns="0" bIns="0">
             <a:spAutoFit/>
           </a:bodyPr>
           <a:lstStyle/>
@@ -9334,7 +8606,6 @@
           <a:lstStyle/>
           <a:p>
             <a:pPr algn="ctr"/>
-            <a:endParaRPr/>
           </a:p>
         </p:txBody>
       </p:sp>
@@ -9379,7 +8650,6 @@
           <a:lstStyle/>
           <a:p>
             <a:pPr algn="ctr"/>
-            <a:endParaRPr/>
           </a:p>
         </p:txBody>
       </p:sp>
@@ -9400,7 +8670,7 @@
           <a:noFill/>
         </p:spPr>
         <p:txBody>
-          <a:bodyPr wrap="square" lIns="0" tIns="0" rIns="0" bIns="0" anchor="ctr">
+          <a:bodyPr wrap="square" anchor="ctr" lIns="0" rIns="0" tIns="0" bIns="0">
             <a:spAutoFit/>
           </a:bodyPr>
           <a:lstStyle/>
@@ -9465,7 +8735,6 @@
           <a:lstStyle/>
           <a:p>
             <a:pPr algn="ctr"/>
-            <a:endParaRPr/>
           </a:p>
         </p:txBody>
       </p:sp>
@@ -9510,7 +8779,6 @@
           <a:lstStyle/>
           <a:p>
             <a:pPr algn="ctr"/>
-            <a:endParaRPr/>
           </a:p>
         </p:txBody>
       </p:sp>
@@ -9531,7 +8799,7 @@
           <a:noFill/>
         </p:spPr>
         <p:txBody>
-          <a:bodyPr wrap="square" lIns="0" tIns="0" rIns="0" bIns="0" anchor="ctr">
+          <a:bodyPr wrap="square" anchor="ctr" lIns="0" rIns="0" tIns="0" bIns="0">
             <a:spAutoFit/>
           </a:bodyPr>
           <a:lstStyle/>
@@ -9596,7 +8864,6 @@
           <a:lstStyle/>
           <a:p>
             <a:pPr algn="ctr"/>
-            <a:endParaRPr/>
           </a:p>
         </p:txBody>
       </p:sp>
@@ -9641,7 +8908,6 @@
           <a:lstStyle/>
           <a:p>
             <a:pPr algn="ctr"/>
-            <a:endParaRPr/>
           </a:p>
         </p:txBody>
       </p:sp>
@@ -9662,7 +8928,7 @@
           <a:noFill/>
         </p:spPr>
         <p:txBody>
-          <a:bodyPr wrap="square" lIns="0" tIns="0" rIns="0" bIns="0" anchor="ctr">
+          <a:bodyPr wrap="square" anchor="ctr" lIns="0" rIns="0" tIns="0" bIns="0">
             <a:spAutoFit/>
           </a:bodyPr>
           <a:lstStyle/>
@@ -9725,7 +8991,6 @@
           <a:lstStyle/>
           <a:p>
             <a:pPr algn="ctr"/>
-            <a:endParaRPr/>
           </a:p>
         </p:txBody>
       </p:sp>
@@ -9746,7 +9011,7 @@
           <a:noFill/>
         </p:spPr>
         <p:txBody>
-          <a:bodyPr wrap="square" lIns="0" tIns="0" rIns="0" bIns="0" anchor="t">
+          <a:bodyPr wrap="square" anchor="t" lIns="0" rIns="0" tIns="0" bIns="0">
             <a:spAutoFit/>
           </a:bodyPr>
           <a:lstStyle/>
@@ -9789,7 +9054,7 @@
           <a:noFill/>
         </p:spPr>
         <p:txBody>
-          <a:bodyPr wrap="square" lIns="0" tIns="0" rIns="0" bIns="0" anchor="t">
+          <a:bodyPr wrap="square" anchor="t" lIns="0" rIns="0" tIns="0" bIns="0">
             <a:spAutoFit/>
           </a:bodyPr>
           <a:lstStyle/>
@@ -9816,7 +9081,7 @@
 </file>
 
 <file path=ppt/slides/slide22.xml><?xml version="1.0" encoding="utf-8"?>
-<p:sld xmlns:a="http://schemas.openxmlformats.org/drawingml/2006/main" xmlns:r="http://schemas.openxmlformats.org/officeDocument/2006/relationships" xmlns:p="http://schemas.openxmlformats.org/presentationml/2006/main">
+<p:sld xmlns:a="http://schemas.openxmlformats.org/drawingml/2006/main" xmlns:p="http://schemas.openxmlformats.org/presentationml/2006/main" xmlns:r="http://schemas.openxmlformats.org/officeDocument/2006/relationships">
   <p:cSld>
     <p:bg>
       <p:bgPr>
@@ -9832,14 +9097,7 @@
         <p:cNvGrpSpPr/>
         <p:nvPr/>
       </p:nvGrpSpPr>
-      <p:grpSpPr>
-        <a:xfrm>
-          <a:off x="0" y="0"/>
-          <a:ext cx="0" cy="0"/>
-          <a:chOff x="0" y="0"/>
-          <a:chExt cx="0" cy="0"/>
-        </a:xfrm>
-      </p:grpSpPr>
+      <p:grpSpPr/>
       <p:sp>
         <p:nvSpPr>
           <p:cNvPr id="2" name="TextBox 1"/>
@@ -9857,7 +9115,7 @@
           <a:noFill/>
         </p:spPr>
         <p:txBody>
-          <a:bodyPr wrap="square" lIns="0" tIns="0" rIns="0" bIns="0" anchor="t">
+          <a:bodyPr wrap="square" anchor="t" lIns="0" rIns="0" tIns="0" bIns="0">
             <a:spAutoFit/>
           </a:bodyPr>
           <a:lstStyle/>
@@ -9931,7 +9189,6 @@
           <a:lstStyle/>
           <a:p>
             <a:pPr algn="ctr"/>
-            <a:endParaRPr/>
           </a:p>
         </p:txBody>
       </p:sp>
@@ -9978,7 +9235,6 @@
           <a:lstStyle/>
           <a:p>
             <a:pPr algn="ctr"/>
-            <a:endParaRPr/>
           </a:p>
         </p:txBody>
       </p:sp>
@@ -10023,7 +9279,6 @@
           <a:lstStyle/>
           <a:p>
             <a:pPr algn="ctr"/>
-            <a:endParaRPr/>
           </a:p>
         </p:txBody>
       </p:sp>
@@ -10044,7 +9299,7 @@
           <a:noFill/>
         </p:spPr>
         <p:txBody>
-          <a:bodyPr wrap="square" lIns="0" tIns="0" rIns="0" bIns="0" anchor="ctr">
+          <a:bodyPr wrap="square" anchor="ctr" lIns="0" rIns="0" tIns="0" bIns="0">
             <a:spAutoFit/>
           </a:bodyPr>
           <a:lstStyle/>
@@ -10109,7 +9364,6 @@
           <a:lstStyle/>
           <a:p>
             <a:pPr algn="ctr"/>
-            <a:endParaRPr/>
           </a:p>
         </p:txBody>
       </p:sp>
@@ -10154,7 +9408,6 @@
           <a:lstStyle/>
           <a:p>
             <a:pPr algn="ctr"/>
-            <a:endParaRPr/>
           </a:p>
         </p:txBody>
       </p:sp>
@@ -10175,7 +9428,7 @@
           <a:noFill/>
         </p:spPr>
         <p:txBody>
-          <a:bodyPr wrap="square" lIns="0" tIns="0" rIns="0" bIns="0" anchor="ctr">
+          <a:bodyPr wrap="square" anchor="ctr" lIns="0" rIns="0" tIns="0" bIns="0">
             <a:spAutoFit/>
           </a:bodyPr>
           <a:lstStyle/>
@@ -10240,7 +9493,6 @@
           <a:lstStyle/>
           <a:p>
             <a:pPr algn="ctr"/>
-            <a:endParaRPr/>
           </a:p>
         </p:txBody>
       </p:sp>
@@ -10285,7 +9537,6 @@
           <a:lstStyle/>
           <a:p>
             <a:pPr algn="ctr"/>
-            <a:endParaRPr/>
           </a:p>
         </p:txBody>
       </p:sp>
@@ -10306,7 +9557,7 @@
           <a:noFill/>
         </p:spPr>
         <p:txBody>
-          <a:bodyPr wrap="square" lIns="0" tIns="0" rIns="0" bIns="0" anchor="ctr">
+          <a:bodyPr wrap="square" anchor="ctr" lIns="0" rIns="0" tIns="0" bIns="0">
             <a:spAutoFit/>
           </a:bodyPr>
           <a:lstStyle/>
@@ -10371,7 +9622,6 @@
           <a:lstStyle/>
           <a:p>
             <a:pPr algn="ctr"/>
-            <a:endParaRPr/>
           </a:p>
         </p:txBody>
       </p:sp>
@@ -10416,7 +9666,6 @@
           <a:lstStyle/>
           <a:p>
             <a:pPr algn="ctr"/>
-            <a:endParaRPr/>
           </a:p>
         </p:txBody>
       </p:sp>
@@ -10437,7 +9686,7 @@
           <a:noFill/>
         </p:spPr>
         <p:txBody>
-          <a:bodyPr wrap="square" lIns="0" tIns="0" rIns="0" bIns="0" anchor="ctr">
+          <a:bodyPr wrap="square" anchor="ctr" lIns="0" rIns="0" tIns="0" bIns="0">
             <a:spAutoFit/>
           </a:bodyPr>
           <a:lstStyle/>
@@ -10502,7 +9751,6 @@
           <a:lstStyle/>
           <a:p>
             <a:pPr algn="ctr"/>
-            <a:endParaRPr/>
           </a:p>
         </p:txBody>
       </p:sp>
@@ -10547,7 +9795,6 @@
           <a:lstStyle/>
           <a:p>
             <a:pPr algn="ctr"/>
-            <a:endParaRPr/>
           </a:p>
         </p:txBody>
       </p:sp>
@@ -10568,7 +9815,7 @@
           <a:noFill/>
         </p:spPr>
         <p:txBody>
-          <a:bodyPr wrap="square" lIns="0" tIns="0" rIns="0" bIns="0" anchor="ctr">
+          <a:bodyPr wrap="square" anchor="ctr" lIns="0" rIns="0" tIns="0" bIns="0">
             <a:spAutoFit/>
           </a:bodyPr>
           <a:lstStyle/>
@@ -10631,7 +9878,6 @@
           <a:lstStyle/>
           <a:p>
             <a:pPr algn="ctr"/>
-            <a:endParaRPr/>
           </a:p>
         </p:txBody>
       </p:sp>
@@ -10652,7 +9898,7 @@
           <a:noFill/>
         </p:spPr>
         <p:txBody>
-          <a:bodyPr wrap="square" lIns="0" tIns="0" rIns="0" bIns="0" anchor="t">
+          <a:bodyPr wrap="square" anchor="t" lIns="0" rIns="0" tIns="0" bIns="0">
             <a:spAutoFit/>
           </a:bodyPr>
           <a:lstStyle/>
@@ -10695,7 +9941,7 @@
           <a:noFill/>
         </p:spPr>
         <p:txBody>
-          <a:bodyPr wrap="square" lIns="0" tIns="0" rIns="0" bIns="0" anchor="t">
+          <a:bodyPr wrap="square" anchor="t" lIns="0" rIns="0" tIns="0" bIns="0">
             <a:spAutoFit/>
           </a:bodyPr>
           <a:lstStyle/>
@@ -10722,7 +9968,7 @@
 </file>
 
 <file path=ppt/slides/slide23.xml><?xml version="1.0" encoding="utf-8"?>
-<p:sld xmlns:a="http://schemas.openxmlformats.org/drawingml/2006/main" xmlns:r="http://schemas.openxmlformats.org/officeDocument/2006/relationships" xmlns:p="http://schemas.openxmlformats.org/presentationml/2006/main">
+<p:sld xmlns:a="http://schemas.openxmlformats.org/drawingml/2006/main" xmlns:p="http://schemas.openxmlformats.org/presentationml/2006/main" xmlns:r="http://schemas.openxmlformats.org/officeDocument/2006/relationships">
   <p:cSld>
     <p:bg>
       <p:bgPr>
@@ -10738,14 +9984,7 @@
         <p:cNvGrpSpPr/>
         <p:nvPr/>
       </p:nvGrpSpPr>
-      <p:grpSpPr>
-        <a:xfrm>
-          <a:off x="0" y="0"/>
-          <a:ext cx="0" cy="0"/>
-          <a:chOff x="0" y="0"/>
-          <a:chExt cx="0" cy="0"/>
-        </a:xfrm>
-      </p:grpSpPr>
+      <p:grpSpPr/>
       <p:sp>
         <p:nvSpPr>
           <p:cNvPr id="2" name="Rectangle 1"/>
@@ -10787,7 +10026,6 @@
           <a:lstStyle/>
           <a:p>
             <a:pPr algn="ctr"/>
-            <a:endParaRPr/>
           </a:p>
         </p:txBody>
       </p:sp>
@@ -10808,7 +10046,7 @@
           <a:noFill/>
         </p:spPr>
         <p:txBody>
-          <a:bodyPr wrap="square" lIns="0" tIns="0" rIns="0" bIns="0" anchor="t">
+          <a:bodyPr wrap="square" anchor="t" lIns="0" rIns="0" tIns="0" bIns="0">
             <a:spAutoFit/>
           </a:bodyPr>
           <a:lstStyle/>
@@ -10872,7 +10110,7 @@
 </file>
 
 <file path=ppt/slides/slide3.xml><?xml version="1.0" encoding="utf-8"?>
-<p:sld xmlns:a="http://schemas.openxmlformats.org/drawingml/2006/main" xmlns:r="http://schemas.openxmlformats.org/officeDocument/2006/relationships" xmlns:p="http://schemas.openxmlformats.org/presentationml/2006/main">
+<p:sld xmlns:a="http://schemas.openxmlformats.org/drawingml/2006/main" xmlns:p="http://schemas.openxmlformats.org/presentationml/2006/main" xmlns:r="http://schemas.openxmlformats.org/officeDocument/2006/relationships">
   <p:cSld>
     <p:bg>
       <p:bgPr>
@@ -10888,14 +10126,7 @@
         <p:cNvGrpSpPr/>
         <p:nvPr/>
       </p:nvGrpSpPr>
-      <p:grpSpPr>
-        <a:xfrm>
-          <a:off x="0" y="0"/>
-          <a:ext cx="0" cy="0"/>
-          <a:chOff x="0" y="0"/>
-          <a:chExt cx="0" cy="0"/>
-        </a:xfrm>
-      </p:grpSpPr>
+      <p:grpSpPr/>
       <p:sp>
         <p:nvSpPr>
           <p:cNvPr id="2" name="Rectangle 1"/>
@@ -10937,7 +10168,6 @@
           <a:lstStyle/>
           <a:p>
             <a:pPr algn="ctr"/>
-            <a:endParaRPr/>
           </a:p>
         </p:txBody>
       </p:sp>
@@ -10958,7 +10188,7 @@
           <a:noFill/>
         </p:spPr>
         <p:txBody>
-          <a:bodyPr wrap="square" lIns="0" tIns="0" rIns="0" bIns="0" anchor="t">
+          <a:bodyPr wrap="square" anchor="t" lIns="0" rIns="0" tIns="0" bIns="0">
             <a:spAutoFit/>
           </a:bodyPr>
           <a:lstStyle/>
@@ -10992,7 +10222,7 @@
           <a:noFill/>
         </p:spPr>
         <p:txBody>
-          <a:bodyPr wrap="square" lIns="0" tIns="0" rIns="0" bIns="0" anchor="t">
+          <a:bodyPr wrap="square" anchor="t" lIns="0" rIns="0" tIns="0" bIns="0">
             <a:spAutoFit/>
           </a:bodyPr>
           <a:lstStyle/>
@@ -11082,7 +10312,6 @@
           <a:lstStyle/>
           <a:p>
             <a:pPr algn="ctr"/>
-            <a:endParaRPr/>
           </a:p>
         </p:txBody>
       </p:sp>
@@ -11103,7 +10332,7 @@
           <a:noFill/>
         </p:spPr>
         <p:txBody>
-          <a:bodyPr wrap="square" lIns="0" tIns="0" rIns="0" bIns="0" anchor="t">
+          <a:bodyPr wrap="square" anchor="t" lIns="0" rIns="0" tIns="0" bIns="0">
             <a:spAutoFit/>
           </a:bodyPr>
           <a:lstStyle/>
@@ -11146,13 +10375,21 @@
           <a:noFill/>
         </p:spPr>
         <p:txBody>
-          <a:bodyPr wrap="square" lIns="0" tIns="0" rIns="0" bIns="0" anchor="t">
+          <a:bodyPr wrap="square" anchor="t" lIns="0" rIns="0" tIns="0" bIns="0">
             <a:spAutoFit/>
           </a:bodyPr>
           <a:lstStyle/>
           <a:p>
             <a:pPr algn="r"/>
-            <a:endParaRPr/>
+            <a:r>
+              <a:rPr sz="1100" b="0" i="0">
+                <a:solidFill>
+                  <a:srgbClr val="7A7A7A"/>
+                </a:solidFill>
+                <a:latin typeface="Roboto"/>
+              </a:rPr>
+              <a:t/>
+            </a:r>
           </a:p>
         </p:txBody>
       </p:sp>
@@ -11165,7 +10402,7 @@
 </file>
 
 <file path=ppt/slides/slide4.xml><?xml version="1.0" encoding="utf-8"?>
-<p:sld xmlns:a="http://schemas.openxmlformats.org/drawingml/2006/main" xmlns:r="http://schemas.openxmlformats.org/officeDocument/2006/relationships" xmlns:p="http://schemas.openxmlformats.org/presentationml/2006/main">
+<p:sld xmlns:a="http://schemas.openxmlformats.org/drawingml/2006/main" xmlns:p="http://schemas.openxmlformats.org/presentationml/2006/main" xmlns:r="http://schemas.openxmlformats.org/officeDocument/2006/relationships">
   <p:cSld>
     <p:bg>
       <p:bgPr>
@@ -11181,14 +10418,7 @@
         <p:cNvGrpSpPr/>
         <p:nvPr/>
       </p:nvGrpSpPr>
-      <p:grpSpPr>
-        <a:xfrm>
-          <a:off x="0" y="0"/>
-          <a:ext cx="0" cy="0"/>
-          <a:chOff x="0" y="0"/>
-          <a:chExt cx="0" cy="0"/>
-        </a:xfrm>
-      </p:grpSpPr>
+      <p:grpSpPr/>
       <p:sp>
         <p:nvSpPr>
           <p:cNvPr id="2" name="TextBox 1"/>
@@ -11198,7 +10428,7 @@
         <p:spPr>
           <a:xfrm>
             <a:off x="640080" y="457200"/>
-            <a:ext cx="10881360" cy="430887"/>
+            <a:ext cx="10881360" cy="960120"/>
           </a:xfrm>
           <a:prstGeom prst="rect">
             <a:avLst/>
@@ -11206,19 +10436,35 @@
           <a:noFill/>
         </p:spPr>
         <p:txBody>
-          <a:bodyPr wrap="square" lIns="0" tIns="0" rIns="0" bIns="0" anchor="t">
+          <a:bodyPr wrap="square" anchor="t" lIns="0" rIns="0" tIns="0" bIns="0">
             <a:spAutoFit/>
           </a:bodyPr>
           <a:lstStyle/>
           <a:p>
             <a:r>
-              <a:rPr sz="2800" b="1" i="0" dirty="0">
+              <a:rPr sz="2800" b="1" i="0">
                 <a:solidFill>
                   <a:srgbClr val="2A2929"/>
                 </a:solidFill>
                 <a:latin typeface="Roboto"/>
               </a:rPr>
               <a:t>Review the architecture</a:t>
+            </a:r>
+          </a:p>
+          <a:p>
+            <a:pPr>
+              <a:spcBef>
+                <a:spcPts val="200"/>
+              </a:spcBef>
+            </a:pPr>
+            <a:r>
+              <a:rPr sz="1800" b="0" i="1">
+                <a:solidFill>
+                  <a:srgbClr val="D68E10"/>
+                </a:solidFill>
+                <a:latin typeface="Roboto Light"/>
+              </a:rPr>
+              <a:t>ICTCLD502 · Evaluating availability</a:t>
             </a:r>
           </a:p>
         </p:txBody>
@@ -11231,7 +10477,7 @@
         </p:nvSpPr>
         <p:spPr>
           <a:xfrm>
-            <a:off x="658368" y="1001879"/>
+            <a:off x="658368" y="1371600"/>
             <a:ext cx="1463040" cy="50800"/>
           </a:xfrm>
           <a:prstGeom prst="rect">
@@ -11264,7 +10510,6 @@
           <a:lstStyle/>
           <a:p>
             <a:pPr algn="ctr"/>
-            <a:endParaRPr/>
           </a:p>
         </p:txBody>
       </p:sp>
@@ -11285,7 +10530,7 @@
           <a:noFill/>
         </p:spPr>
         <p:txBody>
-          <a:bodyPr wrap="square" lIns="0" tIns="0" rIns="0" bIns="0" anchor="t">
+          <a:bodyPr wrap="square" anchor="t" lIns="0" rIns="0" tIns="0" bIns="0">
             <a:spAutoFit/>
           </a:bodyPr>
           <a:lstStyle/>
@@ -11370,7 +10615,16 @@
                 </a:solidFill>
                 <a:latin typeface="Roboto"/>
               </a:rPr>
-              <a:t>■  Review the deployed single-AZ baseline before you change anything.</a:t>
+              <a:t>■  </a:t>
+            </a:r>
+            <a:r>
+              <a:rPr sz="1800" b="1" i="0">
+                <a:solidFill>
+                  <a:srgbClr val="92268F"/>
+                </a:solidFill>
+                <a:latin typeface="Roboto"/>
+              </a:rPr>
+              <a:t>Review the deployed single-AZ baseline before you change anything.</a:t>
             </a:r>
           </a:p>
         </p:txBody>
@@ -11416,7 +10670,6 @@
           <a:lstStyle/>
           <a:p>
             <a:pPr algn="ctr"/>
-            <a:endParaRPr/>
           </a:p>
         </p:txBody>
       </p:sp>
@@ -11437,7 +10690,7 @@
           <a:noFill/>
         </p:spPr>
         <p:txBody>
-          <a:bodyPr wrap="square" lIns="0" tIns="0" rIns="0" bIns="0" anchor="t">
+          <a:bodyPr wrap="square" anchor="t" lIns="0" rIns="0" tIns="0" bIns="0">
             <a:spAutoFit/>
           </a:bodyPr>
           <a:lstStyle/>
@@ -11480,7 +10733,7 @@
           <a:noFill/>
         </p:spPr>
         <p:txBody>
-          <a:bodyPr wrap="square" lIns="0" tIns="0" rIns="0" bIns="0" anchor="t">
+          <a:bodyPr wrap="square" anchor="t" lIns="0" rIns="0" tIns="0" bIns="0">
             <a:spAutoFit/>
           </a:bodyPr>
           <a:lstStyle/>
@@ -11507,7 +10760,7 @@
 </file>
 
 <file path=ppt/slides/slide5.xml><?xml version="1.0" encoding="utf-8"?>
-<p:sld xmlns:a="http://schemas.openxmlformats.org/drawingml/2006/main" xmlns:r="http://schemas.openxmlformats.org/officeDocument/2006/relationships" xmlns:p="http://schemas.openxmlformats.org/presentationml/2006/main">
+<p:sld xmlns:a="http://schemas.openxmlformats.org/drawingml/2006/main" xmlns:p="http://schemas.openxmlformats.org/presentationml/2006/main" xmlns:r="http://schemas.openxmlformats.org/officeDocument/2006/relationships">
   <p:cSld>
     <p:bg>
       <p:bgPr>
@@ -11523,14 +10776,7 @@
         <p:cNvGrpSpPr/>
         <p:nvPr/>
       </p:nvGrpSpPr>
-      <p:grpSpPr>
-        <a:xfrm>
-          <a:off x="0" y="0"/>
-          <a:ext cx="0" cy="0"/>
-          <a:chOff x="0" y="0"/>
-          <a:chExt cx="0" cy="0"/>
-        </a:xfrm>
-      </p:grpSpPr>
+      <p:grpSpPr/>
       <p:sp>
         <p:nvSpPr>
           <p:cNvPr id="2" name="TextBox 1"/>
@@ -11540,7 +10786,7 @@
         <p:spPr>
           <a:xfrm>
             <a:off x="640080" y="457200"/>
-            <a:ext cx="10881360" cy="430887"/>
+            <a:ext cx="10881360" cy="960120"/>
           </a:xfrm>
           <a:prstGeom prst="rect">
             <a:avLst/>
@@ -11548,19 +10794,35 @@
           <a:noFill/>
         </p:spPr>
         <p:txBody>
-          <a:bodyPr wrap="square" lIns="0" tIns="0" rIns="0" bIns="0" anchor="t">
+          <a:bodyPr wrap="square" anchor="t" lIns="0" rIns="0" tIns="0" bIns="0">
             <a:spAutoFit/>
           </a:bodyPr>
           <a:lstStyle/>
           <a:p>
             <a:r>
-              <a:rPr sz="2800" b="1" i="0" dirty="0">
+              <a:rPr sz="2800" b="1" i="0">
                 <a:solidFill>
                   <a:srgbClr val="2A2929"/>
                 </a:solidFill>
                 <a:latin typeface="Roboto"/>
               </a:rPr>
               <a:t>Identify the single points of failure</a:t>
+            </a:r>
+          </a:p>
+          <a:p>
+            <a:pPr>
+              <a:spcBef>
+                <a:spcPts val="200"/>
+              </a:spcBef>
+            </a:pPr>
+            <a:r>
+              <a:rPr sz="1800" b="0" i="1">
+                <a:solidFill>
+                  <a:srgbClr val="D68E10"/>
+                </a:solidFill>
+                <a:latin typeface="Roboto Light"/>
+              </a:rPr>
+              <a:t>ICTCLD502 · Design HA S10</a:t>
             </a:r>
           </a:p>
         </p:txBody>
@@ -11573,7 +10835,7 @@
         </p:nvSpPr>
         <p:spPr>
           <a:xfrm>
-            <a:off x="658368" y="1001879"/>
+            <a:off x="658368" y="1371600"/>
             <a:ext cx="1463040" cy="50800"/>
           </a:xfrm>
           <a:prstGeom prst="rect">
@@ -11606,7 +10868,6 @@
           <a:lstStyle/>
           <a:p>
             <a:pPr algn="ctr"/>
-            <a:endParaRPr/>
           </a:p>
         </p:txBody>
       </p:sp>
@@ -11627,7 +10888,7 @@
           <a:noFill/>
         </p:spPr>
         <p:txBody>
-          <a:bodyPr wrap="square" lIns="0" tIns="0" rIns="0" bIns="0" anchor="t">
+          <a:bodyPr wrap="square" anchor="t" lIns="0" rIns="0" tIns="0" bIns="0">
             <a:spAutoFit/>
           </a:bodyPr>
           <a:lstStyle/>
@@ -11681,7 +10942,16 @@
                 </a:solidFill>
                 <a:latin typeface="Roboto"/>
               </a:rPr>
-              <a:t>■  In a single-AZ cloud build that's the AZ itself, the one database, the one running instance, the one NAT.</a:t>
+              <a:t>■  </a:t>
+            </a:r>
+            <a:r>
+              <a:rPr sz="1700" b="1" i="0">
+                <a:solidFill>
+                  <a:srgbClr val="92268F"/>
+                </a:solidFill>
+                <a:latin typeface="Roboto"/>
+              </a:rPr>
+              <a:t>In a single-AZ cloud build that's the AZ itself, the one database, the one running instance, the one NAT.</a:t>
             </a:r>
           </a:p>
           <a:p>
@@ -11717,9 +10987,33 @@
           </a:p>
         </p:txBody>
       </p:sp>
-      <p:sp>
-        <p:nvSpPr>
-          <p:cNvPr id="7" name="Rectangle 6"/>
+      <p:pic>
+        <p:nvPicPr>
+          <p:cNvPr id="5" name="Picture 4" descr="identify-spofs.png"/>
+          <p:cNvPicPr>
+            <a:picLocks noChangeAspect="1"/>
+          </p:cNvPicPr>
+          <p:nvPr/>
+        </p:nvPicPr>
+        <p:blipFill>
+          <a:blip r:embed="rId2"/>
+          <a:stretch>
+            <a:fillRect/>
+          </a:stretch>
+        </p:blipFill>
+        <p:spPr>
+          <a:xfrm>
+            <a:off x="6984733" y="1783080"/>
+            <a:ext cx="3952774" cy="4023360"/>
+          </a:xfrm>
+          <a:prstGeom prst="rect">
+            <a:avLst/>
+          </a:prstGeom>
+        </p:spPr>
+      </p:pic>
+      <p:sp>
+        <p:nvSpPr>
+          <p:cNvPr id="6" name="Rectangle 5"/>
           <p:cNvSpPr/>
           <p:nvPr/>
         </p:nvSpPr>
@@ -11758,7 +11052,49 @@
           <a:lstStyle/>
           <a:p>
             <a:pPr algn="ctr"/>
-            <a:endParaRPr/>
+          </a:p>
+        </p:txBody>
+      </p:sp>
+      <p:sp>
+        <p:nvSpPr>
+          <p:cNvPr id="7" name="TextBox 6"/>
+          <p:cNvSpPr txBox="1"/>
+          <p:nvPr/>
+        </p:nvSpPr>
+        <p:spPr>
+          <a:xfrm>
+            <a:off x="502920" y="6400800"/>
+            <a:ext cx="5486400" cy="320040"/>
+          </a:xfrm>
+          <a:prstGeom prst="rect">
+            <a:avLst/>
+          </a:prstGeom>
+          <a:noFill/>
+        </p:spPr>
+        <p:txBody>
+          <a:bodyPr wrap="square" anchor="t" lIns="0" rIns="0" tIns="0" bIns="0">
+            <a:spAutoFit/>
+          </a:bodyPr>
+          <a:lstStyle/>
+          <a:p>
+            <a:r>
+              <a:rPr sz="1100" b="1" i="0">
+                <a:solidFill>
+                  <a:srgbClr val="2A2929"/>
+                </a:solidFill>
+                <a:latin typeface="Roboto"/>
+              </a:rPr>
+              <a:t>Kangan </a:t>
+            </a:r>
+            <a:r>
+              <a:rPr sz="1100" b="1" i="0">
+                <a:solidFill>
+                  <a:srgbClr val="D68E10"/>
+                </a:solidFill>
+                <a:latin typeface="Roboto"/>
+              </a:rPr>
+              <a:t>Institute</a:t>
+            </a:r>
           </a:p>
         </p:txBody>
       </p:sp>
@@ -11770,8 +11106,8 @@
         </p:nvSpPr>
         <p:spPr>
           <a:xfrm>
-            <a:off x="502920" y="6400800"/>
-            <a:ext cx="5486400" cy="320040"/>
+            <a:off x="10515600" y="6400800"/>
+            <a:ext cx="1188720" cy="320040"/>
           </a:xfrm>
           <a:prstGeom prst="rect">
             <a:avLst/>
@@ -11779,54 +11115,11 @@
           <a:noFill/>
         </p:spPr>
         <p:txBody>
-          <a:bodyPr wrap="square" lIns="0" tIns="0" rIns="0" bIns="0" anchor="t">
+          <a:bodyPr wrap="square" anchor="t" lIns="0" rIns="0" tIns="0" bIns="0">
             <a:spAutoFit/>
           </a:bodyPr>
           <a:lstStyle/>
           <a:p>
-            <a:r>
-              <a:rPr sz="1100" b="1" i="0">
-                <a:solidFill>
-                  <a:srgbClr val="2A2929"/>
-                </a:solidFill>
-                <a:latin typeface="Roboto"/>
-              </a:rPr>
-              <a:t>Kangan </a:t>
-            </a:r>
-            <a:r>
-              <a:rPr sz="1100" b="1" i="0">
-                <a:solidFill>
-                  <a:srgbClr val="D68E10"/>
-                </a:solidFill>
-                <a:latin typeface="Roboto"/>
-              </a:rPr>
-              <a:t>Institute</a:t>
-            </a:r>
-          </a:p>
-        </p:txBody>
-      </p:sp>
-      <p:sp>
-        <p:nvSpPr>
-          <p:cNvPr id="9" name="TextBox 8"/>
-          <p:cNvSpPr txBox="1"/>
-          <p:nvPr/>
-        </p:nvSpPr>
-        <p:spPr>
-          <a:xfrm>
-            <a:off x="10515600" y="6400800"/>
-            <a:ext cx="1188720" cy="320040"/>
-          </a:xfrm>
-          <a:prstGeom prst="rect">
-            <a:avLst/>
-          </a:prstGeom>
-          <a:noFill/>
-        </p:spPr>
-        <p:txBody>
-          <a:bodyPr wrap="square" lIns="0" tIns="0" rIns="0" bIns="0" anchor="t">
-            <a:spAutoFit/>
-          </a:bodyPr>
-          <a:lstStyle/>
-          <a:p>
             <a:pPr algn="r"/>
             <a:r>
               <a:rPr sz="1100" b="0" i="0">
@@ -11840,43 +11133,6 @@
           </a:p>
         </p:txBody>
       </p:sp>
-      <p:pic>
-        <p:nvPicPr>
-          <p:cNvPr id="10" name="Picture 9">
-            <a:extLst>
-              <a:ext uri="{FF2B5EF4-FFF2-40B4-BE49-F238E27FC236}">
-                <a16:creationId xmlns:a16="http://schemas.microsoft.com/office/drawing/2014/main" id="{49FF93A1-37E9-3523-872F-2982FA888FD5}"/>
-              </a:ext>
-            </a:extLst>
-          </p:cNvPr>
-          <p:cNvPicPr>
-            <a:picLocks noChangeAspect="1"/>
-          </p:cNvPicPr>
-          <p:nvPr/>
-        </p:nvPicPr>
-        <p:blipFill>
-          <a:blip r:embed="rId2">
-            <a:extLst>
-              <a:ext uri="{28A0092B-C50C-407E-A947-70E740481C1C}">
-                <a14:useLocalDpi xmlns:a14="http://schemas.microsoft.com/office/drawing/2010/main" val="0"/>
-              </a:ext>
-            </a:extLst>
-          </a:blip>
-          <a:stretch>
-            <a:fillRect/>
-          </a:stretch>
-        </p:blipFill>
-        <p:spPr bwMode="auto">
-          <a:xfrm>
-            <a:off x="7644864" y="564552"/>
-            <a:ext cx="3064088" cy="5571072"/>
-          </a:xfrm>
-          <a:prstGeom prst="rect">
-            <a:avLst/>
-          </a:prstGeom>
-          <a:noFill/>
-        </p:spPr>
-      </p:pic>
     </p:spTree>
   </p:cSld>
   <p:clrMapOvr>
@@ -11886,7 +11142,7 @@
 </file>
 
 <file path=ppt/slides/slide6.xml><?xml version="1.0" encoding="utf-8"?>
-<p:sld xmlns:a="http://schemas.openxmlformats.org/drawingml/2006/main" xmlns:r="http://schemas.openxmlformats.org/officeDocument/2006/relationships" xmlns:p="http://schemas.openxmlformats.org/presentationml/2006/main">
+<p:sld xmlns:a="http://schemas.openxmlformats.org/drawingml/2006/main" xmlns:p="http://schemas.openxmlformats.org/presentationml/2006/main" xmlns:r="http://schemas.openxmlformats.org/officeDocument/2006/relationships">
   <p:cSld>
     <p:bg>
       <p:bgPr>
@@ -11902,14 +11158,7 @@
         <p:cNvGrpSpPr/>
         <p:nvPr/>
       </p:nvGrpSpPr>
-      <p:grpSpPr>
-        <a:xfrm>
-          <a:off x="0" y="0"/>
-          <a:ext cx="0" cy="0"/>
-          <a:chOff x="0" y="0"/>
-          <a:chExt cx="0" cy="0"/>
-        </a:xfrm>
-      </p:grpSpPr>
+      <p:grpSpPr/>
       <p:sp>
         <p:nvSpPr>
           <p:cNvPr id="2" name="TextBox 1"/>
@@ -11919,7 +11168,7 @@
         <p:spPr>
           <a:xfrm>
             <a:off x="640080" y="457200"/>
-            <a:ext cx="10881360" cy="430887"/>
+            <a:ext cx="10881360" cy="960120"/>
           </a:xfrm>
           <a:prstGeom prst="rect">
             <a:avLst/>
@@ -11927,19 +11176,35 @@
           <a:noFill/>
         </p:spPr>
         <p:txBody>
-          <a:bodyPr wrap="square" lIns="0" tIns="0" rIns="0" bIns="0" anchor="t">
+          <a:bodyPr wrap="square" anchor="t" lIns="0" rIns="0" tIns="0" bIns="0">
             <a:spAutoFit/>
           </a:bodyPr>
           <a:lstStyle/>
           <a:p>
             <a:r>
-              <a:rPr sz="2800" b="1" i="0" dirty="0">
+              <a:rPr sz="2800" b="1" i="0">
                 <a:solidFill>
                   <a:srgbClr val="2A2929"/>
                 </a:solidFill>
                 <a:latin typeface="Roboto"/>
               </a:rPr>
               <a:t>Estimate the recovery objectives</a:t>
+            </a:r>
+          </a:p>
+          <a:p>
+            <a:pPr>
+              <a:spcBef>
+                <a:spcPts val="200"/>
+              </a:spcBef>
+            </a:pPr>
+            <a:r>
+              <a:rPr sz="1800" b="0" i="1">
+                <a:solidFill>
+                  <a:srgbClr val="D68E10"/>
+                </a:solidFill>
+                <a:latin typeface="Roboto Light"/>
+              </a:rPr>
+              <a:t>ICTCLD502 · Evaluating availability S8</a:t>
             </a:r>
           </a:p>
         </p:txBody>
@@ -11952,7 +11217,7 @@
         </p:nvSpPr>
         <p:spPr>
           <a:xfrm>
-            <a:off x="670560" y="1001879"/>
+            <a:off x="658368" y="1371600"/>
             <a:ext cx="1463040" cy="50800"/>
           </a:xfrm>
           <a:prstGeom prst="rect">
@@ -11985,7 +11250,6 @@
           <a:lstStyle/>
           <a:p>
             <a:pPr algn="ctr"/>
-            <a:endParaRPr/>
           </a:p>
         </p:txBody>
       </p:sp>
@@ -11997,8 +11261,8 @@
         </p:nvSpPr>
         <p:spPr>
           <a:xfrm>
-            <a:off x="640080" y="1482633"/>
-            <a:ext cx="5918278" cy="4323620"/>
+            <a:off x="658368" y="1691640"/>
+            <a:ext cx="10881360" cy="4480560"/>
           </a:xfrm>
           <a:prstGeom prst="rect">
             <a:avLst/>
@@ -12006,170 +11270,10 @@
           <a:noFill/>
         </p:spPr>
         <p:txBody>
-          <a:bodyPr wrap="square" lIns="0" tIns="0" rIns="0" bIns="0" anchor="t">
+          <a:bodyPr wrap="square" anchor="t" lIns="0" rIns="0" tIns="0" bIns="0">
             <a:spAutoFit/>
           </a:bodyPr>
           <a:lstStyle/>
-          <a:p>
-            <a:r>
-              <a:rPr sz="1800" b="1" i="0" dirty="0">
-                <a:solidFill>
-                  <a:srgbClr val="EDAB0C"/>
-                </a:solidFill>
-                <a:latin typeface="Roboto"/>
-              </a:rPr>
-              <a:t>■ </a:t>
-            </a:r>
-            <a:r>
-              <a:rPr lang="en-AU" dirty="0">
-                <a:solidFill>
-                  <a:srgbClr val="2A2929"/>
-                </a:solidFill>
-                <a:latin typeface="Roboto"/>
-              </a:rPr>
-              <a:t>Recall RPO and RTO:</a:t>
-            </a:r>
-          </a:p>
-          <a:p>
-            <a:pPr marL="742950" lvl="1" indent="-285750">
-              <a:buFont typeface="Arial" panose="020B0604020202020204" pitchFamily="34" charset="0"/>
-              <a:buChar char="•"/>
-            </a:pPr>
-            <a:r>
-              <a:rPr lang="en-AU" dirty="0">
-                <a:solidFill>
-                  <a:srgbClr val="2A2929"/>
-                </a:solidFill>
-                <a:latin typeface="Roboto"/>
-              </a:rPr>
-              <a:t>Recovery Time Objective – How much downtime an organisation can tolerate.</a:t>
-            </a:r>
-          </a:p>
-          <a:p>
-            <a:pPr marL="742950" lvl="1" indent="-285750">
-              <a:buFont typeface="Arial" panose="020B0604020202020204" pitchFamily="34" charset="0"/>
-              <a:buChar char="•"/>
-            </a:pPr>
-            <a:r>
-              <a:rPr lang="en-AU" dirty="0">
-                <a:solidFill>
-                  <a:srgbClr val="2A2929"/>
-                </a:solidFill>
-                <a:latin typeface="Roboto"/>
-              </a:rPr>
-              <a:t>Recovery Point Objective – How much data loss it tolerable.</a:t>
-            </a:r>
-            <a:endParaRPr lang="en-US" dirty="0">
-              <a:solidFill>
-                <a:srgbClr val="2A2929"/>
-              </a:solidFill>
-              <a:latin typeface="Roboto"/>
-            </a:endParaRPr>
-          </a:p>
-          <a:p>
-            <a:pPr>
-              <a:lnSpc>
-                <a:spcPct val="105000"/>
-              </a:lnSpc>
-              <a:spcAft>
-                <a:spcPts val="1000"/>
-              </a:spcAft>
-            </a:pPr>
-            <a:r>
-              <a:rPr lang="en-AU" b="1" dirty="0">
-                <a:solidFill>
-                  <a:srgbClr val="EDAB0C"/>
-                </a:solidFill>
-                <a:latin typeface="Roboto"/>
-              </a:rPr>
-              <a:t>■ </a:t>
-            </a:r>
-            <a:r>
-              <a:rPr sz="1800" b="0" i="0" dirty="0">
-                <a:solidFill>
-                  <a:srgbClr val="2A2929"/>
-                </a:solidFill>
-                <a:latin typeface="Roboto"/>
-              </a:rPr>
-              <a:t>Estimate the baseline's RPO from the backup interval, and its RTO from recovery-per-tier + testing.</a:t>
-            </a:r>
-          </a:p>
-          <a:p>
-            <a:r>
-              <a:rPr sz="1800" b="1" i="0" dirty="0">
-                <a:solidFill>
-                  <a:srgbClr val="EDAB0C"/>
-                </a:solidFill>
-                <a:latin typeface="Roboto"/>
-              </a:rPr>
-              <a:t>■  </a:t>
-            </a:r>
-            <a:r>
-              <a:rPr lang="en-AU" dirty="0">
-                <a:solidFill>
-                  <a:srgbClr val="2A2929"/>
-                </a:solidFill>
-                <a:latin typeface="Roboto"/>
-              </a:rPr>
-              <a:t>If backups run every 15 minutes and it takes 30 minutes each to recover each layer:</a:t>
-            </a:r>
-          </a:p>
-          <a:p>
-            <a:pPr lvl="1"/>
-            <a:r>
-              <a:rPr lang="en-AU" dirty="0">
-                <a:solidFill>
-                  <a:srgbClr val="2A2929"/>
-                </a:solidFill>
-                <a:latin typeface="Roboto"/>
-              </a:rPr>
-              <a:t>Max data loss: up to 15 minutes</a:t>
-            </a:r>
-          </a:p>
-          <a:p>
-            <a:pPr lvl="1"/>
-            <a:r>
-              <a:rPr lang="en-AU" dirty="0">
-                <a:solidFill>
-                  <a:srgbClr val="2A2929"/>
-                </a:solidFill>
-                <a:latin typeface="Roboto"/>
-              </a:rPr>
-              <a:t>Max outage: 30 min x 3 layers = 1.5 hours</a:t>
-            </a:r>
-          </a:p>
-          <a:p>
-            <a:pPr lvl="1"/>
-            <a:r>
-              <a:rPr lang="en-AU" dirty="0">
-                <a:solidFill>
-                  <a:srgbClr val="2A2929"/>
-                </a:solidFill>
-                <a:latin typeface="Roboto"/>
-              </a:rPr>
-              <a:t>Integration and testing = 1 hour</a:t>
-            </a:r>
-          </a:p>
-          <a:p>
-            <a:r>
-              <a:rPr lang="en-AU" b="1" dirty="0">
-                <a:solidFill>
-                  <a:srgbClr val="EDAB0C"/>
-                </a:solidFill>
-                <a:latin typeface="Roboto"/>
-              </a:rPr>
-              <a:t>■ </a:t>
-            </a:r>
-            <a:r>
-              <a:rPr lang="en-AU" dirty="0">
-                <a:solidFill>
-                  <a:srgbClr val="2A2929"/>
-                </a:solidFill>
-                <a:latin typeface="Roboto"/>
-              </a:rPr>
-              <a:t>This system has an RPO of 15 min, RTO of 2.5 hours</a:t>
-            </a:r>
-          </a:p>
           <a:p>
             <a:pPr marL="0" indent="0">
               <a:lnSpc>
@@ -12183,13 +11287,84 @@
               </a:spcAft>
             </a:pPr>
             <a:r>
-              <a:rPr sz="1800" b="1" i="0" dirty="0">
+              <a:rPr sz="1800" b="1" i="0">
+                <a:solidFill>
+                  <a:srgbClr val="EDAB0C"/>
+                </a:solidFill>
+                <a:latin typeface="Roboto"/>
+              </a:rPr>
+              <a:t>■  </a:t>
+            </a:r>
+            <a:r>
+              <a:rPr sz="1800" b="0" i="0">
+                <a:solidFill>
+                  <a:srgbClr val="2A2929"/>
+                </a:solidFill>
+                <a:latin typeface="Roboto"/>
+              </a:rPr>
+              <a:t>Estimate the baseline's RPO from the backup interval, and its RTO from recovery-per-tier + testing.</a:t>
+            </a:r>
+          </a:p>
+          <a:p>
+            <a:pPr marL="0" indent="0">
+              <a:lnSpc>
+                <a:spcPct val="105000"/>
+              </a:lnSpc>
+              <a:spcBef>
+                <a:spcPts val="0"/>
+              </a:spcBef>
+              <a:spcAft>
+                <a:spcPts val="1000"/>
+              </a:spcAft>
+            </a:pPr>
+            <a:r>
+              <a:rPr sz="1800" b="1" i="0">
+                <a:solidFill>
+                  <a:srgbClr val="EDAB0C"/>
+                </a:solidFill>
+                <a:latin typeface="Roboto"/>
+              </a:rPr>
+              <a:t>■  </a:t>
+            </a:r>
+            <a:r>
+              <a:rPr sz="1800" b="0" i="0">
+                <a:solidFill>
+                  <a:srgbClr val="2A2929"/>
+                </a:solidFill>
+                <a:latin typeface="Roboto"/>
+              </a:rPr>
+              <a:t>Worked example: 15-min backups → RPO 15 min; 30 min × 3 tiers + 1 h test → RTO 2.5 h.</a:t>
+            </a:r>
+          </a:p>
+          <a:p>
+            <a:pPr marL="0" indent="0">
+              <a:lnSpc>
+                <a:spcPct val="105000"/>
+              </a:lnSpc>
+              <a:spcBef>
+                <a:spcPts val="0"/>
+              </a:spcBef>
+              <a:spcAft>
+                <a:spcPts val="1000"/>
+              </a:spcAft>
+            </a:pPr>
+            <a:r>
+              <a:rPr sz="1800" b="1" i="0">
                 <a:solidFill>
                   <a:srgbClr val="92268F"/>
                 </a:solidFill>
                 <a:latin typeface="Roboto"/>
               </a:rPr>
-              <a:t>■  Flag components that scale vertically (they carry downtime) and the availability impact.</a:t>
+              <a:t>■  </a:t>
+            </a:r>
+            <a:r>
+              <a:rPr sz="1800" b="1" i="0">
+                <a:solidFill>
+                  <a:srgbClr val="92268F"/>
+                </a:solidFill>
+                <a:latin typeface="Roboto"/>
+              </a:rPr>
+              <a:t>Flag components that scale vertically (they carry downtime) and the availability impact.</a:t>
             </a:r>
           </a:p>
         </p:txBody>
@@ -12235,7 +11410,6 @@
           <a:lstStyle/>
           <a:p>
             <a:pPr algn="ctr"/>
-            <a:endParaRPr/>
           </a:p>
         </p:txBody>
       </p:sp>
@@ -12256,7 +11430,7 @@
           <a:noFill/>
         </p:spPr>
         <p:txBody>
-          <a:bodyPr wrap="square" lIns="0" tIns="0" rIns="0" bIns="0" anchor="t">
+          <a:bodyPr wrap="square" anchor="t" lIns="0" rIns="0" tIns="0" bIns="0">
             <a:spAutoFit/>
           </a:bodyPr>
           <a:lstStyle/>
@@ -12299,7 +11473,7 @@
           <a:noFill/>
         </p:spPr>
         <p:txBody>
-          <a:bodyPr wrap="square" lIns="0" tIns="0" rIns="0" bIns="0" anchor="t">
+          <a:bodyPr wrap="square" anchor="t" lIns="0" rIns="0" tIns="0" bIns="0">
             <a:spAutoFit/>
           </a:bodyPr>
           <a:lstStyle/>
@@ -12317,44 +11491,6 @@
           </a:p>
         </p:txBody>
       </p:sp>
-      <p:pic>
-        <p:nvPicPr>
-          <p:cNvPr id="8" name="Picture 7">
-            <a:extLst>
-              <a:ext uri="{FF2B5EF4-FFF2-40B4-BE49-F238E27FC236}">
-                <a16:creationId xmlns:a16="http://schemas.microsoft.com/office/drawing/2014/main" id="{2F9A140F-D7E0-41F4-4C20-21D1BE970EF3}"/>
-              </a:ext>
-            </a:extLst>
-          </p:cNvPr>
-          <p:cNvPicPr>
-            <a:picLocks noChangeAspect="1"/>
-          </p:cNvPicPr>
-          <p:nvPr/>
-        </p:nvPicPr>
-        <p:blipFill>
-          <a:blip r:embed="rId2">
-            <a:extLst>
-              <a:ext uri="{28A0092B-C50C-407E-A947-70E740481C1C}">
-                <a14:useLocalDpi xmlns:a14="http://schemas.microsoft.com/office/drawing/2010/main" val="0"/>
-              </a:ext>
-            </a:extLst>
-          </a:blip>
-          <a:srcRect b="4952"/>
-          <a:stretch>
-            <a:fillRect/>
-          </a:stretch>
-        </p:blipFill>
-        <p:spPr bwMode="auto">
-          <a:xfrm>
-            <a:off x="7674722" y="675903"/>
-            <a:ext cx="3846718" cy="5078175"/>
-          </a:xfrm>
-          <a:prstGeom prst="rect">
-            <a:avLst/>
-          </a:prstGeom>
-          <a:noFill/>
-        </p:spPr>
-      </p:pic>
     </p:spTree>
   </p:cSld>
   <p:clrMapOvr>
@@ -12364,7 +11500,7 @@
 </file>
 
 <file path=ppt/slides/slide7.xml><?xml version="1.0" encoding="utf-8"?>
-<p:sld xmlns:a="http://schemas.openxmlformats.org/drawingml/2006/main" xmlns:r="http://schemas.openxmlformats.org/officeDocument/2006/relationships" xmlns:p="http://schemas.openxmlformats.org/presentationml/2006/main">
+<p:sld xmlns:a="http://schemas.openxmlformats.org/drawingml/2006/main" xmlns:p="http://schemas.openxmlformats.org/presentationml/2006/main" xmlns:r="http://schemas.openxmlformats.org/officeDocument/2006/relationships">
   <p:cSld>
     <p:bg>
       <p:bgPr>
@@ -12380,14 +11516,7 @@
         <p:cNvGrpSpPr/>
         <p:nvPr/>
       </p:nvGrpSpPr>
-      <p:grpSpPr>
-        <a:xfrm>
-          <a:off x="0" y="0"/>
-          <a:ext cx="0" cy="0"/>
-          <a:chOff x="0" y="0"/>
-          <a:chExt cx="0" cy="0"/>
-        </a:xfrm>
-      </p:grpSpPr>
+      <p:grpSpPr/>
       <p:sp>
         <p:nvSpPr>
           <p:cNvPr id="2" name="Rectangle 1"/>
@@ -12429,7 +11558,6 @@
           <a:lstStyle/>
           <a:p>
             <a:pPr algn="ctr"/>
-            <a:endParaRPr/>
           </a:p>
         </p:txBody>
       </p:sp>
@@ -12503,7 +11631,7 @@
           <a:noFill/>
         </p:spPr>
         <p:txBody>
-          <a:bodyPr wrap="square" lIns="0" tIns="0" rIns="0" bIns="0" anchor="ctr">
+          <a:bodyPr wrap="square" anchor="ctr" lIns="0" rIns="0" tIns="0" bIns="0">
             <a:spAutoFit/>
           </a:bodyPr>
           <a:lstStyle/>
@@ -12537,7 +11665,7 @@
           <a:noFill/>
         </p:spPr>
         <p:txBody>
-          <a:bodyPr wrap="square" lIns="0" tIns="0" rIns="0" bIns="0" anchor="t">
+          <a:bodyPr wrap="square" anchor="t" lIns="0" rIns="0" tIns="0" bIns="0">
             <a:spAutoFit/>
           </a:bodyPr>
           <a:lstStyle/>
@@ -12684,7 +11812,16 @@
                 </a:solidFill>
                 <a:latin typeface="Roboto"/>
               </a:rPr>
-              <a:t>■  Document your findings — they drive the design.</a:t>
+              <a:t>■  </a:t>
+            </a:r>
+            <a:r>
+              <a:rPr sz="1700" b="1" i="0">
+                <a:solidFill>
+                  <a:srgbClr val="92268F"/>
+                </a:solidFill>
+                <a:latin typeface="Roboto"/>
+              </a:rPr>
+              <a:t>Document your findings — they drive the design.</a:t>
             </a:r>
           </a:p>
         </p:txBody>
@@ -12732,7 +11869,6 @@
           <a:lstStyle/>
           <a:p>
             <a:pPr algn="ctr"/>
-            <a:endParaRPr/>
           </a:p>
         </p:txBody>
       </p:sp>
@@ -12753,7 +11889,7 @@
           <a:noFill/>
         </p:spPr>
         <p:txBody>
-          <a:bodyPr wrap="square" lIns="0" tIns="0" rIns="0" bIns="0" anchor="ctr">
+          <a:bodyPr wrap="square" anchor="ctr" lIns="0" rIns="0" tIns="0" bIns="0">
             <a:spAutoFit/>
           </a:bodyPr>
           <a:lstStyle/>
@@ -12811,7 +11947,6 @@
           <a:lstStyle/>
           <a:p>
             <a:pPr algn="ctr"/>
-            <a:endParaRPr/>
           </a:p>
         </p:txBody>
       </p:sp>
@@ -12832,7 +11967,7 @@
           <a:noFill/>
         </p:spPr>
         <p:txBody>
-          <a:bodyPr wrap="square" lIns="0" tIns="0" rIns="0" bIns="0" anchor="t">
+          <a:bodyPr wrap="square" anchor="t" lIns="0" rIns="0" tIns="0" bIns="0">
             <a:spAutoFit/>
           </a:bodyPr>
           <a:lstStyle/>
@@ -12875,7 +12010,7 @@
           <a:noFill/>
         </p:spPr>
         <p:txBody>
-          <a:bodyPr wrap="square" lIns="0" tIns="0" rIns="0" bIns="0" anchor="t">
+          <a:bodyPr wrap="square" anchor="t" lIns="0" rIns="0" tIns="0" bIns="0">
             <a:spAutoFit/>
           </a:bodyPr>
           <a:lstStyle/>
@@ -12902,7 +12037,7 @@
 </file>
 
 <file path=ppt/slides/slide8.xml><?xml version="1.0" encoding="utf-8"?>
-<p:sld xmlns:a="http://schemas.openxmlformats.org/drawingml/2006/main" xmlns:r="http://schemas.openxmlformats.org/officeDocument/2006/relationships" xmlns:p="http://schemas.openxmlformats.org/presentationml/2006/main">
+<p:sld xmlns:a="http://schemas.openxmlformats.org/drawingml/2006/main" xmlns:p="http://schemas.openxmlformats.org/presentationml/2006/main" xmlns:r="http://schemas.openxmlformats.org/officeDocument/2006/relationships">
   <p:cSld>
     <p:bg>
       <p:bgPr>
@@ -12918,14 +12053,7 @@
         <p:cNvGrpSpPr/>
         <p:nvPr/>
       </p:nvGrpSpPr>
-      <p:grpSpPr>
-        <a:xfrm>
-          <a:off x="0" y="0"/>
-          <a:ext cx="0" cy="0"/>
-          <a:chOff x="0" y="0"/>
-          <a:chExt cx="0" cy="0"/>
-        </a:xfrm>
-      </p:grpSpPr>
+      <p:grpSpPr/>
       <p:sp>
         <p:nvSpPr>
           <p:cNvPr id="2" name="TextBox 1"/>
@@ -12943,7 +12071,7 @@
           <a:noFill/>
         </p:spPr>
         <p:txBody>
-          <a:bodyPr wrap="square" lIns="0" tIns="0" rIns="0" bIns="0" anchor="t">
+          <a:bodyPr wrap="square" anchor="t" lIns="0" rIns="0" tIns="0" bIns="0">
             <a:spAutoFit/>
           </a:bodyPr>
           <a:lstStyle/>
@@ -13017,7 +12145,6 @@
           <a:lstStyle/>
           <a:p>
             <a:pPr algn="ctr"/>
-            <a:endParaRPr/>
           </a:p>
         </p:txBody>
       </p:sp>
@@ -13064,7 +12191,6 @@
           <a:lstStyle/>
           <a:p>
             <a:pPr algn="ctr"/>
-            <a:endParaRPr/>
           </a:p>
         </p:txBody>
       </p:sp>
@@ -13109,7 +12235,6 @@
           <a:lstStyle/>
           <a:p>
             <a:pPr algn="ctr"/>
-            <a:endParaRPr/>
           </a:p>
         </p:txBody>
       </p:sp>
@@ -13130,7 +12255,7 @@
           <a:noFill/>
         </p:spPr>
         <p:txBody>
-          <a:bodyPr wrap="square" lIns="0" tIns="0" rIns="0" bIns="0" anchor="ctr">
+          <a:bodyPr wrap="square" anchor="ctr" lIns="0" rIns="0" tIns="0" bIns="0">
             <a:spAutoFit/>
           </a:bodyPr>
           <a:lstStyle/>
@@ -13195,7 +12320,6 @@
           <a:lstStyle/>
           <a:p>
             <a:pPr algn="ctr"/>
-            <a:endParaRPr/>
           </a:p>
         </p:txBody>
       </p:sp>
@@ -13240,7 +12364,6 @@
           <a:lstStyle/>
           <a:p>
             <a:pPr algn="ctr"/>
-            <a:endParaRPr/>
           </a:p>
         </p:txBody>
       </p:sp>
@@ -13261,7 +12384,7 @@
           <a:noFill/>
         </p:spPr>
         <p:txBody>
-          <a:bodyPr wrap="square" lIns="0" tIns="0" rIns="0" bIns="0" anchor="ctr">
+          <a:bodyPr wrap="square" anchor="ctr" lIns="0" rIns="0" tIns="0" bIns="0">
             <a:spAutoFit/>
           </a:bodyPr>
           <a:lstStyle/>
@@ -13326,7 +12449,6 @@
           <a:lstStyle/>
           <a:p>
             <a:pPr algn="ctr"/>
-            <a:endParaRPr/>
           </a:p>
         </p:txBody>
       </p:sp>
@@ -13371,7 +12493,6 @@
           <a:lstStyle/>
           <a:p>
             <a:pPr algn="ctr"/>
-            <a:endParaRPr/>
           </a:p>
         </p:txBody>
       </p:sp>
@@ -13392,7 +12513,7 @@
           <a:noFill/>
         </p:spPr>
         <p:txBody>
-          <a:bodyPr wrap="square" lIns="0" tIns="0" rIns="0" bIns="0" anchor="ctr">
+          <a:bodyPr wrap="square" anchor="ctr" lIns="0" rIns="0" tIns="0" bIns="0">
             <a:spAutoFit/>
           </a:bodyPr>
           <a:lstStyle/>
@@ -13457,7 +12578,6 @@
           <a:lstStyle/>
           <a:p>
             <a:pPr algn="ctr"/>
-            <a:endParaRPr/>
           </a:p>
         </p:txBody>
       </p:sp>
@@ -13502,7 +12622,6 @@
           <a:lstStyle/>
           <a:p>
             <a:pPr algn="ctr"/>
-            <a:endParaRPr/>
           </a:p>
         </p:txBody>
       </p:sp>
@@ -13523,7 +12642,7 @@
           <a:noFill/>
         </p:spPr>
         <p:txBody>
-          <a:bodyPr wrap="square" lIns="0" tIns="0" rIns="0" bIns="0" anchor="ctr">
+          <a:bodyPr wrap="square" anchor="ctr" lIns="0" rIns="0" tIns="0" bIns="0">
             <a:spAutoFit/>
           </a:bodyPr>
           <a:lstStyle/>
@@ -13586,7 +12705,6 @@
           <a:lstStyle/>
           <a:p>
             <a:pPr algn="ctr"/>
-            <a:endParaRPr/>
           </a:p>
         </p:txBody>
       </p:sp>
@@ -13607,7 +12725,7 @@
           <a:noFill/>
         </p:spPr>
         <p:txBody>
-          <a:bodyPr wrap="square" lIns="0" tIns="0" rIns="0" bIns="0" anchor="t">
+          <a:bodyPr wrap="square" anchor="t" lIns="0" rIns="0" tIns="0" bIns="0">
             <a:spAutoFit/>
           </a:bodyPr>
           <a:lstStyle/>
@@ -13650,7 +12768,7 @@
           <a:noFill/>
         </p:spPr>
         <p:txBody>
-          <a:bodyPr wrap="square" lIns="0" tIns="0" rIns="0" bIns="0" anchor="t">
+          <a:bodyPr wrap="square" anchor="t" lIns="0" rIns="0" tIns="0" bIns="0">
             <a:spAutoFit/>
           </a:bodyPr>
           <a:lstStyle/>
@@ -13677,7 +12795,7 @@
 </file>
 
 <file path=ppt/slides/slide9.xml><?xml version="1.0" encoding="utf-8"?>
-<p:sld xmlns:a="http://schemas.openxmlformats.org/drawingml/2006/main" xmlns:r="http://schemas.openxmlformats.org/officeDocument/2006/relationships" xmlns:p="http://schemas.openxmlformats.org/presentationml/2006/main">
+<p:sld xmlns:a="http://schemas.openxmlformats.org/drawingml/2006/main" xmlns:p="http://schemas.openxmlformats.org/presentationml/2006/main" xmlns:r="http://schemas.openxmlformats.org/officeDocument/2006/relationships">
   <p:cSld>
     <p:bg>
       <p:bgPr>
@@ -13693,14 +12811,7 @@
         <p:cNvGrpSpPr/>
         <p:nvPr/>
       </p:nvGrpSpPr>
-      <p:grpSpPr>
-        <a:xfrm>
-          <a:off x="0" y="0"/>
-          <a:ext cx="0" cy="0"/>
-          <a:chOff x="0" y="0"/>
-          <a:chExt cx="0" cy="0"/>
-        </a:xfrm>
-      </p:grpSpPr>
+      <p:grpSpPr/>
       <p:sp>
         <p:nvSpPr>
           <p:cNvPr id="2" name="Rectangle 1"/>
@@ -13742,7 +12853,6 @@
           <a:lstStyle/>
           <a:p>
             <a:pPr algn="ctr"/>
-            <a:endParaRPr/>
           </a:p>
         </p:txBody>
       </p:sp>
@@ -13763,7 +12873,7 @@
           <a:noFill/>
         </p:spPr>
         <p:txBody>
-          <a:bodyPr wrap="square" lIns="0" tIns="0" rIns="0" bIns="0" anchor="t">
+          <a:bodyPr wrap="square" anchor="t" lIns="0" rIns="0" tIns="0" bIns="0">
             <a:spAutoFit/>
           </a:bodyPr>
           <a:lstStyle/>
@@ -13797,7 +12907,7 @@
           <a:noFill/>
         </p:spPr>
         <p:txBody>
-          <a:bodyPr wrap="square" lIns="0" tIns="0" rIns="0" bIns="0" anchor="t">
+          <a:bodyPr wrap="square" anchor="t" lIns="0" rIns="0" tIns="0" bIns="0">
             <a:spAutoFit/>
           </a:bodyPr>
           <a:lstStyle/>
@@ -13887,7 +12997,6 @@
           <a:lstStyle/>
           <a:p>
             <a:pPr algn="ctr"/>
-            <a:endParaRPr/>
           </a:p>
         </p:txBody>
       </p:sp>
@@ -13908,7 +13017,7 @@
           <a:noFill/>
         </p:spPr>
         <p:txBody>
-          <a:bodyPr wrap="square" lIns="0" tIns="0" rIns="0" bIns="0" anchor="t">
+          <a:bodyPr wrap="square" anchor="t" lIns="0" rIns="0" tIns="0" bIns="0">
             <a:spAutoFit/>
           </a:bodyPr>
           <a:lstStyle/>
@@ -13951,13 +13060,21 @@
           <a:noFill/>
         </p:spPr>
         <p:txBody>
-          <a:bodyPr wrap="square" lIns="0" tIns="0" rIns="0" bIns="0" anchor="t">
+          <a:bodyPr wrap="square" anchor="t" lIns="0" rIns="0" tIns="0" bIns="0">
             <a:spAutoFit/>
           </a:bodyPr>
           <a:lstStyle/>
           <a:p>
             <a:pPr algn="r"/>
-            <a:endParaRPr/>
+            <a:r>
+              <a:rPr sz="1100" b="0" i="0">
+                <a:solidFill>
+                  <a:srgbClr val="7A7A7A"/>
+                </a:solidFill>
+                <a:latin typeface="Roboto"/>
+              </a:rPr>
+              <a:t/>
+            </a:r>
           </a:p>
         </p:txBody>
       </p:sp>
@@ -14287,319 +13404,4 @@
   </a:objectDefaults>
   <a:extraClrSchemeLst/>
 </a:theme>
-</file>
-
-<file path=ppt/theme/theme2.xml><?xml version="1.0" encoding="utf-8"?>
-<a:theme xmlns:a="http://schemas.openxmlformats.org/drawingml/2006/main" name="Office Theme">
-  <a:themeElements>
-    <a:clrScheme name="Office">
-      <a:dk1>
-        <a:sysClr val="windowText" lastClr="000000"/>
-      </a:dk1>
-      <a:lt1>
-        <a:sysClr val="window" lastClr="FFFFFF"/>
-      </a:lt1>
-      <a:dk2>
-        <a:srgbClr val="0E2841"/>
-      </a:dk2>
-      <a:lt2>
-        <a:srgbClr val="E8E8E8"/>
-      </a:lt2>
-      <a:accent1>
-        <a:srgbClr val="156082"/>
-      </a:accent1>
-      <a:accent2>
-        <a:srgbClr val="E97132"/>
-      </a:accent2>
-      <a:accent3>
-        <a:srgbClr val="196B24"/>
-      </a:accent3>
-      <a:accent4>
-        <a:srgbClr val="0F9ED5"/>
-      </a:accent4>
-      <a:accent5>
-        <a:srgbClr val="A02B93"/>
-      </a:accent5>
-      <a:accent6>
-        <a:srgbClr val="4EA72E"/>
-      </a:accent6>
-      <a:hlink>
-        <a:srgbClr val="467886"/>
-      </a:hlink>
-      <a:folHlink>
-        <a:srgbClr val="96607D"/>
-      </a:folHlink>
-    </a:clrScheme>
-    <a:fontScheme name="Office">
-      <a:majorFont>
-        <a:latin typeface="Aptos Display" panose="02110004020202020204"/>
-        <a:ea typeface=""/>
-        <a:cs typeface=""/>
-        <a:font script="Jpan" typeface="游ゴシック Light"/>
-        <a:font script="Hang" typeface="맑은 고딕"/>
-        <a:font script="Hans" typeface="等线 Light"/>
-        <a:font script="Hant" typeface="新細明體"/>
-        <a:font script="Arab" typeface="Times New Roman"/>
-        <a:font script="Hebr" typeface="Times New Roman"/>
-        <a:font script="Thai" typeface="Angsana New"/>
-        <a:font script="Ethi" typeface="Nyala"/>
-        <a:font script="Beng" typeface="Vrinda"/>
-        <a:font script="Gujr" typeface="Shruti"/>
-        <a:font script="Khmr" typeface="MoolBoran"/>
-        <a:font script="Knda" typeface="Tunga"/>
-        <a:font script="Guru" typeface="Raavi"/>
-        <a:font script="Cans" typeface="Euphemia"/>
-        <a:font script="Cher" typeface="Plantagenet Cherokee"/>
-        <a:font script="Yiii" typeface="Microsoft Yi Baiti"/>
-        <a:font script="Tibt" typeface="Microsoft Himalaya"/>
-        <a:font script="Thaa" typeface="MV Boli"/>
-        <a:font script="Deva" typeface="Mangal"/>
-        <a:font script="Telu" typeface="Gautami"/>
-        <a:font script="Taml" typeface="Latha"/>
-        <a:font script="Syrc" typeface="Estrangelo Edessa"/>
-        <a:font script="Orya" typeface="Kalinga"/>
-        <a:font script="Mlym" typeface="Kartika"/>
-        <a:font script="Laoo" typeface="DokChampa"/>
-        <a:font script="Sinh" typeface="Iskoola Pota"/>
-        <a:font script="Mong" typeface="Mongolian Baiti"/>
-        <a:font script="Viet" typeface="Times New Roman"/>
-        <a:font script="Uigh" typeface="Microsoft Uighur"/>
-        <a:font script="Geor" typeface="Sylfaen"/>
-        <a:font script="Armn" typeface="Arial"/>
-        <a:font script="Bugi" typeface="Leelawadee UI"/>
-        <a:font script="Bopo" typeface="Microsoft JhengHei"/>
-        <a:font script="Java" typeface="Javanese Text"/>
-        <a:font script="Lisu" typeface="Segoe UI"/>
-        <a:font script="Mymr" typeface="Myanmar Text"/>
-        <a:font script="Nkoo" typeface="Ebrima"/>
-        <a:font script="Olck" typeface="Nirmala UI"/>
-        <a:font script="Osma" typeface="Ebrima"/>
-        <a:font script="Phag" typeface="Phagspa"/>
-        <a:font script="Syrn" typeface="Estrangelo Edessa"/>
-        <a:font script="Syrj" typeface="Estrangelo Edessa"/>
-        <a:font script="Syre" typeface="Estrangelo Edessa"/>
-        <a:font script="Sora" typeface="Nirmala UI"/>
-        <a:font script="Tale" typeface="Microsoft Tai Le"/>
-        <a:font script="Talu" typeface="Microsoft New Tai Lue"/>
-        <a:font script="Tfng" typeface="Ebrima"/>
-      </a:majorFont>
-      <a:minorFont>
-        <a:latin typeface="Aptos" panose="02110004020202020204"/>
-        <a:ea typeface=""/>
-        <a:cs typeface=""/>
-        <a:font script="Jpan" typeface="游ゴシック"/>
-        <a:font script="Hang" typeface="맑은 고딕"/>
-        <a:font script="Hans" typeface="等线"/>
-        <a:font script="Hant" typeface="新細明體"/>
-        <a:font script="Arab" typeface="Arial"/>
-        <a:font script="Hebr" typeface="Arial"/>
-        <a:font script="Thai" typeface="Cordia New"/>
-        <a:font script="Ethi" typeface="Nyala"/>
-        <a:font script="Beng" typeface="Vrinda"/>
-        <a:font script="Gujr" typeface="Shruti"/>
-        <a:font script="Khmr" typeface="DaunPenh"/>
-        <a:font script="Knda" typeface="Tunga"/>
-        <a:font script="Guru" typeface="Raavi"/>
-        <a:font script="Cans" typeface="Euphemia"/>
-        <a:font script="Cher" typeface="Plantagenet Cherokee"/>
-        <a:font script="Yiii" typeface="Microsoft Yi Baiti"/>
-        <a:font script="Tibt" typeface="Microsoft Himalaya"/>
-        <a:font script="Thaa" typeface="MV Boli"/>
-        <a:font script="Deva" typeface="Mangal"/>
-        <a:font script="Telu" typeface="Gautami"/>
-        <a:font script="Taml" typeface="Latha"/>
-        <a:font script="Syrc" typeface="Estrangelo Edessa"/>
-        <a:font script="Orya" typeface="Kalinga"/>
-        <a:font script="Mlym" typeface="Kartika"/>
-        <a:font script="Laoo" typeface="DokChampa"/>
-        <a:font script="Sinh" typeface="Iskoola Pota"/>
-        <a:font script="Mong" typeface="Mongolian Baiti"/>
-        <a:font script="Viet" typeface="Arial"/>
-        <a:font script="Uigh" typeface="Microsoft Uighur"/>
-        <a:font script="Geor" typeface="Sylfaen"/>
-        <a:font script="Armn" typeface="Arial"/>
-        <a:font script="Bugi" typeface="Leelawadee UI"/>
-        <a:font script="Bopo" typeface="Microsoft JhengHei"/>
-        <a:font script="Java" typeface="Javanese Text"/>
-        <a:font script="Lisu" typeface="Segoe UI"/>
-        <a:font script="Mymr" typeface="Myanmar Text"/>
-        <a:font script="Nkoo" typeface="Ebrima"/>
-        <a:font script="Olck" typeface="Nirmala UI"/>
-        <a:font script="Osma" typeface="Ebrima"/>
-        <a:font script="Phag" typeface="Phagspa"/>
-        <a:font script="Syrn" typeface="Estrangelo Edessa"/>
-        <a:font script="Syrj" typeface="Estrangelo Edessa"/>
-        <a:font script="Syre" typeface="Estrangelo Edessa"/>
-        <a:font script="Sora" typeface="Nirmala UI"/>
-        <a:font script="Tale" typeface="Microsoft Tai Le"/>
-        <a:font script="Talu" typeface="Microsoft New Tai Lue"/>
-        <a:font script="Tfng" typeface="Ebrima"/>
-      </a:minorFont>
-    </a:fontScheme>
-    <a:fmtScheme name="Office">
-      <a:fillStyleLst>
-        <a:solidFill>
-          <a:schemeClr val="phClr"/>
-        </a:solidFill>
-        <a:gradFill rotWithShape="1">
-          <a:gsLst>
-            <a:gs pos="0">
-              <a:schemeClr val="phClr">
-                <a:lumMod val="110000"/>
-                <a:satMod val="105000"/>
-                <a:tint val="67000"/>
-              </a:schemeClr>
-            </a:gs>
-            <a:gs pos="50000">
-              <a:schemeClr val="phClr">
-                <a:lumMod val="105000"/>
-                <a:satMod val="103000"/>
-                <a:tint val="73000"/>
-              </a:schemeClr>
-            </a:gs>
-            <a:gs pos="100000">
-              <a:schemeClr val="phClr">
-                <a:lumMod val="105000"/>
-                <a:satMod val="109000"/>
-                <a:tint val="81000"/>
-              </a:schemeClr>
-            </a:gs>
-          </a:gsLst>
-          <a:lin ang="5400000" scaled="0"/>
-        </a:gradFill>
-        <a:gradFill rotWithShape="1">
-          <a:gsLst>
-            <a:gs pos="0">
-              <a:schemeClr val="phClr">
-                <a:satMod val="103000"/>
-                <a:lumMod val="102000"/>
-                <a:tint val="94000"/>
-              </a:schemeClr>
-            </a:gs>
-            <a:gs pos="50000">
-              <a:schemeClr val="phClr">
-                <a:satMod val="110000"/>
-                <a:lumMod val="100000"/>
-                <a:shade val="100000"/>
-              </a:schemeClr>
-            </a:gs>
-            <a:gs pos="100000">
-              <a:schemeClr val="phClr">
-                <a:lumMod val="99000"/>
-                <a:satMod val="120000"/>
-                <a:shade val="78000"/>
-              </a:schemeClr>
-            </a:gs>
-          </a:gsLst>
-          <a:lin ang="5400000" scaled="0"/>
-        </a:gradFill>
-      </a:fillStyleLst>
-      <a:lnStyleLst>
-        <a:ln w="12700" cap="flat" cmpd="sng" algn="ctr">
-          <a:solidFill>
-            <a:schemeClr val="phClr"/>
-          </a:solidFill>
-          <a:prstDash val="solid"/>
-          <a:miter lim="800000"/>
-        </a:ln>
-        <a:ln w="19050" cap="flat" cmpd="sng" algn="ctr">
-          <a:solidFill>
-            <a:schemeClr val="phClr"/>
-          </a:solidFill>
-          <a:prstDash val="solid"/>
-          <a:miter lim="800000"/>
-        </a:ln>
-        <a:ln w="25400" cap="flat" cmpd="sng" algn="ctr">
-          <a:solidFill>
-            <a:schemeClr val="phClr"/>
-          </a:solidFill>
-          <a:prstDash val="solid"/>
-          <a:miter lim="800000"/>
-        </a:ln>
-      </a:lnStyleLst>
-      <a:effectStyleLst>
-        <a:effectStyle>
-          <a:effectLst/>
-        </a:effectStyle>
-        <a:effectStyle>
-          <a:effectLst/>
-        </a:effectStyle>
-        <a:effectStyle>
-          <a:effectLst>
-            <a:outerShdw blurRad="57150" dist="19050" dir="5400000" algn="ctr" rotWithShape="0">
-              <a:srgbClr val="000000">
-                <a:alpha val="63000"/>
-              </a:srgbClr>
-            </a:outerShdw>
-          </a:effectLst>
-        </a:effectStyle>
-      </a:effectStyleLst>
-      <a:bgFillStyleLst>
-        <a:solidFill>
-          <a:schemeClr val="phClr"/>
-        </a:solidFill>
-        <a:solidFill>
-          <a:schemeClr val="phClr">
-            <a:tint val="95000"/>
-            <a:satMod val="170000"/>
-          </a:schemeClr>
-        </a:solidFill>
-        <a:gradFill rotWithShape="1">
-          <a:gsLst>
-            <a:gs pos="0">
-              <a:schemeClr val="phClr">
-                <a:tint val="93000"/>
-                <a:satMod val="150000"/>
-                <a:shade val="98000"/>
-                <a:lumMod val="102000"/>
-              </a:schemeClr>
-            </a:gs>
-            <a:gs pos="50000">
-              <a:schemeClr val="phClr">
-                <a:tint val="98000"/>
-                <a:satMod val="130000"/>
-                <a:shade val="90000"/>
-                <a:lumMod val="103000"/>
-              </a:schemeClr>
-            </a:gs>
-            <a:gs pos="100000">
-              <a:schemeClr val="phClr">
-                <a:shade val="63000"/>
-                <a:satMod val="120000"/>
-              </a:schemeClr>
-            </a:gs>
-          </a:gsLst>
-          <a:lin ang="5400000" scaled="0"/>
-        </a:gradFill>
-      </a:bgFillStyleLst>
-    </a:fmtScheme>
-  </a:themeElements>
-  <a:objectDefaults>
-    <a:lnDef>
-      <a:spPr/>
-      <a:bodyPr/>
-      <a:lstStyle/>
-      <a:style>
-        <a:lnRef idx="2">
-          <a:schemeClr val="accent1"/>
-        </a:lnRef>
-        <a:fillRef idx="0">
-          <a:schemeClr val="accent1"/>
-        </a:fillRef>
-        <a:effectRef idx="1">
-          <a:schemeClr val="accent1"/>
-        </a:effectRef>
-        <a:fontRef idx="minor">
-          <a:schemeClr val="tx1"/>
-        </a:fontRef>
-      </a:style>
-    </a:lnDef>
-  </a:objectDefaults>
-  <a:extraClrSchemeLst/>
-  <a:extLst>
-    <a:ext uri="{05A4C25C-085E-4340-85A3-A5531E510DB2}">
-      <thm15:themeFamily xmlns:thm15="http://schemas.microsoft.com/office/thememl/2012/main" name="Office Theme" id="{2E142A2C-CD16-42D6-873A-C26D2A0506FA}" vid="{1BDDFF52-6CD6-40A5-AB3C-68EB2F1E4D0A}"/>
-    </a:ext>
-  </a:extLst>
-</a:theme>
 </file>
--- a/S1-CL1-Cloud-Design-Build/delivery/topic_12/Topic_12_Slides.pptx
+++ b/S1-CL1-Cloud-Design-Build/delivery/topic_12/Topic_12_Slides.pptx
@@ -3408,7 +3408,7 @@
           <a:noFill/>
         </p:spPr>
         <p:txBody>
-          <a:bodyPr wrap="square" anchor="t" lIns="0" rIns="0" tIns="0" bIns="0">
+          <a:bodyPr wrap="square" anchor="ctr" lIns="0" rIns="0" tIns="0" bIns="0">
             <a:spAutoFit/>
           </a:bodyPr>
           <a:lstStyle/>
@@ -3425,7 +3425,7 @@
               </a:spcAft>
             </a:pPr>
             <a:r>
-              <a:rPr sz="1800" b="1" i="0">
+              <a:rPr sz="2400" b="1" i="0">
                 <a:solidFill>
                   <a:srgbClr val="EDAB0C"/>
                 </a:solidFill>
@@ -3434,7 +3434,7 @@
               <a:t>■  </a:t>
             </a:r>
             <a:r>
-              <a:rPr sz="1800" b="0" i="0">
+              <a:rPr sz="2400" b="0" i="0">
                 <a:solidFill>
                   <a:srgbClr val="2A2929"/>
                 </a:solidFill>
@@ -3456,7 +3456,7 @@
               </a:spcAft>
             </a:pPr>
             <a:r>
-              <a:rPr sz="1800" b="1" i="0">
+              <a:rPr sz="2400" b="1" i="0">
                 <a:solidFill>
                   <a:srgbClr val="27B5CE"/>
                 </a:solidFill>
@@ -3465,7 +3465,7 @@
               <a:t>■  </a:t>
             </a:r>
             <a:r>
-              <a:rPr sz="1800" b="1" i="0">
+              <a:rPr sz="2400" b="1" i="0">
                 <a:solidFill>
                   <a:srgbClr val="27B5CE"/>
                 </a:solidFill>
@@ -3487,7 +3487,7 @@
               </a:spcAft>
             </a:pPr>
             <a:r>
-              <a:rPr sz="1800" b="1" i="0">
+              <a:rPr sz="2400" b="1" i="0">
                 <a:solidFill>
                   <a:srgbClr val="EDAB0C"/>
                 </a:solidFill>
@@ -3496,7 +3496,7 @@
               <a:t>■  </a:t>
             </a:r>
             <a:r>
-              <a:rPr sz="1800" b="0" i="0">
+              <a:rPr sz="2400" b="0" i="0">
                 <a:solidFill>
                   <a:srgbClr val="2A2929"/>
                 </a:solidFill>
@@ -4148,7 +4148,7 @@
           <a:noFill/>
         </p:spPr>
         <p:txBody>
-          <a:bodyPr wrap="square" anchor="t" lIns="0" rIns="0" tIns="0" bIns="0">
+          <a:bodyPr wrap="square" anchor="ctr" lIns="0" rIns="0" tIns="0" bIns="0">
             <a:spAutoFit/>
           </a:bodyPr>
           <a:lstStyle/>
@@ -4165,7 +4165,7 @@
               </a:spcAft>
             </a:pPr>
             <a:r>
-              <a:rPr sz="1800" b="1" i="0">
+              <a:rPr sz="2400" b="1" i="0">
                 <a:solidFill>
                   <a:srgbClr val="EDAB0C"/>
                 </a:solidFill>
@@ -4174,7 +4174,7 @@
               <a:t>■  </a:t>
             </a:r>
             <a:r>
-              <a:rPr sz="1800" b="0" i="0">
+              <a:rPr sz="2400" b="0" i="0">
                 <a:solidFill>
                   <a:srgbClr val="2A2929"/>
                 </a:solidFill>
@@ -4196,7 +4196,7 @@
               </a:spcAft>
             </a:pPr>
             <a:r>
-              <a:rPr sz="1800" b="1" i="0">
+              <a:rPr sz="2400" b="1" i="0">
                 <a:solidFill>
                   <a:srgbClr val="EDAB0C"/>
                 </a:solidFill>
@@ -4205,7 +4205,7 @@
               <a:t>■  </a:t>
             </a:r>
             <a:r>
-              <a:rPr sz="1800" b="0" i="0">
+              <a:rPr sz="2400" b="0" i="0">
                 <a:solidFill>
                   <a:srgbClr val="2A2929"/>
                 </a:solidFill>
@@ -4227,7 +4227,7 @@
               </a:spcAft>
             </a:pPr>
             <a:r>
-              <a:rPr sz="1800" b="1" i="0">
+              <a:rPr sz="2400" b="1" i="0">
                 <a:solidFill>
                   <a:srgbClr val="EDAB0C"/>
                 </a:solidFill>
@@ -4236,7 +4236,7 @@
               <a:t>■  </a:t>
             </a:r>
             <a:r>
-              <a:rPr sz="1800" b="0" i="0">
+              <a:rPr sz="2400" b="0" i="0">
                 <a:solidFill>
                   <a:srgbClr val="2A2929"/>
                 </a:solidFill>
@@ -4258,7 +4258,7 @@
               </a:spcAft>
             </a:pPr>
             <a:r>
-              <a:rPr sz="1800" b="1" i="0">
+              <a:rPr sz="2400" b="1" i="0">
                 <a:solidFill>
                   <a:srgbClr val="27B5CE"/>
                 </a:solidFill>
@@ -4267,7 +4267,7 @@
               <a:t>■  </a:t>
             </a:r>
             <a:r>
-              <a:rPr sz="1800" b="1" i="0">
+              <a:rPr sz="2400" b="1" i="0">
                 <a:solidFill>
                   <a:srgbClr val="27B5CE"/>
                 </a:solidFill>
@@ -4537,7 +4537,7 @@
           <a:noFill/>
         </p:spPr>
         <p:txBody>
-          <a:bodyPr wrap="square" anchor="t" lIns="0" rIns="0" tIns="0" bIns="0">
+          <a:bodyPr wrap="square" anchor="ctr" lIns="0" rIns="0" tIns="0" bIns="0">
             <a:spAutoFit/>
           </a:bodyPr>
           <a:lstStyle/>
@@ -4554,7 +4554,7 @@
               </a:spcAft>
             </a:pPr>
             <a:r>
-              <a:rPr sz="1800" b="1" i="0">
+              <a:rPr sz="2400" b="1" i="0">
                 <a:solidFill>
                   <a:srgbClr val="EDAB0C"/>
                 </a:solidFill>
@@ -4563,7 +4563,7 @@
               <a:t>■  </a:t>
             </a:r>
             <a:r>
-              <a:rPr sz="1800" b="0" i="0">
+              <a:rPr sz="2400" b="0" i="0">
                 <a:solidFill>
                   <a:srgbClr val="2A2929"/>
                 </a:solidFill>
@@ -4585,7 +4585,7 @@
               </a:spcAft>
             </a:pPr>
             <a:r>
-              <a:rPr sz="1800" b="1" i="0">
+              <a:rPr sz="2400" b="1" i="0">
                 <a:solidFill>
                   <a:srgbClr val="27B5CE"/>
                 </a:solidFill>
@@ -4594,7 +4594,7 @@
               <a:t>■  </a:t>
             </a:r>
             <a:r>
-              <a:rPr sz="1800" b="1" i="0">
+              <a:rPr sz="2400" b="1" i="0">
                 <a:solidFill>
                   <a:srgbClr val="27B5CE"/>
                 </a:solidFill>
@@ -4616,7 +4616,7 @@
               </a:spcAft>
             </a:pPr>
             <a:r>
-              <a:rPr sz="1800" b="1" i="0">
+              <a:rPr sz="2400" b="1" i="0">
                 <a:solidFill>
                   <a:srgbClr val="EDAB0C"/>
                 </a:solidFill>
@@ -4625,7 +4625,7 @@
               <a:t>■  </a:t>
             </a:r>
             <a:r>
-              <a:rPr sz="1800" b="0" i="0">
+              <a:rPr sz="2400" b="0" i="0">
                 <a:solidFill>
                   <a:srgbClr val="2A2929"/>
                 </a:solidFill>
@@ -6451,7 +6451,7 @@
           <a:noFill/>
         </p:spPr>
         <p:txBody>
-          <a:bodyPr wrap="square" anchor="t" lIns="0" rIns="0" tIns="0" bIns="0">
+          <a:bodyPr wrap="square" anchor="ctr" lIns="0" rIns="0" tIns="0" bIns="0">
             <a:spAutoFit/>
           </a:bodyPr>
           <a:lstStyle/>
@@ -6468,7 +6468,7 @@
               </a:spcAft>
             </a:pPr>
             <a:r>
-              <a:rPr sz="1800" b="1" i="0">
+              <a:rPr sz="2400" b="1" i="0">
                 <a:solidFill>
                   <a:srgbClr val="EDAB0C"/>
                 </a:solidFill>
@@ -6477,7 +6477,7 @@
               <a:t>■  </a:t>
             </a:r>
             <a:r>
-              <a:rPr sz="1800" b="0" i="0">
+              <a:rPr sz="2400" b="0" i="0">
                 <a:solidFill>
                   <a:srgbClr val="2A2929"/>
                 </a:solidFill>
@@ -6499,7 +6499,7 @@
               </a:spcAft>
             </a:pPr>
             <a:r>
-              <a:rPr sz="1800" b="1" i="0">
+              <a:rPr sz="2400" b="1" i="0">
                 <a:solidFill>
                   <a:srgbClr val="EDAB0C"/>
                 </a:solidFill>
@@ -6508,7 +6508,7 @@
               <a:t>■  </a:t>
             </a:r>
             <a:r>
-              <a:rPr sz="1800" b="0" i="0">
+              <a:rPr sz="2400" b="0" i="0">
                 <a:solidFill>
                   <a:srgbClr val="2A2929"/>
                 </a:solidFill>
@@ -6530,7 +6530,7 @@
               </a:spcAft>
             </a:pPr>
             <a:r>
-              <a:rPr sz="1800" b="1" i="0">
+              <a:rPr sz="2400" b="1" i="0">
                 <a:solidFill>
                   <a:srgbClr val="EDAB0C"/>
                 </a:solidFill>
@@ -6539,7 +6539,7 @@
               <a:t>■  </a:t>
             </a:r>
             <a:r>
-              <a:rPr sz="1800" b="0" i="0">
+              <a:rPr sz="2400" b="0" i="0">
                 <a:solidFill>
                   <a:srgbClr val="2A2929"/>
                 </a:solidFill>
@@ -6561,7 +6561,7 @@
               </a:spcAft>
             </a:pPr>
             <a:r>
-              <a:rPr sz="1800" b="1" i="0">
+              <a:rPr sz="2400" b="1" i="0">
                 <a:solidFill>
                   <a:srgbClr val="205F61"/>
                 </a:solidFill>
@@ -6570,7 +6570,7 @@
               <a:t>■  </a:t>
             </a:r>
             <a:r>
-              <a:rPr sz="1800" b="1" i="0">
+              <a:rPr sz="2400" b="1" i="0">
                 <a:solidFill>
                   <a:srgbClr val="205F61"/>
                 </a:solidFill>
@@ -6840,7 +6840,7 @@
           <a:noFill/>
         </p:spPr>
         <p:txBody>
-          <a:bodyPr wrap="square" anchor="t" lIns="0" rIns="0" tIns="0" bIns="0">
+          <a:bodyPr wrap="square" anchor="ctr" lIns="0" rIns="0" tIns="0" bIns="0">
             <a:spAutoFit/>
           </a:bodyPr>
           <a:lstStyle/>
@@ -6857,7 +6857,7 @@
               </a:spcAft>
             </a:pPr>
             <a:r>
-              <a:rPr sz="1800" b="1" i="0">
+              <a:rPr sz="2400" b="1" i="0">
                 <a:solidFill>
                   <a:srgbClr val="EDAB0C"/>
                 </a:solidFill>
@@ -6866,7 +6866,7 @@
               <a:t>■  </a:t>
             </a:r>
             <a:r>
-              <a:rPr sz="1800" b="0" i="0">
+              <a:rPr sz="2400" b="0" i="0">
                 <a:solidFill>
                   <a:srgbClr val="2A2929"/>
                 </a:solidFill>
@@ -6888,7 +6888,7 @@
               </a:spcAft>
             </a:pPr>
             <a:r>
-              <a:rPr sz="1800" b="1" i="0">
+              <a:rPr sz="2400" b="1" i="0">
                 <a:solidFill>
                   <a:srgbClr val="EDAB0C"/>
                 </a:solidFill>
@@ -6897,7 +6897,7 @@
               <a:t>■  </a:t>
             </a:r>
             <a:r>
-              <a:rPr sz="1800" b="0" i="0">
+              <a:rPr sz="2400" b="0" i="0">
                 <a:solidFill>
                   <a:srgbClr val="2A2929"/>
                 </a:solidFill>
@@ -6919,7 +6919,7 @@
               </a:spcAft>
             </a:pPr>
             <a:r>
-              <a:rPr sz="1800" b="1" i="0">
+              <a:rPr sz="2400" b="1" i="0">
                 <a:solidFill>
                   <a:srgbClr val="205F61"/>
                 </a:solidFill>
@@ -6928,7 +6928,7 @@
               <a:t>■  </a:t>
             </a:r>
             <a:r>
-              <a:rPr sz="1800" b="1" i="0">
+              <a:rPr sz="2400" b="1" i="0">
                 <a:solidFill>
                   <a:srgbClr val="205F61"/>
                 </a:solidFill>
@@ -7198,7 +7198,7 @@
           <a:noFill/>
         </p:spPr>
         <p:txBody>
-          <a:bodyPr wrap="square" anchor="t" lIns="0" rIns="0" tIns="0" bIns="0">
+          <a:bodyPr wrap="square" anchor="ctr" lIns="0" rIns="0" tIns="0" bIns="0">
             <a:spAutoFit/>
           </a:bodyPr>
           <a:lstStyle/>
@@ -7215,7 +7215,7 @@
               </a:spcAft>
             </a:pPr>
             <a:r>
-              <a:rPr sz="1800" b="1" i="0">
+              <a:rPr sz="2400" b="1" i="0">
                 <a:solidFill>
                   <a:srgbClr val="EDAB0C"/>
                 </a:solidFill>
@@ -7224,7 +7224,7 @@
               <a:t>■  </a:t>
             </a:r>
             <a:r>
-              <a:rPr sz="1800" b="0" i="0">
+              <a:rPr sz="2400" b="0" i="0">
                 <a:solidFill>
                   <a:srgbClr val="2A2929"/>
                 </a:solidFill>
@@ -7246,7 +7246,7 @@
               </a:spcAft>
             </a:pPr>
             <a:r>
-              <a:rPr sz="1800" b="1" i="0">
+              <a:rPr sz="2400" b="1" i="0">
                 <a:solidFill>
                   <a:srgbClr val="205F61"/>
                 </a:solidFill>
@@ -7255,7 +7255,7 @@
               <a:t>■  </a:t>
             </a:r>
             <a:r>
-              <a:rPr sz="1800" b="1" i="0">
+              <a:rPr sz="2400" b="1" i="0">
                 <a:solidFill>
                   <a:srgbClr val="205F61"/>
                 </a:solidFill>
@@ -7277,7 +7277,7 @@
               </a:spcAft>
             </a:pPr>
             <a:r>
-              <a:rPr sz="1800" b="1" i="0">
+              <a:rPr sz="2400" b="1" i="0">
                 <a:solidFill>
                   <a:srgbClr val="EDAB0C"/>
                 </a:solidFill>
@@ -7286,7 +7286,7 @@
               <a:t>■  </a:t>
             </a:r>
             <a:r>
-              <a:rPr sz="1800" b="0" i="0">
+              <a:rPr sz="2400" b="0" i="0">
                 <a:solidFill>
                   <a:srgbClr val="2A2929"/>
                 </a:solidFill>
@@ -7556,7 +7556,7 @@
           <a:noFill/>
         </p:spPr>
         <p:txBody>
-          <a:bodyPr wrap="square" anchor="t" lIns="0" rIns="0" tIns="0" bIns="0">
+          <a:bodyPr wrap="square" anchor="ctr" lIns="0" rIns="0" tIns="0" bIns="0">
             <a:spAutoFit/>
           </a:bodyPr>
           <a:lstStyle/>
@@ -7573,7 +7573,7 @@
               </a:spcAft>
             </a:pPr>
             <a:r>
-              <a:rPr sz="1800" b="1" i="0">
+              <a:rPr sz="2400" b="1" i="0">
                 <a:solidFill>
                   <a:srgbClr val="EDAB0C"/>
                 </a:solidFill>
@@ -7582,7 +7582,7 @@
               <a:t>■  </a:t>
             </a:r>
             <a:r>
-              <a:rPr sz="1800" b="0" i="0">
+              <a:rPr sz="2400" b="0" i="0">
                 <a:solidFill>
                   <a:srgbClr val="2A2929"/>
                 </a:solidFill>
@@ -7604,7 +7604,7 @@
               </a:spcAft>
             </a:pPr>
             <a:r>
-              <a:rPr sz="1800" b="1" i="0">
+              <a:rPr sz="2400" b="1" i="0">
                 <a:solidFill>
                   <a:srgbClr val="92268F"/>
                 </a:solidFill>
@@ -7613,7 +7613,7 @@
               <a:t>■  </a:t>
             </a:r>
             <a:r>
-              <a:rPr sz="1800" b="1" i="0">
+              <a:rPr sz="2400" b="1" i="0">
                 <a:solidFill>
                   <a:srgbClr val="92268F"/>
                 </a:solidFill>
@@ -7635,7 +7635,7 @@
               </a:spcAft>
             </a:pPr>
             <a:r>
-              <a:rPr sz="1800" b="1" i="0">
+              <a:rPr sz="2400" b="1" i="0">
                 <a:solidFill>
                   <a:srgbClr val="EDAB0C"/>
                 </a:solidFill>
@@ -7644,7 +7644,7 @@
               <a:t>■  </a:t>
             </a:r>
             <a:r>
-              <a:rPr sz="1800" b="0" i="0">
+              <a:rPr sz="2400" b="0" i="0">
                 <a:solidFill>
                   <a:srgbClr val="2A2929"/>
                 </a:solidFill>
@@ -7666,7 +7666,7 @@
               </a:spcAft>
             </a:pPr>
             <a:r>
-              <a:rPr sz="1800" b="1" i="0">
+              <a:rPr sz="2400" b="1" i="0">
                 <a:solidFill>
                   <a:srgbClr val="EDAB0C"/>
                 </a:solidFill>
@@ -7675,7 +7675,7 @@
               <a:t>■  </a:t>
             </a:r>
             <a:r>
-              <a:rPr sz="1800" b="0" i="0">
+              <a:rPr sz="2400" b="0" i="0">
                 <a:solidFill>
                   <a:srgbClr val="2A2929"/>
                 </a:solidFill>
@@ -10530,7 +10530,7 @@
           <a:noFill/>
         </p:spPr>
         <p:txBody>
-          <a:bodyPr wrap="square" anchor="t" lIns="0" rIns="0" tIns="0" bIns="0">
+          <a:bodyPr wrap="square" anchor="ctr" lIns="0" rIns="0" tIns="0" bIns="0">
             <a:spAutoFit/>
           </a:bodyPr>
           <a:lstStyle/>
@@ -10547,7 +10547,7 @@
               </a:spcAft>
             </a:pPr>
             <a:r>
-              <a:rPr sz="1800" b="1" i="0">
+              <a:rPr sz="2400" b="1" i="0">
                 <a:solidFill>
                   <a:srgbClr val="EDAB0C"/>
                 </a:solidFill>
@@ -10556,7 +10556,7 @@
               <a:t>■  </a:t>
             </a:r>
             <a:r>
-              <a:rPr sz="1800" b="0" i="0">
+              <a:rPr sz="2400" b="0" i="0">
                 <a:solidFill>
                   <a:srgbClr val="2A2929"/>
                 </a:solidFill>
@@ -10578,7 +10578,7 @@
               </a:spcAft>
             </a:pPr>
             <a:r>
-              <a:rPr sz="1800" b="1" i="0">
+              <a:rPr sz="2400" b="1" i="0">
                 <a:solidFill>
                   <a:srgbClr val="EDAB0C"/>
                 </a:solidFill>
@@ -10587,7 +10587,7 @@
               <a:t>■  </a:t>
             </a:r>
             <a:r>
-              <a:rPr sz="1800" b="0" i="0">
+              <a:rPr sz="2400" b="0" i="0">
                 <a:solidFill>
                   <a:srgbClr val="2A2929"/>
                 </a:solidFill>
@@ -10609,7 +10609,7 @@
               </a:spcAft>
             </a:pPr>
             <a:r>
-              <a:rPr sz="1800" b="1" i="0">
+              <a:rPr sz="2400" b="1" i="0">
                 <a:solidFill>
                   <a:srgbClr val="92268F"/>
                 </a:solidFill>
@@ -10618,7 +10618,7 @@
               <a:t>■  </a:t>
             </a:r>
             <a:r>
-              <a:rPr sz="1800" b="1" i="0">
+              <a:rPr sz="2400" b="1" i="0">
                 <a:solidFill>
                   <a:srgbClr val="92268F"/>
                 </a:solidFill>
@@ -11270,7 +11270,7 @@
           <a:noFill/>
         </p:spPr>
         <p:txBody>
-          <a:bodyPr wrap="square" anchor="t" lIns="0" rIns="0" tIns="0" bIns="0">
+          <a:bodyPr wrap="square" anchor="ctr" lIns="0" rIns="0" tIns="0" bIns="0">
             <a:spAutoFit/>
           </a:bodyPr>
           <a:lstStyle/>
@@ -11287,7 +11287,7 @@
               </a:spcAft>
             </a:pPr>
             <a:r>
-              <a:rPr sz="1800" b="1" i="0">
+              <a:rPr sz="2400" b="1" i="0">
                 <a:solidFill>
                   <a:srgbClr val="EDAB0C"/>
                 </a:solidFill>
@@ -11296,7 +11296,7 @@
               <a:t>■  </a:t>
             </a:r>
             <a:r>
-              <a:rPr sz="1800" b="0" i="0">
+              <a:rPr sz="2400" b="0" i="0">
                 <a:solidFill>
                   <a:srgbClr val="2A2929"/>
                 </a:solidFill>
@@ -11318,7 +11318,7 @@
               </a:spcAft>
             </a:pPr>
             <a:r>
-              <a:rPr sz="1800" b="1" i="0">
+              <a:rPr sz="2400" b="1" i="0">
                 <a:solidFill>
                   <a:srgbClr val="EDAB0C"/>
                 </a:solidFill>
@@ -11327,7 +11327,7 @@
               <a:t>■  </a:t>
             </a:r>
             <a:r>
-              <a:rPr sz="1800" b="0" i="0">
+              <a:rPr sz="2400" b="0" i="0">
                 <a:solidFill>
                   <a:srgbClr val="2A2929"/>
                 </a:solidFill>
@@ -11349,7 +11349,7 @@
               </a:spcAft>
             </a:pPr>
             <a:r>
-              <a:rPr sz="1800" b="1" i="0">
+              <a:rPr sz="2400" b="1" i="0">
                 <a:solidFill>
                   <a:srgbClr val="92268F"/>
                 </a:solidFill>
@@ -11358,7 +11358,7 @@
               <a:t>■  </a:t>
             </a:r>
             <a:r>
-              <a:rPr sz="1800" b="1" i="0">
+              <a:rPr sz="2400" b="1" i="0">
                 <a:solidFill>
                   <a:srgbClr val="92268F"/>
                 </a:solidFill>

--- a/S1-CL1-Cloud-Design-Build/delivery/topic_12/Topic_12_Slides.pptx
+++ b/S1-CL1-Cloud-Design-Build/delivery/topic_12/Topic_12_Slides.pptx
@@ -7,27 +7,27 @@
   <p:sldIdLst>
     <p:sldId id="256" r:id="rId7"/>
     <p:sldId id="257" r:id="rId8"/>
-    <p:sldId id="258" r:id="rId9"/>
-    <p:sldId id="259" r:id="rId10"/>
-    <p:sldId id="260" r:id="rId11"/>
-    <p:sldId id="261" r:id="rId12"/>
-    <p:sldId id="262" r:id="rId13"/>
-    <p:sldId id="263" r:id="rId14"/>
-    <p:sldId id="264" r:id="rId15"/>
-    <p:sldId id="265" r:id="rId16"/>
-    <p:sldId id="266" r:id="rId17"/>
-    <p:sldId id="267" r:id="rId18"/>
-    <p:sldId id="268" r:id="rId19"/>
-    <p:sldId id="269" r:id="rId20"/>
-    <p:sldId id="270" r:id="rId21"/>
-    <p:sldId id="271" r:id="rId22"/>
-    <p:sldId id="272" r:id="rId23"/>
-    <p:sldId id="273" r:id="rId24"/>
-    <p:sldId id="274" r:id="rId25"/>
-    <p:sldId id="275" r:id="rId26"/>
-    <p:sldId id="276" r:id="rId27"/>
-    <p:sldId id="277" r:id="rId28"/>
-    <p:sldId id="278" r:id="rId29"/>
+    <p:sldId id="258" r:id="rId10"/>
+    <p:sldId id="259" r:id="rId11"/>
+    <p:sldId id="260" r:id="rId12"/>
+    <p:sldId id="261" r:id="rId13"/>
+    <p:sldId id="262" r:id="rId14"/>
+    <p:sldId id="263" r:id="rId15"/>
+    <p:sldId id="264" r:id="rId16"/>
+    <p:sldId id="265" r:id="rId17"/>
+    <p:sldId id="266" r:id="rId18"/>
+    <p:sldId id="267" r:id="rId19"/>
+    <p:sldId id="268" r:id="rId20"/>
+    <p:sldId id="269" r:id="rId21"/>
+    <p:sldId id="270" r:id="rId22"/>
+    <p:sldId id="271" r:id="rId23"/>
+    <p:sldId id="272" r:id="rId24"/>
+    <p:sldId id="273" r:id="rId25"/>
+    <p:sldId id="274" r:id="rId26"/>
+    <p:sldId id="275" r:id="rId27"/>
+    <p:sldId id="276" r:id="rId28"/>
+    <p:sldId id="277" r:id="rId29"/>
+    <p:sldId id="278" r:id="rId30"/>
   </p:sldIdLst>
   <p:sldSz cx="12191695" cy="6858000" type="screen4x3"/>
   <p:notesSz cx="6858000" cy="9144000"/>
@@ -127,6 +127,2101 @@
     </a:lvl9pPr>
   </p:defaultTextStyle>
 </p:presentation>
+</file>
+
+<file path=ppt/notesMasters/notesMaster1.xml><?xml version="1.0" encoding="utf-8"?>
+<p:notesMaster xmlns:a="http://schemas.openxmlformats.org/drawingml/2006/main" xmlns:p="http://schemas.openxmlformats.org/presentationml/2006/main" xmlns:r="http://schemas.openxmlformats.org/officeDocument/2006/relationships">
+  <p:cSld>
+    <p:bg>
+      <p:bgRef idx="1001">
+        <a:schemeClr val="bg1"/>
+      </p:bgRef>
+    </p:bg>
+    <p:spTree>
+      <p:nvGrpSpPr>
+        <p:cNvPr id="1" name=""/>
+        <p:cNvGrpSpPr/>
+        <p:nvPr/>
+      </p:nvGrpSpPr>
+      <p:grpSpPr>
+        <a:xfrm>
+          <a:off x="0" y="0"/>
+          <a:ext cx="0" cy="0"/>
+          <a:chOff x="0" y="0"/>
+          <a:chExt cx="0" cy="0"/>
+        </a:xfrm>
+      </p:grpSpPr>
+      <p:sp>
+        <p:nvSpPr>
+          <p:cNvPr id="2" name="Header Placeholder 1"/>
+          <p:cNvSpPr>
+            <a:spLocks noGrp="1"/>
+          </p:cNvSpPr>
+          <p:nvPr>
+            <p:ph type="hdr" sz="quarter"/>
+          </p:nvPr>
+        </p:nvSpPr>
+        <p:spPr>
+          <a:xfrm>
+            <a:off x="0" y="0"/>
+            <a:ext cx="2971800" cy="457200"/>
+          </a:xfrm>
+          <a:prstGeom prst="rect">
+            <a:avLst/>
+          </a:prstGeom>
+        </p:spPr>
+        <p:txBody>
+          <a:bodyPr vert="horz" lIns="91440" tIns="45720" rIns="91440" bIns="45720" rtlCol="0"/>
+          <a:lstStyle>
+            <a:lvl1pPr algn="l">
+              <a:defRPr sz="1200"/>
+            </a:lvl1pPr>
+          </a:lstStyle>
+          <a:p>
+            <a:endParaRPr lang="en-US"/>
+          </a:p>
+        </p:txBody>
+      </p:sp>
+      <p:sp>
+        <p:nvSpPr>
+          <p:cNvPr id="3" name="Date Placeholder 2"/>
+          <p:cNvSpPr>
+            <a:spLocks noGrp="1"/>
+          </p:cNvSpPr>
+          <p:nvPr>
+            <p:ph type="dt" idx="1"/>
+          </p:nvPr>
+        </p:nvSpPr>
+        <p:spPr>
+          <a:xfrm>
+            <a:off x="3884613" y="0"/>
+            <a:ext cx="2971800" cy="457200"/>
+          </a:xfrm>
+          <a:prstGeom prst="rect">
+            <a:avLst/>
+          </a:prstGeom>
+        </p:spPr>
+        <p:txBody>
+          <a:bodyPr vert="horz" lIns="91440" tIns="45720" rIns="91440" bIns="45720" rtlCol="0"/>
+          <a:lstStyle>
+            <a:lvl1pPr algn="r">
+              <a:defRPr sz="1200"/>
+            </a:lvl1pPr>
+          </a:lstStyle>
+          <a:p>
+            <a:fld id="{0F89C1C7-3DCD-1040-A9CF-14679D8B5DDD}" type="datetimeFigureOut">
+              <a:rPr lang="en-US" smtClean="0"/>
+              <a:t>10/17/16</a:t>
+            </a:fld>
+            <a:endParaRPr lang="en-US"/>
+          </a:p>
+        </p:txBody>
+      </p:sp>
+      <p:sp>
+        <p:nvSpPr>
+          <p:cNvPr id="4" name="Slide Image Placeholder 3"/>
+          <p:cNvSpPr>
+            <a:spLocks noGrp="1" noRot="1" noChangeAspect="1"/>
+          </p:cNvSpPr>
+          <p:nvPr>
+            <p:ph type="sldImg" idx="2"/>
+          </p:nvPr>
+        </p:nvSpPr>
+        <p:spPr>
+          <a:xfrm>
+            <a:off x="1143000" y="685800"/>
+            <a:ext cx="4572000" cy="3429000"/>
+          </a:xfrm>
+          <a:prstGeom prst="rect">
+            <a:avLst/>
+          </a:prstGeom>
+          <a:noFill/>
+          <a:ln w="12700">
+            <a:solidFill>
+              <a:prstClr val="black"/>
+            </a:solidFill>
+          </a:ln>
+        </p:spPr>
+        <p:txBody>
+          <a:bodyPr vert="horz" lIns="91440" tIns="45720" rIns="91440" bIns="45720" rtlCol="0" anchor="ctr"/>
+          <a:lstStyle/>
+          <a:p>
+            <a:endParaRPr lang="en-US"/>
+          </a:p>
+        </p:txBody>
+      </p:sp>
+      <p:sp>
+        <p:nvSpPr>
+          <p:cNvPr id="5" name="Notes Placeholder 4"/>
+          <p:cNvSpPr>
+            <a:spLocks noGrp="1"/>
+          </p:cNvSpPr>
+          <p:nvPr>
+            <p:ph type="body" sz="quarter" idx="3"/>
+          </p:nvPr>
+        </p:nvSpPr>
+        <p:spPr>
+          <a:xfrm>
+            <a:off x="685800" y="4343400"/>
+            <a:ext cx="5486400" cy="4114800"/>
+          </a:xfrm>
+          <a:prstGeom prst="rect">
+            <a:avLst/>
+          </a:prstGeom>
+        </p:spPr>
+        <p:txBody>
+          <a:bodyPr vert="horz" lIns="91440" tIns="45720" rIns="91440" bIns="45720" rtlCol="0"/>
+          <a:lstStyle/>
+          <a:p>
+            <a:pPr lvl="0"/>
+            <a:r>
+              <a:rPr lang="en-US" smtClean="0"/>
+              <a:t>Click to edit Master text styles</a:t>
+            </a:r>
+          </a:p>
+          <a:p>
+            <a:pPr lvl="1"/>
+            <a:r>
+              <a:rPr lang="en-US" smtClean="0"/>
+              <a:t>Second level</a:t>
+            </a:r>
+          </a:p>
+          <a:p>
+            <a:pPr lvl="2"/>
+            <a:r>
+              <a:rPr lang="en-US" smtClean="0"/>
+              <a:t>Third level</a:t>
+            </a:r>
+          </a:p>
+          <a:p>
+            <a:pPr lvl="3"/>
+            <a:r>
+              <a:rPr lang="en-US" smtClean="0"/>
+              <a:t>Fourth level</a:t>
+            </a:r>
+          </a:p>
+          <a:p>
+            <a:pPr lvl="4"/>
+            <a:r>
+              <a:rPr lang="en-US" smtClean="0"/>
+              <a:t>Fifth level</a:t>
+            </a:r>
+            <a:endParaRPr lang="en-US"/>
+          </a:p>
+        </p:txBody>
+      </p:sp>
+      <p:sp>
+        <p:nvSpPr>
+          <p:cNvPr id="6" name="Footer Placeholder 5"/>
+          <p:cNvSpPr>
+            <a:spLocks noGrp="1"/>
+          </p:cNvSpPr>
+          <p:nvPr>
+            <p:ph type="ftr" sz="quarter" idx="4"/>
+          </p:nvPr>
+        </p:nvSpPr>
+        <p:spPr>
+          <a:xfrm>
+            <a:off x="0" y="8685213"/>
+            <a:ext cx="2971800" cy="457200"/>
+          </a:xfrm>
+          <a:prstGeom prst="rect">
+            <a:avLst/>
+          </a:prstGeom>
+        </p:spPr>
+        <p:txBody>
+          <a:bodyPr vert="horz" lIns="91440" tIns="45720" rIns="91440" bIns="45720" rtlCol="0" anchor="b"/>
+          <a:lstStyle>
+            <a:lvl1pPr algn="l">
+              <a:defRPr sz="1200"/>
+            </a:lvl1pPr>
+          </a:lstStyle>
+          <a:p>
+            <a:endParaRPr lang="en-US"/>
+          </a:p>
+        </p:txBody>
+      </p:sp>
+      <p:sp>
+        <p:nvSpPr>
+          <p:cNvPr id="7" name="Slide Number Placeholder 6"/>
+          <p:cNvSpPr>
+            <a:spLocks noGrp="1"/>
+          </p:cNvSpPr>
+          <p:nvPr>
+            <p:ph type="sldNum" sz="quarter" idx="5"/>
+          </p:nvPr>
+        </p:nvSpPr>
+        <p:spPr>
+          <a:xfrm>
+            <a:off x="3884613" y="8685213"/>
+            <a:ext cx="2971800" cy="457200"/>
+          </a:xfrm>
+          <a:prstGeom prst="rect">
+            <a:avLst/>
+          </a:prstGeom>
+        </p:spPr>
+        <p:txBody>
+          <a:bodyPr vert="horz" lIns="91440" tIns="45720" rIns="91440" bIns="45720" rtlCol="0" anchor="b"/>
+          <a:lstStyle>
+            <a:lvl1pPr algn="r">
+              <a:defRPr sz="1200"/>
+            </a:lvl1pPr>
+          </a:lstStyle>
+          <a:p>
+            <a:fld id="{BB5E49A5-4136-284D-997B-48E1D791AD67}" type="slidenum">
+              <a:rPr lang="en-US" smtClean="0"/>
+              <a:t>‹#›</a:t>
+            </a:fld>
+            <a:endParaRPr lang="en-US"/>
+          </a:p>
+        </p:txBody>
+      </p:sp>
+    </p:spTree>
+    <p:extLst>
+      <p:ext uri="{BB962C8B-B14F-4D97-AF65-F5344CB8AC3E}">
+        <p14:creationId xmlns:p14="http://schemas.microsoft.com/office/powerpoint/2010/main" val="2623252185"/>
+      </p:ext>
+    </p:extLst>
+  </p:cSld>
+  <p:clrMap bg1="lt1" tx1="dk1" bg2="lt2" tx2="dk2" accent1="accent1" accent2="accent2" accent3="accent3" accent4="accent4" accent5="accent5" accent6="accent6" hlink="hlink" folHlink="folHlink"/>
+  <p:notesStyle>
+    <a:lvl1pPr marL="0" algn="l" defTabSz="457200" rtl="0" eaLnBrk="1" latinLnBrk="0" hangingPunct="1">
+      <a:defRPr sz="1200" kern="1200">
+        <a:solidFill>
+          <a:schemeClr val="tx1"/>
+        </a:solidFill>
+        <a:latin typeface="+mn-lt"/>
+        <a:ea typeface="+mn-ea"/>
+        <a:cs typeface="+mn-cs"/>
+      </a:defRPr>
+    </a:lvl1pPr>
+    <a:lvl2pPr marL="457200" algn="l" defTabSz="457200" rtl="0" eaLnBrk="1" latinLnBrk="0" hangingPunct="1">
+      <a:defRPr sz="1200" kern="1200">
+        <a:solidFill>
+          <a:schemeClr val="tx1"/>
+        </a:solidFill>
+        <a:latin typeface="+mn-lt"/>
+        <a:ea typeface="+mn-ea"/>
+        <a:cs typeface="+mn-cs"/>
+      </a:defRPr>
+    </a:lvl2pPr>
+    <a:lvl3pPr marL="914400" algn="l" defTabSz="457200" rtl="0" eaLnBrk="1" latinLnBrk="0" hangingPunct="1">
+      <a:defRPr sz="1200" kern="1200">
+        <a:solidFill>
+          <a:schemeClr val="tx1"/>
+        </a:solidFill>
+        <a:latin typeface="+mn-lt"/>
+        <a:ea typeface="+mn-ea"/>
+        <a:cs typeface="+mn-cs"/>
+      </a:defRPr>
+    </a:lvl3pPr>
+    <a:lvl4pPr marL="1371600" algn="l" defTabSz="457200" rtl="0" eaLnBrk="1" latinLnBrk="0" hangingPunct="1">
+      <a:defRPr sz="1200" kern="1200">
+        <a:solidFill>
+          <a:schemeClr val="tx1"/>
+        </a:solidFill>
+        <a:latin typeface="+mn-lt"/>
+        <a:ea typeface="+mn-ea"/>
+        <a:cs typeface="+mn-cs"/>
+      </a:defRPr>
+    </a:lvl4pPr>
+    <a:lvl5pPr marL="1828800" algn="l" defTabSz="457200" rtl="0" eaLnBrk="1" latinLnBrk="0" hangingPunct="1">
+      <a:defRPr sz="1200" kern="1200">
+        <a:solidFill>
+          <a:schemeClr val="tx1"/>
+        </a:solidFill>
+        <a:latin typeface="+mn-lt"/>
+        <a:ea typeface="+mn-ea"/>
+        <a:cs typeface="+mn-cs"/>
+      </a:defRPr>
+    </a:lvl5pPr>
+    <a:lvl6pPr marL="2286000" algn="l" defTabSz="457200" rtl="0" eaLnBrk="1" latinLnBrk="0" hangingPunct="1">
+      <a:defRPr sz="1200" kern="1200">
+        <a:solidFill>
+          <a:schemeClr val="tx1"/>
+        </a:solidFill>
+        <a:latin typeface="+mn-lt"/>
+        <a:ea typeface="+mn-ea"/>
+        <a:cs typeface="+mn-cs"/>
+      </a:defRPr>
+    </a:lvl6pPr>
+    <a:lvl7pPr marL="2743200" algn="l" defTabSz="457200" rtl="0" eaLnBrk="1" latinLnBrk="0" hangingPunct="1">
+      <a:defRPr sz="1200" kern="1200">
+        <a:solidFill>
+          <a:schemeClr val="tx1"/>
+        </a:solidFill>
+        <a:latin typeface="+mn-lt"/>
+        <a:ea typeface="+mn-ea"/>
+        <a:cs typeface="+mn-cs"/>
+      </a:defRPr>
+    </a:lvl7pPr>
+    <a:lvl8pPr marL="3200400" algn="l" defTabSz="457200" rtl="0" eaLnBrk="1" latinLnBrk="0" hangingPunct="1">
+      <a:defRPr sz="1200" kern="1200">
+        <a:solidFill>
+          <a:schemeClr val="tx1"/>
+        </a:solidFill>
+        <a:latin typeface="+mn-lt"/>
+        <a:ea typeface="+mn-ea"/>
+        <a:cs typeface="+mn-cs"/>
+      </a:defRPr>
+    </a:lvl8pPr>
+    <a:lvl9pPr marL="3657600" algn="l" defTabSz="457200" rtl="0" eaLnBrk="1" latinLnBrk="0" hangingPunct="1">
+      <a:defRPr sz="1200" kern="1200">
+        <a:solidFill>
+          <a:schemeClr val="tx1"/>
+        </a:solidFill>
+        <a:latin typeface="+mn-lt"/>
+        <a:ea typeface="+mn-ea"/>
+        <a:cs typeface="+mn-cs"/>
+      </a:defRPr>
+    </a:lvl9pPr>
+  </p:notesStyle>
+</p:notesMaster>
+</file>
+
+<file path=ppt/notesSlides/notesSlide1.xml><?xml version="1.0" encoding="utf-8"?>
+<p:notes xmlns:a="http://schemas.openxmlformats.org/drawingml/2006/main" xmlns:p="http://schemas.openxmlformats.org/presentationml/2006/main" xmlns:r="http://schemas.openxmlformats.org/officeDocument/2006/relationships">
+  <p:cSld>
+    <p:spTree>
+      <p:nvGrpSpPr>
+        <p:cNvPr id="1" name=""/>
+        <p:cNvGrpSpPr/>
+        <p:nvPr/>
+      </p:nvGrpSpPr>
+      <p:grpSpPr>
+        <a:xfrm>
+          <a:off x="0" y="0"/>
+          <a:ext cx="0" cy="0"/>
+          <a:chOff x="0" y="0"/>
+          <a:chExt cx="0" cy="0"/>
+        </a:xfrm>
+      </p:grpSpPr>
+      <p:sp>
+        <p:nvSpPr>
+          <p:cNvPr id="2" name="Slide Image Placeholder 1"/>
+          <p:cNvSpPr>
+            <a:spLocks noGrp="1"/>
+          </p:cNvSpPr>
+          <p:nvPr>
+            <p:ph type="sldImg" idx="2"/>
+          </p:nvPr>
+        </p:nvSpPr>
+        <p:spPr/>
+      </p:sp>
+      <p:sp>
+        <p:nvSpPr>
+          <p:cNvPr id="3" name="Notes Placeholder 2"/>
+          <p:cNvSpPr>
+            <a:spLocks noGrp="1"/>
+          </p:cNvSpPr>
+          <p:nvPr>
+            <p:ph type="body" idx="3" sz="quarter"/>
+          </p:nvPr>
+        </p:nvSpPr>
+        <p:spPr/>
+        <p:txBody>
+          <a:bodyPr/>
+          <a:lstStyle/>
+          <a:p>
+            <a:r>
+              <a:t>Frame this as the map for the whole Topic — set the shift, don't teach method yet.</a:t>
+            </a:r>
+          </a:p>
+          <a:p>
+            <a:r>
+              <a:t>• Topic 11 gave the concepts (SPOF, RTO/RPO, the toolkit); Topic 12 is where they PRODUCE an</a:t>
+            </a:r>
+          </a:p>
+          <a:p>
+            <a:r>
+              <a:t>  HA design. This is the doing, not the knowing.</a:t>
+            </a:r>
+          </a:p>
+          <a:p>
+            <a:r>
+              <a:t>• Stress the bolded edge: the baseline and the HA requirements are their INPUTS — the finished</a:t>
+            </a:r>
+          </a:p>
+          <a:p>
+            <a:r>
+              <a:t>  design is what they build, we don't hand it out.</a:t>
+            </a:r>
+          </a:p>
+          <a:p>
+            <a:r>
+              <a:t>• Three moves, map them to the three sections: review the baseline + find its SPOFs → design</a:t>
+            </a:r>
+          </a:p>
+          <a:p>
+            <a:r>
+              <a:t>  them out → document the design and plan the work.</a:t>
+            </a:r>
+          </a:p>
+          <a:p>
+            <a:r>
+              <a:t>• Topic 13 then implements and simulates exactly what they design here — so a sloppy design</a:t>
+            </a:r>
+          </a:p>
+          <a:p>
+            <a:r>
+              <a:t>  now costs them next week.</a:t>
+            </a:r>
+          </a:p>
+          <a:p>
+            <a:r>
+              <a:t>Misconception to pre-empt: "we'll be given an HA design to copy" — that's AT2 (design supplied →</a:t>
+            </a:r>
+          </a:p>
+          <a:p>
+            <a:r>
+              <a:t>you build). AT3 flips it: the design IS the deliverable (502 element 3).</a:t>
+            </a:r>
+          </a:p>
+          <a:p>
+            <a:r>
+              <a:t>Question to pose: "How is this Topic different from AT2 — who does the designing this time?"</a:t>
+            </a:r>
+          </a:p>
+          <a:p>
+            <a:r>
+              <a:t>UoC/AT tie: develops ICTCLD502 elements 2–3, assessed in AT3 Part A (the HA Design document).</a:t>
+            </a:r>
+          </a:p>
+        </p:txBody>
+      </p:sp>
+      <p:sp>
+        <p:nvSpPr>
+          <p:cNvPr id="4" name="Slide Number Placeholder 3"/>
+          <p:cNvSpPr>
+            <a:spLocks noGrp="1"/>
+          </p:cNvSpPr>
+          <p:nvPr>
+            <p:ph type="sldNum" idx="5" sz="quarter"/>
+          </p:nvPr>
+        </p:nvSpPr>
+        <p:spPr/>
+      </p:sp>
+    </p:spTree>
+  </p:cSld>
+  <p:clrMapOvr>
+    <a:masterClrMapping/>
+  </p:clrMapOvr>
+</p:notes>
+</file>
+
+<file path=ppt/notesSlides/notesSlide10.xml><?xml version="1.0" encoding="utf-8"?>
+<p:notes xmlns:a="http://schemas.openxmlformats.org/drawingml/2006/main" xmlns:p="http://schemas.openxmlformats.org/presentationml/2006/main" xmlns:r="http://schemas.openxmlformats.org/officeDocument/2006/relationships">
+  <p:cSld>
+    <p:spTree>
+      <p:nvGrpSpPr>
+        <p:cNvPr id="1" name=""/>
+        <p:cNvGrpSpPr/>
+        <p:nvPr/>
+      </p:nvGrpSpPr>
+      <p:grpSpPr>
+        <a:xfrm>
+          <a:off x="0" y="0"/>
+          <a:ext cx="0" cy="0"/>
+          <a:chOff x="0" y="0"/>
+          <a:chExt cx="0" cy="0"/>
+        </a:xfrm>
+      </p:grpSpPr>
+      <p:sp>
+        <p:nvSpPr>
+          <p:cNvPr id="2" name="Slide Image Placeholder 1"/>
+          <p:cNvSpPr>
+            <a:spLocks noGrp="1"/>
+          </p:cNvSpPr>
+          <p:nvPr>
+            <p:ph type="sldImg" idx="2"/>
+          </p:nvPr>
+        </p:nvSpPr>
+        <p:spPr/>
+      </p:sp>
+      <p:sp>
+        <p:nvSpPr>
+          <p:cNvPr id="3" name="Notes Placeholder 2"/>
+          <p:cNvSpPr>
+            <a:spLocks noGrp="1"/>
+          </p:cNvSpPr>
+          <p:nvPr>
+            <p:ph type="body" idx="3" sz="quarter"/>
+          </p:nvPr>
+        </p:nvSpPr>
+        <p:spPr/>
+        <p:txBody>
+          <a:bodyPr/>
+          <a:lstStyle/>
+          <a:p>
+            <a:r>
+              <a:t>Facilitation — the C2 practice. Analytical design work on the baseline they reviewed in C1.</a:t>
+            </a:r>
+          </a:p>
+          <a:p>
+            <a:r>
+              <a:t>Tell students: "You've evaluated the Accounting baseline and you have its SPOFs. Now design the</a:t>
+            </a:r>
+          </a:p>
+          <a:p>
+            <a:r>
+              <a:t>upgrade — an HA-equivalent that removes every one of them."</a:t>
+            </a:r>
+          </a:p>
+          <a:p>
+            <a:r>
+              <a:t>Steps (put on the board):</a:t>
+            </a:r>
+          </a:p>
+          <a:p>
+            <a:r>
+              <a:t>1. Design out each SPOF using the mapping (2 AZs · cross-AZ ASG · Multi-AZ DB · NAT per AZ).</a:t>
+            </a:r>
+          </a:p>
+          <a:p>
+            <a:r>
+              <a:t>2. Sketch the cross-AZ topology.</a:t>
+            </a:r>
+          </a:p>
+          <a:p>
+            <a:r>
+              <a:t>3. Re-estimate the recovery objectives and confirm they meet the requirement.</a:t>
+            </a:r>
+          </a:p>
+          <a:p>
+            <a:r>
+              <a:t>Must produce: a cross-AZ topology sketch + a SPOF→fix mapping + the re-estimated RPO/RTO</a:t>
+            </a:r>
+          </a:p>
+          <a:p>
+            <a:r>
+              <a:t>against the requirement. This is the design core of the C3 document.</a:t>
+            </a:r>
+          </a:p>
+          <a:p>
+            <a:r>
+              <a:t>Timing: ~25 min then share. Where they get stuck: they redesign from scratch or invent new tiers</a:t>
+            </a:r>
+          </a:p>
+          <a:p>
+            <a:r>
+              <a:t>— pull them back to hardening the SAME architecture; and some forget the NAT-per-AZ / redundant</a:t>
+            </a:r>
+          </a:p>
+          <a:p>
+            <a:r>
+              <a:t>egress — check every SPOF from C1 has a matching fix.</a:t>
+            </a:r>
+          </a:p>
+          <a:p>
+            <a:r>
+              <a:t>Share-back prompt: "Show your topology — which SPOF does each new element remove?"</a:t>
+            </a:r>
+          </a:p>
+          <a:p>
+            <a:r>
+              <a:t>No-leakage note: this is practice on the Accounting baseline; AT3 assesses the same design skill</a:t>
+            </a:r>
+          </a:p>
+          <a:p>
+            <a:r>
+              <a:t>on the LMS baseline — comparable, not identical. Don't let LMS specifics leak in either direction.</a:t>
+            </a:r>
+          </a:p>
+        </p:txBody>
+      </p:sp>
+      <p:sp>
+        <p:nvSpPr>
+          <p:cNvPr id="4" name="Slide Number Placeholder 3"/>
+          <p:cNvSpPr>
+            <a:spLocks noGrp="1"/>
+          </p:cNvSpPr>
+          <p:nvPr>
+            <p:ph type="sldNum" idx="5" sz="quarter"/>
+          </p:nvPr>
+        </p:nvSpPr>
+        <p:spPr/>
+      </p:sp>
+    </p:spTree>
+  </p:cSld>
+  <p:clrMapOvr>
+    <a:masterClrMapping/>
+  </p:clrMapOvr>
+</p:notes>
+</file>
+
+<file path=ppt/notesSlides/notesSlide11.xml><?xml version="1.0" encoding="utf-8"?>
+<p:notes xmlns:a="http://schemas.openxmlformats.org/drawingml/2006/main" xmlns:p="http://schemas.openxmlformats.org/presentationml/2006/main" xmlns:r="http://schemas.openxmlformats.org/officeDocument/2006/relationships">
+  <p:cSld>
+    <p:spTree>
+      <p:nvGrpSpPr>
+        <p:cNvPr id="1" name=""/>
+        <p:cNvGrpSpPr/>
+        <p:nvPr/>
+      </p:nvGrpSpPr>
+      <p:grpSpPr>
+        <a:xfrm>
+          <a:off x="0" y="0"/>
+          <a:ext cx="0" cy="0"/>
+          <a:chOff x="0" y="0"/>
+          <a:chExt cx="0" cy="0"/>
+        </a:xfrm>
+      </p:grpSpPr>
+      <p:sp>
+        <p:nvSpPr>
+          <p:cNvPr id="2" name="Slide Image Placeholder 1"/>
+          <p:cNvSpPr>
+            <a:spLocks noGrp="1"/>
+          </p:cNvSpPr>
+          <p:nvPr>
+            <p:ph type="sldImg" idx="2"/>
+          </p:nvPr>
+        </p:nvSpPr>
+        <p:spPr/>
+      </p:sp>
+      <p:sp>
+        <p:nvSpPr>
+          <p:cNvPr id="3" name="Notes Placeholder 2"/>
+          <p:cNvSpPr>
+            <a:spLocks noGrp="1"/>
+          </p:cNvSpPr>
+          <p:nvPr>
+            <p:ph type="body" idx="3" sz="quarter"/>
+          </p:nvPr>
+        </p:nvSpPr>
+        <p:spPr/>
+        <p:txBody>
+          <a:bodyPr/>
+          <a:lstStyle/>
+          <a:p>
+            <a:r>
+              <a:t>Open C3 — the five-part documentation framework (502). This is the shape of the AT3 deliverable.</a:t>
+            </a:r>
+          </a:p>
+          <a:p>
+            <a:r>
+              <a:t>• Architecture diagram — the components, the redundancy, the connections between tiers.</a:t>
+            </a:r>
+          </a:p>
+          <a:p>
+            <a:r>
+              <a:t>• Service list — the AWS services used and each one's purpose.</a:t>
+            </a:r>
+          </a:p>
+          <a:p>
+            <a:r>
+              <a:t>• SPoF analysis — the SPOFs identified, and the solution implemented for each.</a:t>
+            </a:r>
+          </a:p>
+          <a:p>
+            <a:r>
+              <a:t>• Bolded line: RTO/RPO table (recovery objectives per component and overall) + scaling plans</a:t>
+            </a:r>
+          </a:p>
+          <a:p>
+            <a:r>
+              <a:t>  (what scales, how, and the trigger).</a:t>
+            </a:r>
+          </a:p>
+          <a:p>
+            <a:r>
+              <a:t>Misconception to pre-empt: "the diagram IS the design document." No — the diagram is ONE of five</a:t>
+            </a:r>
+          </a:p>
+          <a:p>
+            <a:r>
+              <a:t>parts; a diagram alone hides the reasoning, the objectives and the scaling story.</a:t>
+            </a:r>
+          </a:p>
+          <a:p>
+            <a:r>
+              <a:t>Question to pose: "If you hand a client only a diagram, what can't they see about your design?"</a:t>
+            </a:r>
+          </a:p>
+          <a:p>
+            <a:r>
+              <a:t>(the SPOF reasoning, the recovery numbers, what scales.)</a:t>
+            </a:r>
+          </a:p>
+          <a:p>
+            <a:r>
+              <a:t>UoC/AT tie: ICTCLD502 PC 2.5 / PC 3.5 — document the review findings and the design (AT3 Part A).</a:t>
+            </a:r>
+          </a:p>
+        </p:txBody>
+      </p:sp>
+      <p:sp>
+        <p:nvSpPr>
+          <p:cNvPr id="4" name="Slide Number Placeholder 3"/>
+          <p:cNvSpPr>
+            <a:spLocks noGrp="1"/>
+          </p:cNvSpPr>
+          <p:nvPr>
+            <p:ph type="sldNum" idx="5" sz="quarter"/>
+          </p:nvPr>
+        </p:nvSpPr>
+        <p:spPr/>
+      </p:sp>
+    </p:spTree>
+  </p:cSld>
+  <p:clrMapOvr>
+    <a:masterClrMapping/>
+  </p:clrMapOvr>
+</p:notes>
+</file>
+
+<file path=ppt/notesSlides/notesSlide12.xml><?xml version="1.0" encoding="utf-8"?>
+<p:notes xmlns:a="http://schemas.openxmlformats.org/drawingml/2006/main" xmlns:p="http://schemas.openxmlformats.org/presentationml/2006/main" xmlns:r="http://schemas.openxmlformats.org/officeDocument/2006/relationships">
+  <p:cSld>
+    <p:spTree>
+      <p:nvGrpSpPr>
+        <p:cNvPr id="1" name=""/>
+        <p:cNvGrpSpPr/>
+        <p:nvPr/>
+      </p:nvGrpSpPr>
+      <p:grpSpPr>
+        <a:xfrm>
+          <a:off x="0" y="0"/>
+          <a:ext cx="0" cy="0"/>
+          <a:chOff x="0" y="0"/>
+          <a:chExt cx="0" cy="0"/>
+        </a:xfrm>
+      </p:grpSpPr>
+      <p:sp>
+        <p:nvSpPr>
+          <p:cNvPr id="2" name="Slide Image Placeholder 1"/>
+          <p:cNvSpPr>
+            <a:spLocks noGrp="1"/>
+          </p:cNvSpPr>
+          <p:nvPr>
+            <p:ph type="sldImg" idx="2"/>
+          </p:nvPr>
+        </p:nvSpPr>
+        <p:spPr/>
+      </p:sp>
+      <p:sp>
+        <p:nvSpPr>
+          <p:cNvPr id="3" name="Notes Placeholder 2"/>
+          <p:cNvSpPr>
+            <a:spLocks noGrp="1"/>
+          </p:cNvSpPr>
+          <p:nvPr>
+            <p:ph type="body" idx="3" sz="quarter"/>
+          </p:nvPr>
+        </p:nvSpPr>
+        <p:spPr/>
+        <p:txBody>
+          <a:bodyPr/>
+          <a:lstStyle/>
+          <a:p>
+            <a:r>
+              <a:t>How to draw the diagram WELL — it's the centrepiece of the document, so pitch the altitude right.</a:t>
+            </a:r>
+          </a:p>
+          <a:p>
+            <a:r>
+              <a:t>• A logical diagram showing the two AZs, the redundancy, the tiers and their connections.</a:t>
+            </a:r>
+          </a:p>
+          <a:p>
+            <a:r>
+              <a:t>• Focus on the key details — boundaries, resource types, connectivity — NOT every setting.</a:t>
+            </a:r>
+          </a:p>
+          <a:p>
+            <a:r>
+              <a:t>• Bolded line: use the scenario's network-diagram conventions — the same draw.io style as the</a:t>
+            </a:r>
+          </a:p>
+          <a:p>
+            <a:r>
+              <a:t>  baseline diagram (consistency reads as professional).</a:t>
+            </a:r>
+          </a:p>
+          <a:p>
+            <a:r>
+              <a:t>Misconception to pre-empt: over-detailing — students try to draw every port, subnet CIDR and</a:t>
+            </a:r>
+          </a:p>
+          <a:p>
+            <a:r>
+              <a:t>instance setting. This is a LOGICAL diagram, not a config dump; too much detail hides the design.</a:t>
+            </a:r>
+          </a:p>
+          <a:p>
+            <a:r>
+              <a:t>Question to pose: "What's the right level of detail — enough to see the redundancy, not so much</a:t>
+            </a:r>
+          </a:p>
+          <a:p>
+            <a:r>
+              <a:t>it becomes a settings list?"</a:t>
+            </a:r>
+          </a:p>
+          <a:p>
+            <a:r>
+              <a:t>UoC/AT tie: ICTCLD502 PC 3.5 — document the architecture design; reuses the Topic 7 diagram</a:t>
+            </a:r>
+          </a:p>
+          <a:p>
+            <a:r>
+              <a:t>conventions.</a:t>
+            </a:r>
+          </a:p>
+        </p:txBody>
+      </p:sp>
+      <p:sp>
+        <p:nvSpPr>
+          <p:cNvPr id="4" name="Slide Number Placeholder 3"/>
+          <p:cNvSpPr>
+            <a:spLocks noGrp="1"/>
+          </p:cNvSpPr>
+          <p:nvPr>
+            <p:ph type="sldNum" idx="5" sz="quarter"/>
+          </p:nvPr>
+        </p:nvSpPr>
+        <p:spPr/>
+      </p:sp>
+    </p:spTree>
+  </p:cSld>
+  <p:clrMapOvr>
+    <a:masterClrMapping/>
+  </p:clrMapOvr>
+</p:notes>
+</file>
+
+<file path=ppt/notesSlides/notesSlide13.xml><?xml version="1.0" encoding="utf-8"?>
+<p:notes xmlns:a="http://schemas.openxmlformats.org/drawingml/2006/main" xmlns:p="http://schemas.openxmlformats.org/presentationml/2006/main" xmlns:r="http://schemas.openxmlformats.org/officeDocument/2006/relationships">
+  <p:cSld>
+    <p:spTree>
+      <p:nvGrpSpPr>
+        <p:cNvPr id="1" name=""/>
+        <p:cNvGrpSpPr/>
+        <p:nvPr/>
+      </p:nvGrpSpPr>
+      <p:grpSpPr>
+        <a:xfrm>
+          <a:off x="0" y="0"/>
+          <a:ext cx="0" cy="0"/>
+          <a:chOff x="0" y="0"/>
+          <a:chExt cx="0" cy="0"/>
+        </a:xfrm>
+      </p:grpSpPr>
+      <p:sp>
+        <p:nvSpPr>
+          <p:cNvPr id="2" name="Slide Image Placeholder 1"/>
+          <p:cNvSpPr>
+            <a:spLocks noGrp="1"/>
+          </p:cNvSpPr>
+          <p:nvPr>
+            <p:ph type="sldImg" idx="2"/>
+          </p:nvPr>
+        </p:nvSpPr>
+        <p:spPr/>
+      </p:sp>
+      <p:sp>
+        <p:nvSpPr>
+          <p:cNvPr id="3" name="Notes Placeholder 2"/>
+          <p:cNvSpPr>
+            <a:spLocks noGrp="1"/>
+          </p:cNvSpPr>
+          <p:nvPr>
+            <p:ph type="body" idx="3" sz="quarter"/>
+          </p:nvPr>
+        </p:nvSpPr>
+        <p:spPr/>
+        <p:txBody>
+          <a:bodyPr/>
+          <a:lstStyle/>
+          <a:p>
+            <a:r>
+              <a:t>The bridge to Topic 13 — the plan they'll execute next week. Keep the two parts distinct.</a:t>
+            </a:r>
+          </a:p>
+          <a:p>
+            <a:r>
+              <a:t>• Sequencing — the ORDER to harden the running baseline in place, without an outage (add the AZ,</a:t>
+            </a:r>
+          </a:p>
+          <a:p>
+            <a:r>
+              <a:t>  extend the ASG/ALB across it, convert the DB to Multi-AZ). In place, not a rebuild.</a:t>
+            </a:r>
+          </a:p>
+          <a:p>
+            <a:r>
+              <a:t>• Bolded line: the simulation plan — the failures and resizes they'll run to PROVE fault</a:t>
+            </a:r>
+          </a:p>
+          <a:p>
+            <a:r>
+              <a:t>  tolerance (AZ/instance failure, database failover, resize under load).</a:t>
+            </a:r>
+          </a:p>
+          <a:p>
+            <a:r>
+              <a:t>• This plan is exactly what Topic 13 executes — so it has to be concrete and ordered.</a:t>
+            </a:r>
+          </a:p>
+          <a:p>
+            <a:r>
+              <a:t>Misconception to pre-empt: "we'll rebuild it as HA from scratch." No — you harden the RUNNING</a:t>
+            </a:r>
+          </a:p>
+          <a:p>
+            <a:r>
+              <a:t>baseline in place, in an order that never takes Ledgerline down.</a:t>
+            </a:r>
+          </a:p>
+          <a:p>
+            <a:r>
+              <a:t>Question to pose: "How do you add a second AZ to a live system without an outage — what goes first?"</a:t>
+            </a:r>
+          </a:p>
+          <a:p>
+            <a:r>
+              <a:t>UoC/AT tie: AT3 Part A → B — the sequencing + simulation planning that sets up Topic 13.</a:t>
+            </a:r>
+          </a:p>
+        </p:txBody>
+      </p:sp>
+      <p:sp>
+        <p:nvSpPr>
+          <p:cNvPr id="4" name="Slide Number Placeholder 3"/>
+          <p:cNvSpPr>
+            <a:spLocks noGrp="1"/>
+          </p:cNvSpPr>
+          <p:nvPr>
+            <p:ph type="sldNum" idx="5" sz="quarter"/>
+          </p:nvPr>
+        </p:nvSpPr>
+        <p:spPr/>
+      </p:sp>
+    </p:spTree>
+  </p:cSld>
+  <p:clrMapOvr>
+    <a:masterClrMapping/>
+  </p:clrMapOvr>
+</p:notes>
+</file>
+
+<file path=ppt/notesSlides/notesSlide14.xml><?xml version="1.0" encoding="utf-8"?>
+<p:notes xmlns:a="http://schemas.openxmlformats.org/drawingml/2006/main" xmlns:p="http://schemas.openxmlformats.org/presentationml/2006/main" xmlns:r="http://schemas.openxmlformats.org/officeDocument/2006/relationships">
+  <p:cSld>
+    <p:spTree>
+      <p:nvGrpSpPr>
+        <p:cNvPr id="1" name=""/>
+        <p:cNvGrpSpPr/>
+        <p:nvPr/>
+      </p:nvGrpSpPr>
+      <p:grpSpPr>
+        <a:xfrm>
+          <a:off x="0" y="0"/>
+          <a:ext cx="0" cy="0"/>
+          <a:chOff x="0" y="0"/>
+          <a:chExt cx="0" cy="0"/>
+        </a:xfrm>
+      </p:grpSpPr>
+      <p:sp>
+        <p:nvSpPr>
+          <p:cNvPr id="2" name="Slide Image Placeholder 1"/>
+          <p:cNvSpPr>
+            <a:spLocks noGrp="1"/>
+          </p:cNvSpPr>
+          <p:nvPr>
+            <p:ph type="sldImg" idx="2"/>
+          </p:nvPr>
+        </p:nvSpPr>
+        <p:spPr/>
+      </p:sp>
+      <p:sp>
+        <p:nvSpPr>
+          <p:cNvPr id="3" name="Notes Placeholder 2"/>
+          <p:cNvSpPr>
+            <a:spLocks noGrp="1"/>
+          </p:cNvSpPr>
+          <p:nvPr>
+            <p:ph type="body" idx="3" sz="quarter"/>
+          </p:nvPr>
+        </p:nvSpPr>
+        <p:spPr/>
+        <p:txBody>
+          <a:bodyPr/>
+          <a:lstStyle/>
+          <a:p>
+            <a:r>
+              <a:t>Facilitation — the C3 practice. This assembles everything from C1–C2 into the deliverable.</a:t>
+            </a:r>
+          </a:p>
+          <a:p>
+            <a:r>
+              <a:t>Tell students: "Assemble your HA design for the Accounting upgrade into one document — this is</a:t>
+            </a:r>
+          </a:p>
+          <a:p>
+            <a:r>
+              <a:t>the shape of the deliverable you'll produce for real in AT3."</a:t>
+            </a:r>
+          </a:p>
+          <a:p>
+            <a:r>
+              <a:t>Steps (put on the board):</a:t>
+            </a:r>
+          </a:p>
+          <a:p>
+            <a:r>
+              <a:t>1. Architecture diagram · service list · SPoF analysis + solutions · RTO/RPO table · scaling plans.</a:t>
+            </a:r>
+          </a:p>
+          <a:p>
+            <a:r>
+              <a:t>2. Add the implementation sequencing and the simulation plan.</a:t>
+            </a:r>
+          </a:p>
+          <a:p>
+            <a:r>
+              <a:t>Must produce: a single HA design document with all five framework parts PLUS the sequencing and</a:t>
+            </a:r>
+          </a:p>
+          <a:p>
+            <a:r>
+              <a:t>simulation plan — complete enough that Topic 13 could implement straight from it.</a:t>
+            </a:r>
+          </a:p>
+          <a:p>
+            <a:r>
+              <a:t>Timing: ~30 min then share. Where they get stuck: a strong diagram but a thin/absent SPoF</a:t>
+            </a:r>
+          </a:p>
+          <a:p>
+            <a:r>
+              <a:t>analysis or RTO/RPO table — remind them all five parts are required, the diagram isn't the whole</a:t>
+            </a:r>
+          </a:p>
+          <a:p>
+            <a:r>
+              <a:t>document; and vague sequencing ("just set it up") — push for a concrete, no-outage order.</a:t>
+            </a:r>
+          </a:p>
+          <a:p>
+            <a:r>
+              <a:t>Share-back prompt: "Swap documents — could you implement someone else's design from it as written?"</a:t>
+            </a:r>
+          </a:p>
+          <a:p>
+            <a:r>
+              <a:t>No-leakage note: practice document on the Accounting baseline; AT3 requires the same document for</a:t>
+            </a:r>
+          </a:p>
+          <a:p>
+            <a:r>
+              <a:t>the LMS — comparable, not identical. This is a rehearsal of the AT3 Part A deliverable, not it.</a:t>
+            </a:r>
+          </a:p>
+        </p:txBody>
+      </p:sp>
+      <p:sp>
+        <p:nvSpPr>
+          <p:cNvPr id="4" name="Slide Number Placeholder 3"/>
+          <p:cNvSpPr>
+            <a:spLocks noGrp="1"/>
+          </p:cNvSpPr>
+          <p:nvPr>
+            <p:ph type="sldNum" idx="5" sz="quarter"/>
+          </p:nvPr>
+        </p:nvSpPr>
+        <p:spPr/>
+      </p:sp>
+    </p:spTree>
+  </p:cSld>
+  <p:clrMapOvr>
+    <a:masterClrMapping/>
+  </p:clrMapOvr>
+</p:notes>
+</file>
+
+<file path=ppt/notesSlides/notesSlide2.xml><?xml version="1.0" encoding="utf-8"?>
+<p:notes xmlns:a="http://schemas.openxmlformats.org/drawingml/2006/main" xmlns:p="http://schemas.openxmlformats.org/presentationml/2006/main" xmlns:r="http://schemas.openxmlformats.org/officeDocument/2006/relationships">
+  <p:cSld>
+    <p:spTree>
+      <p:nvGrpSpPr>
+        <p:cNvPr id="1" name=""/>
+        <p:cNvGrpSpPr/>
+        <p:nvPr/>
+      </p:nvGrpSpPr>
+      <p:grpSpPr>
+        <a:xfrm>
+          <a:off x="0" y="0"/>
+          <a:ext cx="0" cy="0"/>
+          <a:chOff x="0" y="0"/>
+          <a:chExt cx="0" cy="0"/>
+        </a:xfrm>
+      </p:grpSpPr>
+      <p:sp>
+        <p:nvSpPr>
+          <p:cNvPr id="2" name="Slide Image Placeholder 1"/>
+          <p:cNvSpPr>
+            <a:spLocks noGrp="1"/>
+          </p:cNvSpPr>
+          <p:nvPr>
+            <p:ph type="sldImg" idx="2"/>
+          </p:nvPr>
+        </p:nvSpPr>
+        <p:spPr/>
+      </p:sp>
+      <p:sp>
+        <p:nvSpPr>
+          <p:cNvPr id="3" name="Notes Placeholder 2"/>
+          <p:cNvSpPr>
+            <a:spLocks noGrp="1"/>
+          </p:cNvSpPr>
+          <p:nvPr>
+            <p:ph type="body" idx="3" sz="quarter"/>
+          </p:nvPr>
+        </p:nvSpPr>
+        <p:spPr/>
+        <p:txBody>
+          <a:bodyPr/>
+          <a:lstStyle/>
+          <a:p>
+            <a:r>
+              <a:t>Open C1 — the rule is evaluate before you change. Keep it to orienting on the shape.</a:t>
+            </a:r>
+          </a:p>
+          <a:p>
+            <a:r>
+              <a:t>• Start by understanding what's there: the multi-tier shape — presentation / logic / data</a:t>
+            </a:r>
+          </a:p>
+          <a:p>
+            <a:r>
+              <a:t>  (web / app / database). Name the tiers on the baseline.</a:t>
+            </a:r>
+          </a:p>
+          <a:p>
+            <a:r>
+              <a:t>• Each tier can be built, scaled and diagnosed separately — that's what lets them reason about</a:t>
+            </a:r>
+          </a:p>
+          <a:p>
+            <a:r>
+              <a:t>  one tier's failure at a time.</a:t>
+            </a:r>
+          </a:p>
+          <a:p>
+            <a:r>
+              <a:t>• Bolded line: review the deployed single-AZ baseline BEFORE changing anything — you can't</a:t>
+            </a:r>
+          </a:p>
+          <a:p>
+            <a:r>
+              <a:t>  design out a weakness you haven't found.</a:t>
+            </a:r>
+          </a:p>
+          <a:p>
+            <a:r>
+              <a:t>Misconception to pre-empt: keen students want to jump straight to "add a second AZ." Reviewing</a:t>
+            </a:r>
+          </a:p>
+          <a:p>
+            <a:r>
+              <a:t>feels like wasted time — but a fix aimed at the wrong SPOF is wasted design.</a:t>
+            </a:r>
+          </a:p>
+          <a:p>
+            <a:r>
+              <a:t>Question to pose: "Why review a system someone else already built before you improve it?"</a:t>
+            </a:r>
+          </a:p>
+          <a:p>
+            <a:r>
+              <a:t>UoC/AT tie: ICTCLD502 PC 2.1 — review a multi-tier architecture and identify HA requirements;</a:t>
+            </a:r>
+          </a:p>
+          <a:p>
+            <a:r>
+              <a:t>this is the AT3 Part A "evaluate availability" skill.</a:t>
+            </a:r>
+          </a:p>
+        </p:txBody>
+      </p:sp>
+      <p:sp>
+        <p:nvSpPr>
+          <p:cNvPr id="4" name="Slide Number Placeholder 3"/>
+          <p:cNvSpPr>
+            <a:spLocks noGrp="1"/>
+          </p:cNvSpPr>
+          <p:nvPr>
+            <p:ph type="sldNum" idx="5" sz="quarter"/>
+          </p:nvPr>
+        </p:nvSpPr>
+        <p:spPr/>
+      </p:sp>
+    </p:spTree>
+  </p:cSld>
+  <p:clrMapOvr>
+    <a:masterClrMapping/>
+  </p:clrMapOvr>
+</p:notes>
+</file>
+
+<file path=ppt/notesSlides/notesSlide3.xml><?xml version="1.0" encoding="utf-8"?>
+<p:notes xmlns:a="http://schemas.openxmlformats.org/drawingml/2006/main" xmlns:p="http://schemas.openxmlformats.org/presentationml/2006/main" xmlns:r="http://schemas.openxmlformats.org/officeDocument/2006/relationships">
+  <p:cSld>
+    <p:spTree>
+      <p:nvGrpSpPr>
+        <p:cNvPr id="1" name=""/>
+        <p:cNvGrpSpPr/>
+        <p:nvPr/>
+      </p:nvGrpSpPr>
+      <p:grpSpPr>
+        <a:xfrm>
+          <a:off x="0" y="0"/>
+          <a:ext cx="0" cy="0"/>
+          <a:chOff x="0" y="0"/>
+          <a:chExt cx="0" cy="0"/>
+        </a:xfrm>
+      </p:grpSpPr>
+      <p:sp>
+        <p:nvSpPr>
+          <p:cNvPr id="2" name="Slide Image Placeholder 1"/>
+          <p:cNvSpPr>
+            <a:spLocks noGrp="1"/>
+          </p:cNvSpPr>
+          <p:nvPr>
+            <p:ph type="sldImg" idx="2"/>
+          </p:nvPr>
+        </p:nvSpPr>
+        <p:spPr/>
+      </p:sp>
+      <p:sp>
+        <p:nvSpPr>
+          <p:cNvPr id="3" name="Notes Placeholder 2"/>
+          <p:cNvSpPr>
+            <a:spLocks noGrp="1"/>
+          </p:cNvSpPr>
+          <p:nvPr>
+            <p:ph type="body" idx="3" sz="quarter"/>
+          </p:nvPr>
+        </p:nvSpPr>
+        <p:spPr/>
+        <p:txBody>
+          <a:bodyPr/>
+          <a:lstStyle/>
+          <a:p>
+            <a:r>
+              <a:t>The core C1 skill — make the SPOFs visible on the diagram. Work off the picture, not the prose.</a:t>
+            </a:r>
+          </a:p>
+          <a:p>
+            <a:r>
+              <a:t>• Walk the architecture and mark every component whose failure stops the WHOLE service — that's</a:t>
+            </a:r>
+          </a:p>
+          <a:p>
+            <a:r>
+              <a:t>  the test for a SPOF.</a:t>
+            </a:r>
+          </a:p>
+          <a:p>
+            <a:r>
+              <a:t>• In a single-AZ cloud build (bolded), the SPOFs are the AZ itself, the one database, the one</a:t>
+            </a:r>
+          </a:p>
+          <a:p>
+            <a:r>
+              <a:t>  running instance, the one NAT. Point at each on the diagram.</a:t>
+            </a:r>
+          </a:p>
+          <a:p>
+            <a:r>
+              <a:t>• A network diagram makes them visible — find them all before designing any fix.</a:t>
+            </a:r>
+          </a:p>
+          <a:p>
+            <a:r>
+              <a:t>Misconception to pre-empt: "we're in the cloud, so it's already redundant." No — a single-AZ</a:t>
+            </a:r>
+          </a:p>
+          <a:p>
+            <a:r>
+              <a:t>build is full of SPOFs; the cloud gives you the tools for HA, it doesn't grant HA for free.</a:t>
+            </a:r>
+          </a:p>
+          <a:p>
+            <a:r>
+              <a:t>Question to pose: point at a box — "if this one dies, does Ledgerline stay up? Then it's a SPOF."</a:t>
+            </a:r>
+          </a:p>
+          <a:p>
+            <a:r>
+              <a:t>UoC/AT tie: ICTCLD502 PC 2.2 — identify single points of failure (AT3 Part A).</a:t>
+            </a:r>
+          </a:p>
+          <a:p>
+            <a:r>
+              <a:t>[Diagram-led slide — drive the SPOF hunt off the network diagram.]</a:t>
+            </a:r>
+          </a:p>
+        </p:txBody>
+      </p:sp>
+      <p:sp>
+        <p:nvSpPr>
+          <p:cNvPr id="4" name="Slide Number Placeholder 3"/>
+          <p:cNvSpPr>
+            <a:spLocks noGrp="1"/>
+          </p:cNvSpPr>
+          <p:nvPr>
+            <p:ph type="sldNum" idx="5" sz="quarter"/>
+          </p:nvPr>
+        </p:nvSpPr>
+        <p:spPr/>
+      </p:sp>
+    </p:spTree>
+  </p:cSld>
+  <p:clrMapOvr>
+    <a:masterClrMapping/>
+  </p:clrMapOvr>
+</p:notes>
+</file>
+
+<file path=ppt/notesSlides/notesSlide4.xml><?xml version="1.0" encoding="utf-8"?>
+<p:notes xmlns:a="http://schemas.openxmlformats.org/drawingml/2006/main" xmlns:p="http://schemas.openxmlformats.org/presentationml/2006/main" xmlns:r="http://schemas.openxmlformats.org/officeDocument/2006/relationships">
+  <p:cSld>
+    <p:spTree>
+      <p:nvGrpSpPr>
+        <p:cNvPr id="1" name=""/>
+        <p:cNvGrpSpPr/>
+        <p:nvPr/>
+      </p:nvGrpSpPr>
+      <p:grpSpPr>
+        <a:xfrm>
+          <a:off x="0" y="0"/>
+          <a:ext cx="0" cy="0"/>
+          <a:chOff x="0" y="0"/>
+          <a:chExt cx="0" cy="0"/>
+        </a:xfrm>
+      </p:grpSpPr>
+      <p:sp>
+        <p:nvSpPr>
+          <p:cNvPr id="2" name="Slide Image Placeholder 1"/>
+          <p:cNvSpPr>
+            <a:spLocks noGrp="1"/>
+          </p:cNvSpPr>
+          <p:nvPr>
+            <p:ph type="sldImg" idx="2"/>
+          </p:nvPr>
+        </p:nvSpPr>
+        <p:spPr/>
+      </p:sp>
+      <p:sp>
+        <p:nvSpPr>
+          <p:cNvPr id="3" name="Notes Placeholder 2"/>
+          <p:cNvSpPr>
+            <a:spLocks noGrp="1"/>
+          </p:cNvSpPr>
+          <p:nvPr>
+            <p:ph type="body" idx="3" sz="quarter"/>
+          </p:nvPr>
+        </p:nvSpPr>
+        <p:spPr/>
+        <p:txBody>
+          <a:bodyPr/>
+          <a:lstStyle/>
+          <a:p>
+            <a:r>
+              <a:t>Put numbers on the baseline's resilience — this quantifies how bad the SPOFs are.</a:t>
+            </a:r>
+          </a:p>
+          <a:p>
+            <a:r>
+              <a:t>• RPO comes from the backup interval (how much data you could lose); RTO from recovery-per-tier</a:t>
+            </a:r>
+          </a:p>
+          <a:p>
+            <a:r>
+              <a:t>  plus testing (how long to get back up).</a:t>
+            </a:r>
+          </a:p>
+          <a:p>
+            <a:r>
+              <a:t>• Walk the worked example slowly: 15-min backups → RPO 15 min; 30 min × 3 tiers + 1 h test →</a:t>
+            </a:r>
+          </a:p>
+          <a:p>
+            <a:r>
+              <a:t>  RTO 2.5 h. Make them see where each number comes from.</a:t>
+            </a:r>
+          </a:p>
+          <a:p>
+            <a:r>
+              <a:t>• Bolded line: flag components that scale VERTICALLY — they carry downtime (you resize by</a:t>
+            </a:r>
+          </a:p>
+          <a:p>
+            <a:r>
+              <a:t>  stopping/restarting), which hurts availability.</a:t>
+            </a:r>
+          </a:p>
+          <a:p>
+            <a:r>
+              <a:t>Misconception to pre-empt: RPO and RTO get conflated. RPO = data lost; RTO = time to restore —</a:t>
+            </a:r>
+          </a:p>
+          <a:p>
+            <a:r>
+              <a:t>different clocks. And RTO is not just "the backup frequency."</a:t>
+            </a:r>
+          </a:p>
+          <a:p>
+            <a:r>
+              <a:t>Question to pose: "If Ledgerline backs up hourly, what's the most data YAT could lose in a</a:t>
+            </a:r>
+          </a:p>
+          <a:p>
+            <a:r>
+              <a:t>failure?" (that's the RPO).</a:t>
+            </a:r>
+          </a:p>
+          <a:p>
+            <a:r>
+              <a:t>UoC/AT tie: ICTCLD502 PC 2.3 / PC 2.4 — estimate recovery objectives + vertical-scaling impact.</a:t>
+            </a:r>
+          </a:p>
+        </p:txBody>
+      </p:sp>
+      <p:sp>
+        <p:nvSpPr>
+          <p:cNvPr id="4" name="Slide Number Placeholder 3"/>
+          <p:cNvSpPr>
+            <a:spLocks noGrp="1"/>
+          </p:cNvSpPr>
+          <p:nvPr>
+            <p:ph type="sldNum" idx="5" sz="quarter"/>
+          </p:nvPr>
+        </p:nvSpPr>
+        <p:spPr/>
+      </p:sp>
+    </p:spTree>
+  </p:cSld>
+  <p:clrMapOvr>
+    <a:masterClrMapping/>
+  </p:clrMapOvr>
+</p:notes>
+</file>
+
+<file path=ppt/notesSlides/notesSlide5.xml><?xml version="1.0" encoding="utf-8"?>
+<p:notes xmlns:a="http://schemas.openxmlformats.org/drawingml/2006/main" xmlns:p="http://schemas.openxmlformats.org/presentationml/2006/main" xmlns:r="http://schemas.openxmlformats.org/officeDocument/2006/relationships">
+  <p:cSld>
+    <p:spTree>
+      <p:nvGrpSpPr>
+        <p:cNvPr id="1" name=""/>
+        <p:cNvGrpSpPr/>
+        <p:nvPr/>
+      </p:nvGrpSpPr>
+      <p:grpSpPr>
+        <a:xfrm>
+          <a:off x="0" y="0"/>
+          <a:ext cx="0" cy="0"/>
+          <a:chOff x="0" y="0"/>
+          <a:chExt cx="0" cy="0"/>
+        </a:xfrm>
+      </p:grpSpPr>
+      <p:sp>
+        <p:nvSpPr>
+          <p:cNvPr id="2" name="Slide Image Placeholder 1"/>
+          <p:cNvSpPr>
+            <a:spLocks noGrp="1"/>
+          </p:cNvSpPr>
+          <p:nvPr>
+            <p:ph type="sldImg" idx="2"/>
+          </p:nvPr>
+        </p:nvSpPr>
+        <p:spPr/>
+      </p:sp>
+      <p:sp>
+        <p:nvSpPr>
+          <p:cNvPr id="3" name="Notes Placeholder 2"/>
+          <p:cNvSpPr>
+            <a:spLocks noGrp="1"/>
+          </p:cNvSpPr>
+          <p:nvPr>
+            <p:ph type="body" idx="3" sz="quarter"/>
+          </p:nvPr>
+        </p:nvSpPr>
+        <p:spPr/>
+        <p:txBody>
+          <a:bodyPr/>
+          <a:lstStyle/>
+          <a:p>
+            <a:r>
+              <a:t>Facilitation — the first C1 practice. Analytical, no AWS console; they work from the supplied</a:t>
+            </a:r>
+          </a:p>
+          <a:p>
+            <a:r>
+              <a:t>baseline design on paper/screen.</a:t>
+            </a:r>
+          </a:p>
+          <a:p>
+            <a:r>
+              <a:t>Tell students: "You've been handed the single-AZ Accounting baseline. Before you can improve</a:t>
+            </a:r>
+          </a:p>
+          <a:p>
+            <a:r>
+              <a:t>it, evaluate its availability — find where it's fragile and put numbers on it."</a:t>
+            </a:r>
+          </a:p>
+          <a:p>
+            <a:r>
+              <a:t>Steps (put on the board):</a:t>
+            </a:r>
+          </a:p>
+          <a:p>
+            <a:r>
+              <a:t>1. List its single points of failure (AZ · database · running instance · NAT).</a:t>
+            </a:r>
+          </a:p>
+          <a:p>
+            <a:r>
+              <a:t>2. Estimate its RPO and RTO, and note where they fall short of the HA requirement.</a:t>
+            </a:r>
+          </a:p>
+          <a:p>
+            <a:r>
+              <a:t>3. Note which components scale vertically and the downtime that implies.</a:t>
+            </a:r>
+          </a:p>
+          <a:p>
+            <a:r>
+              <a:t>Must produce: a short written availability review — the SPOF list, the RPO/RTO estimate with</a:t>
+            </a:r>
+          </a:p>
+          <a:p>
+            <a:r>
+              <a:t>the shortfall, and the vertical-scaling note. These findings drive the design next section.</a:t>
+            </a:r>
+          </a:p>
+          <a:p>
+            <a:r>
+              <a:t>Timing: ~20 min then share. Where they get stuck: they list generic "the server could fail"</a:t>
+            </a:r>
+          </a:p>
+          <a:p>
+            <a:r>
+              <a:t>rather than naming the specific single-AZ SPOFs — point them back to the four on the diagram;</a:t>
+            </a:r>
+          </a:p>
+          <a:p>
+            <a:r>
+              <a:t>and some skip the RTO reasoning — remind them it's per-tier recovery + testing.</a:t>
+            </a:r>
+          </a:p>
+          <a:p>
+            <a:r>
+              <a:t>Share-back prompt: "Which SPOF worried you most, and what's your RTO estimate?"</a:t>
+            </a:r>
+          </a:p>
+          <a:p>
+            <a:r>
+              <a:t>No-leakage note: Ledgerline/Accounting is the PRACTICE baseline; AT3 assesses the SAME skill on</a:t>
+            </a:r>
+          </a:p>
+          <a:p>
+            <a:r>
+              <a:t>the LMS baseline (design the LMS HA upgrade) — comparable, not identical. Keep them on Accounting.</a:t>
+            </a:r>
+          </a:p>
+        </p:txBody>
+      </p:sp>
+      <p:sp>
+        <p:nvSpPr>
+          <p:cNvPr id="4" name="Slide Number Placeholder 3"/>
+          <p:cNvSpPr>
+            <a:spLocks noGrp="1"/>
+          </p:cNvSpPr>
+          <p:nvPr>
+            <p:ph type="sldNum" idx="5" sz="quarter"/>
+          </p:nvPr>
+        </p:nvSpPr>
+        <p:spPr/>
+      </p:sp>
+    </p:spTree>
+  </p:cSld>
+  <p:clrMapOvr>
+    <a:masterClrMapping/>
+  </p:clrMapOvr>
+</p:notes>
+</file>
+
+<file path=ppt/notesSlides/notesSlide6.xml><?xml version="1.0" encoding="utf-8"?>
+<p:notes xmlns:a="http://schemas.openxmlformats.org/drawingml/2006/main" xmlns:p="http://schemas.openxmlformats.org/presentationml/2006/main" xmlns:r="http://schemas.openxmlformats.org/officeDocument/2006/relationships">
+  <p:cSld>
+    <p:spTree>
+      <p:nvGrpSpPr>
+        <p:cNvPr id="1" name=""/>
+        <p:cNvGrpSpPr/>
+        <p:nvPr/>
+      </p:nvGrpSpPr>
+      <p:grpSpPr>
+        <a:xfrm>
+          <a:off x="0" y="0"/>
+          <a:ext cx="0" cy="0"/>
+          <a:chOff x="0" y="0"/>
+          <a:chExt cx="0" cy="0"/>
+        </a:xfrm>
+      </p:grpSpPr>
+      <p:sp>
+        <p:nvSpPr>
+          <p:cNvPr id="2" name="Slide Image Placeholder 1"/>
+          <p:cNvSpPr>
+            <a:spLocks noGrp="1"/>
+          </p:cNvSpPr>
+          <p:nvPr>
+            <p:ph type="sldImg" idx="2"/>
+          </p:nvPr>
+        </p:nvSpPr>
+        <p:spPr/>
+      </p:sp>
+      <p:sp>
+        <p:nvSpPr>
+          <p:cNvPr id="3" name="Notes Placeholder 2"/>
+          <p:cNvSpPr>
+            <a:spLocks noGrp="1"/>
+          </p:cNvSpPr>
+          <p:nvPr>
+            <p:ph type="body" idx="3" sz="quarter"/>
+          </p:nvPr>
+        </p:nvSpPr>
+        <p:spPr/>
+        <p:txBody>
+          <a:bodyPr/>
+          <a:lstStyle/>
+          <a:p>
+            <a:r>
+              <a:t>Open C2 — the mindset flip: HA is something you DESIGN, not something the cloud gives you.</a:t>
+            </a:r>
+          </a:p>
+          <a:p>
+            <a:r>
+              <a:t>• Using the cloud doesn't make you highly available — you design the redundancy in.</a:t>
+            </a:r>
+          </a:p>
+          <a:p>
+            <a:r>
+              <a:t>• Bolded line: for each SPOF, add redundancy across compute, storage and network so no single</a:t>
+            </a:r>
+          </a:p>
+          <a:p>
+            <a:r>
+              <a:t>  failure stops the service.</a:t>
+            </a:r>
+          </a:p>
+          <a:p>
+            <a:r>
+              <a:t>• The goal: an EQUIVALENT architecture — same function as the baseline — that keeps running when</a:t>
+            </a:r>
+          </a:p>
+          <a:p>
+            <a:r>
+              <a:t>  one component, or one whole AZ, fails.</a:t>
+            </a:r>
+          </a:p>
+          <a:p>
+            <a:r>
+              <a:t>Misconception to pre-empt: "we moved it to AWS, so it's now highly available." No — a single-AZ</a:t>
+            </a:r>
+          </a:p>
+          <a:p>
+            <a:r>
+              <a:t>AWS build is no more available than an on-prem one; availability is a design property.</a:t>
+            </a:r>
+          </a:p>
+          <a:p>
+            <a:r>
+              <a:t>Question to pose: "What makes a cloud build highly available — the cloud, or your design?"</a:t>
+            </a:r>
+          </a:p>
+          <a:p>
+            <a:r>
+              <a:t>UoC/AT tie: ICTCLD502 PC 3.1 / PC 3.2 — design the HA-equivalent, remove SPOFs (AT3 Part A).</a:t>
+            </a:r>
+          </a:p>
+        </p:txBody>
+      </p:sp>
+      <p:sp>
+        <p:nvSpPr>
+          <p:cNvPr id="4" name="Slide Number Placeholder 3"/>
+          <p:cNvSpPr>
+            <a:spLocks noGrp="1"/>
+          </p:cNvSpPr>
+          <p:nvPr>
+            <p:ph type="sldNum" idx="5" sz="quarter"/>
+          </p:nvPr>
+        </p:nvSpPr>
+        <p:spPr/>
+      </p:sp>
+    </p:spTree>
+  </p:cSld>
+  <p:clrMapOvr>
+    <a:masterClrMapping/>
+  </p:clrMapOvr>
+</p:notes>
+</file>
+
+<file path=ppt/notesSlides/notesSlide7.xml><?xml version="1.0" encoding="utf-8"?>
+<p:notes xmlns:a="http://schemas.openxmlformats.org/drawingml/2006/main" xmlns:p="http://schemas.openxmlformats.org/presentationml/2006/main" xmlns:r="http://schemas.openxmlformats.org/officeDocument/2006/relationships">
+  <p:cSld>
+    <p:spTree>
+      <p:nvGrpSpPr>
+        <p:cNvPr id="1" name=""/>
+        <p:cNvGrpSpPr/>
+        <p:nvPr/>
+      </p:nvGrpSpPr>
+      <p:grpSpPr>
+        <a:xfrm>
+          <a:off x="0" y="0"/>
+          <a:ext cx="0" cy="0"/>
+          <a:chOff x="0" y="0"/>
+          <a:chExt cx="0" cy="0"/>
+        </a:xfrm>
+      </p:grpSpPr>
+      <p:sp>
+        <p:nvSpPr>
+          <p:cNvPr id="2" name="Slide Image Placeholder 1"/>
+          <p:cNvSpPr>
+            <a:spLocks noGrp="1"/>
+          </p:cNvSpPr>
+          <p:nvPr>
+            <p:ph type="sldImg" idx="2"/>
+          </p:nvPr>
+        </p:nvSpPr>
+        <p:spPr/>
+      </p:sp>
+      <p:sp>
+        <p:nvSpPr>
+          <p:cNvPr id="3" name="Notes Placeholder 2"/>
+          <p:cNvSpPr>
+            <a:spLocks noGrp="1"/>
+          </p:cNvSpPr>
+          <p:nvPr>
+            <p:ph type="body" idx="3" sz="quarter"/>
+          </p:nvPr>
+        </p:nvSpPr>
+        <p:spPr/>
+        <p:txBody>
+          <a:bodyPr/>
+          <a:lstStyle/>
+          <a:p>
+            <a:r>
+              <a:t>The reference pattern they design toward — from ACA M10. Assemble it off the diagram tier by tier.</a:t>
+            </a:r>
+          </a:p>
+          <a:p>
+            <a:r>
+              <a:t>• Spread the workload across TWO Availability Zones: load balancing across AZs → instances (an</a:t>
+            </a:r>
+          </a:p>
+          <a:p>
+            <a:r>
+              <a:t>  ASG) across AZs → a Multi-AZ database.</a:t>
+            </a:r>
+          </a:p>
+          <a:p>
+            <a:r>
+              <a:t>• Bolded line: the LB routes only to HEALTHY targets; the ASG keeps capacity in each AZ; the</a:t>
+            </a:r>
+          </a:p>
+          <a:p>
+            <a:r>
+              <a:t>  database fails over automatically. Each mechanism removes a specific SPOF.</a:t>
+            </a:r>
+          </a:p>
+          <a:p>
+            <a:r>
+              <a:t>• Redundant egress — a NAT per AZ — keeps outbound working if an AZ is lost.</a:t>
+            </a:r>
+          </a:p>
+          <a:p>
+            <a:r>
+              <a:t>Misconception to pre-empt: "two AZs means two copies I fail over by hand." No — the managed</a:t>
+            </a:r>
+          </a:p>
+          <a:p>
+            <a:r>
+              <a:t>services (ALB health checks, ASG, Multi-AZ RDS) do the failover; that's the point of using them.</a:t>
+            </a:r>
+          </a:p>
+          <a:p>
+            <a:r>
+              <a:t>Question to pose: "If one whole AZ vanishes right now, which of these pieces keeps serving?"</a:t>
+            </a:r>
+          </a:p>
+          <a:p>
+            <a:r>
+              <a:t>UoC/AT tie: ICTCLD502 KE 4 / KE 8 — redundancy across AZs, LB + autoscaling, Multi-AZ.</a:t>
+            </a:r>
+          </a:p>
+          <a:p>
+            <a:r>
+              <a:t>[Diagram-led slide — build the cross-AZ topology visually.]</a:t>
+            </a:r>
+          </a:p>
+        </p:txBody>
+      </p:sp>
+      <p:sp>
+        <p:nvSpPr>
+          <p:cNvPr id="4" name="Slide Number Placeholder 3"/>
+          <p:cNvSpPr>
+            <a:spLocks noGrp="1"/>
+          </p:cNvSpPr>
+          <p:nvPr>
+            <p:ph type="sldNum" idx="5" sz="quarter"/>
+          </p:nvPr>
+        </p:nvSpPr>
+        <p:spPr/>
+      </p:sp>
+    </p:spTree>
+  </p:cSld>
+  <p:clrMapOvr>
+    <a:masterClrMapping/>
+  </p:clrMapOvr>
+</p:notes>
+</file>
+
+<file path=ppt/notesSlides/notesSlide8.xml><?xml version="1.0" encoding="utf-8"?>
+<p:notes xmlns:a="http://schemas.openxmlformats.org/drawingml/2006/main" xmlns:p="http://schemas.openxmlformats.org/presentationml/2006/main" xmlns:r="http://schemas.openxmlformats.org/officeDocument/2006/relationships">
+  <p:cSld>
+    <p:spTree>
+      <p:nvGrpSpPr>
+        <p:cNvPr id="1" name=""/>
+        <p:cNvGrpSpPr/>
+        <p:nvPr/>
+      </p:nvGrpSpPr>
+      <p:grpSpPr>
+        <a:xfrm>
+          <a:off x="0" y="0"/>
+          <a:ext cx="0" cy="0"/>
+          <a:chOff x="0" y="0"/>
+          <a:chExt cx="0" cy="0"/>
+        </a:xfrm>
+      </p:grpSpPr>
+      <p:sp>
+        <p:nvSpPr>
+          <p:cNvPr id="2" name="Slide Image Placeholder 1"/>
+          <p:cNvSpPr>
+            <a:spLocks noGrp="1"/>
+          </p:cNvSpPr>
+          <p:nvPr>
+            <p:ph type="sldImg" idx="2"/>
+          </p:nvPr>
+        </p:nvSpPr>
+        <p:spPr/>
+      </p:sp>
+      <p:sp>
+        <p:nvSpPr>
+          <p:cNvPr id="3" name="Notes Placeholder 2"/>
+          <p:cNvSpPr>
+            <a:spLocks noGrp="1"/>
+          </p:cNvSpPr>
+          <p:nvPr>
+            <p:ph type="body" idx="3" sz="quarter"/>
+          </p:nvPr>
+        </p:nvSpPr>
+        <p:spPr/>
+        <p:txBody>
+          <a:bodyPr/>
+          <a:lstStyle/>
+          <a:p>
+            <a:r>
+              <a:t>The heart of the design — a systematic SPOF→fix mapping. Every fix must trace to a SPOF they found.</a:t>
+            </a:r>
+          </a:p>
+          <a:p>
+            <a:r>
+              <a:t>• Single Availability Zone → a second AZ with mirrored subnets.</a:t>
+            </a:r>
+          </a:p>
+          <a:p>
+            <a:r>
+              <a:t>• Single running instance → an Auto Scaling group spread across both AZs.</a:t>
+            </a:r>
+          </a:p>
+          <a:p>
+            <a:r>
+              <a:t>• Single database → a Multi-AZ database with a synchronous standby + automatic failover.</a:t>
+            </a:r>
+          </a:p>
+          <a:p>
+            <a:r>
+              <a:t>• Single NAT gateway (bolded) → a NAT gateway per AZ.</a:t>
+            </a:r>
+          </a:p>
+          <a:p>
+            <a:r>
+              <a:t>• Tie it back: these are exactly the four SPOFs from C1 — the design is disciplined, not creative</a:t>
+            </a:r>
+          </a:p>
+          <a:p>
+            <a:r>
+              <a:t>  for its own sake.</a:t>
+            </a:r>
+          </a:p>
+          <a:p>
+            <a:r>
+              <a:t>Misconception to pre-empt: students add redundancy scattershot ("more of everything"). Stress</a:t>
+            </a:r>
+          </a:p>
+          <a:p>
+            <a:r>
+              <a:t>each addition must remove a NAMED SPOF; redundancy with no SPOF behind it is just cost.</a:t>
+            </a:r>
+          </a:p>
+          <a:p>
+            <a:r>
+              <a:t>Question to pose: "Take each SPOF you listed this morning — what's the single fix for it?"</a:t>
+            </a:r>
+          </a:p>
+          <a:p>
+            <a:r>
+              <a:t>UoC/AT tie: ICTCLD502 PC 3.2 — identify and remove single points of failure as required.</a:t>
+            </a:r>
+          </a:p>
+        </p:txBody>
+      </p:sp>
+      <p:sp>
+        <p:nvSpPr>
+          <p:cNvPr id="4" name="Slide Number Placeholder 3"/>
+          <p:cNvSpPr>
+            <a:spLocks noGrp="1"/>
+          </p:cNvSpPr>
+          <p:nvPr>
+            <p:ph type="sldNum" idx="5" sz="quarter"/>
+          </p:nvPr>
+        </p:nvSpPr>
+        <p:spPr/>
+      </p:sp>
+    </p:spTree>
+  </p:cSld>
+  <p:clrMapOvr>
+    <a:masterClrMapping/>
+  </p:clrMapOvr>
+</p:notes>
+</file>
+
+<file path=ppt/notesSlides/notesSlide9.xml><?xml version="1.0" encoding="utf-8"?>
+<p:notes xmlns:a="http://schemas.openxmlformats.org/drawingml/2006/main" xmlns:p="http://schemas.openxmlformats.org/presentationml/2006/main" xmlns:r="http://schemas.openxmlformats.org/officeDocument/2006/relationships">
+  <p:cSld>
+    <p:spTree>
+      <p:nvGrpSpPr>
+        <p:cNvPr id="1" name=""/>
+        <p:cNvGrpSpPr/>
+        <p:nvPr/>
+      </p:nvGrpSpPr>
+      <p:grpSpPr>
+        <a:xfrm>
+          <a:off x="0" y="0"/>
+          <a:ext cx="0" cy="0"/>
+          <a:chOff x="0" y="0"/>
+          <a:chExt cx="0" cy="0"/>
+        </a:xfrm>
+      </p:grpSpPr>
+      <p:sp>
+        <p:nvSpPr>
+          <p:cNvPr id="2" name="Slide Image Placeholder 1"/>
+          <p:cNvSpPr>
+            <a:spLocks noGrp="1"/>
+          </p:cNvSpPr>
+          <p:nvPr>
+            <p:ph type="sldImg" idx="2"/>
+          </p:nvPr>
+        </p:nvSpPr>
+        <p:spPr/>
+      </p:sp>
+      <p:sp>
+        <p:nvSpPr>
+          <p:cNvPr id="3" name="Notes Placeholder 2"/>
+          <p:cNvSpPr>
+            <a:spLocks noGrp="1"/>
+          </p:cNvSpPr>
+          <p:nvPr>
+            <p:ph type="body" idx="3" sz="quarter"/>
+          </p:nvPr>
+        </p:nvSpPr>
+        <p:spPr/>
+        <p:txBody>
+          <a:bodyPr/>
+          <a:lstStyle/>
+          <a:p>
+            <a:r>
+              <a:t>Prove the design actually improves the numbers — and be honest about what it doesn't fix.</a:t>
+            </a:r>
+          </a:p>
+          <a:p>
+            <a:r>
+              <a:t>• Re-estimate RPO/RTO for the HA design, per component and overall.</a:t>
+            </a:r>
+          </a:p>
+          <a:p>
+            <a:r>
+              <a:t>• Bolded line: RPO is unchanged (still driven by backups); RTO drops to MINUTES for an AZ or</a:t>
+            </a:r>
+          </a:p>
+          <a:p>
+            <a:r>
+              <a:t>  instance failure, because failover is now automatic.</a:t>
+            </a:r>
+          </a:p>
+          <a:p>
+            <a:r>
+              <a:t>• Check the numbers meet the HA requirement — and note what REMAINS: the single Region.</a:t>
+            </a:r>
+          </a:p>
+          <a:p>
+            <a:r>
+              <a:t>Misconception to pre-empt: "HA fixes everything." It doesn't — a single-Region design still</a:t>
+            </a:r>
+          </a:p>
+          <a:p>
+            <a:r>
+              <a:t>falls to a Region-wide event; that's DR territory (CL2), explicitly out of scope here.</a:t>
+            </a:r>
+          </a:p>
+          <a:p>
+            <a:r>
+              <a:t>Question to pose: "What does the second AZ do to your RTO — and what does it NOT protect against?"</a:t>
+            </a:r>
+          </a:p>
+          <a:p>
+            <a:r>
+              <a:t>(the single Region.)</a:t>
+            </a:r>
+          </a:p>
+          <a:p>
+            <a:r>
+              <a:t>UoC/AT tie: ICTCLD502 PC 3.3 / PC 3.4 — re-estimate recovery objectives for the HA design.</a:t>
+            </a:r>
+          </a:p>
+        </p:txBody>
+      </p:sp>
+      <p:sp>
+        <p:nvSpPr>
+          <p:cNvPr id="4" name="Slide Number Placeholder 3"/>
+          <p:cNvSpPr>
+            <a:spLocks noGrp="1"/>
+          </p:cNvSpPr>
+          <p:nvPr>
+            <p:ph type="sldNum" idx="5" sz="quarter"/>
+          </p:nvPr>
+        </p:nvSpPr>
+        <p:spPr/>
+      </p:sp>
+    </p:spTree>
+  </p:cSld>
+  <p:clrMapOvr>
+    <a:masterClrMapping/>
+  </p:clrMapOvr>
+</p:notes>
 </file>
 
 <file path=ppt/slideLayouts/slideLayout1.xml><?xml version="1.0" encoding="utf-8"?>
@@ -13404,4 +15499,324 @@
   </a:objectDefaults>
   <a:extraClrSchemeLst/>
 </a:theme>
+</file>
+
+<file path=ppt/theme/theme2.xml><?xml version="1.0" encoding="utf-8"?>
+<a:theme xmlns:a="http://schemas.openxmlformats.org/drawingml/2006/main" name="Office Theme">
+  <a:themeElements>
+    <a:clrScheme name="Office">
+      <a:dk1>
+        <a:sysClr val="windowText" lastClr="000000"/>
+      </a:dk1>
+      <a:lt1>
+        <a:sysClr val="window" lastClr="FFFFFF"/>
+      </a:lt1>
+      <a:dk2>
+        <a:srgbClr val="1F497D"/>
+      </a:dk2>
+      <a:lt2>
+        <a:srgbClr val="EEECE1"/>
+      </a:lt2>
+      <a:accent1>
+        <a:srgbClr val="4F81BD"/>
+      </a:accent1>
+      <a:accent2>
+        <a:srgbClr val="C0504D"/>
+      </a:accent2>
+      <a:accent3>
+        <a:srgbClr val="9BBB59"/>
+      </a:accent3>
+      <a:accent4>
+        <a:srgbClr val="8064A2"/>
+      </a:accent4>
+      <a:accent5>
+        <a:srgbClr val="4BACC6"/>
+      </a:accent5>
+      <a:accent6>
+        <a:srgbClr val="F79646"/>
+      </a:accent6>
+      <a:hlink>
+        <a:srgbClr val="0000FF"/>
+      </a:hlink>
+      <a:folHlink>
+        <a:srgbClr val="800080"/>
+      </a:folHlink>
+    </a:clrScheme>
+    <a:fontScheme name="Office">
+      <a:majorFont>
+        <a:latin typeface="Calibri"/>
+        <a:ea typeface=""/>
+        <a:cs typeface=""/>
+        <a:font script="Jpan" typeface="ＭＳ Ｐゴシック"/>
+        <a:font script="Hang" typeface="맑은 고딕"/>
+        <a:font script="Hans" typeface="宋体"/>
+        <a:font script="Hant" typeface="新細明體"/>
+        <a:font script="Arab" typeface="Times New Roman"/>
+        <a:font script="Hebr" typeface="Times New Roman"/>
+        <a:font script="Thai" typeface="Angsana New"/>
+        <a:font script="Ethi" typeface="Nyala"/>
+        <a:font script="Beng" typeface="Vrinda"/>
+        <a:font script="Gujr" typeface="Shruti"/>
+        <a:font script="Khmr" typeface="MoolBoran"/>
+        <a:font script="Knda" typeface="Tunga"/>
+        <a:font script="Guru" typeface="Raavi"/>
+        <a:font script="Cans" typeface="Euphemia"/>
+        <a:font script="Cher" typeface="Plantagenet Cherokee"/>
+        <a:font script="Yiii" typeface="Microsoft Yi Baiti"/>
+        <a:font script="Tibt" typeface="Microsoft Himalaya"/>
+        <a:font script="Thaa" typeface="MV Boli"/>
+        <a:font script="Deva" typeface="Mangal"/>
+        <a:font script="Telu" typeface="Gautami"/>
+        <a:font script="Taml" typeface="Latha"/>
+        <a:font script="Syrc" typeface="Estrangelo Edessa"/>
+        <a:font script="Orya" typeface="Kalinga"/>
+        <a:font script="Mlym" typeface="Kartika"/>
+        <a:font script="Laoo" typeface="DokChampa"/>
+        <a:font script="Sinh" typeface="Iskoola Pota"/>
+        <a:font script="Mong" typeface="Mongolian Baiti"/>
+        <a:font script="Viet" typeface="Times New Roman"/>
+        <a:font script="Uigh" typeface="Microsoft Uighur"/>
+        <a:font script="Geor" typeface="Sylfaen"/>
+      </a:majorFont>
+      <a:minorFont>
+        <a:latin typeface="Calibri"/>
+        <a:ea typeface=""/>
+        <a:cs typeface=""/>
+        <a:font script="Jpan" typeface="ＭＳ Ｐゴシック"/>
+        <a:font script="Hang" typeface="맑은 고딕"/>
+        <a:font script="Hans" typeface="宋体"/>
+        <a:font script="Hant" typeface="新細明體"/>
+        <a:font script="Arab" typeface="Arial"/>
+        <a:font script="Hebr" typeface="Arial"/>
+        <a:font script="Thai" typeface="Cordia New"/>
+        <a:font script="Ethi" typeface="Nyala"/>
+        <a:font script="Beng" typeface="Vrinda"/>
+        <a:font script="Gujr" typeface="Shruti"/>
+        <a:font script="Khmr" typeface="DaunPenh"/>
+        <a:font script="Knda" typeface="Tunga"/>
+        <a:font script="Guru" typeface="Raavi"/>
+        <a:font script="Cans" typeface="Euphemia"/>
+        <a:font script="Cher" typeface="Plantagenet Cherokee"/>
+        <a:font script="Yiii" typeface="Microsoft Yi Baiti"/>
+        <a:font script="Tibt" typeface="Microsoft Himalaya"/>
+        <a:font script="Thaa" typeface="MV Boli"/>
+        <a:font script="Deva" typeface="Mangal"/>
+        <a:font script="Telu" typeface="Gautami"/>
+        <a:font script="Taml" typeface="Latha"/>
+        <a:font script="Syrc" typeface="Estrangelo Edessa"/>
+        <a:font script="Orya" typeface="Kalinga"/>
+        <a:font script="Mlym" typeface="Kartika"/>
+        <a:font script="Laoo" typeface="DokChampa"/>
+        <a:font script="Sinh" typeface="Iskoola Pota"/>
+        <a:font script="Mong" typeface="Mongolian Baiti"/>
+        <a:font script="Viet" typeface="Arial"/>
+        <a:font script="Uigh" typeface="Microsoft Uighur"/>
+        <a:font script="Geor" typeface="Sylfaen"/>
+      </a:minorFont>
+    </a:fontScheme>
+    <a:fmtScheme name="Office">
+      <a:fillStyleLst>
+        <a:solidFill>
+          <a:schemeClr val="phClr"/>
+        </a:solidFill>
+        <a:gradFill rotWithShape="1">
+          <a:gsLst>
+            <a:gs pos="0">
+              <a:schemeClr val="phClr">
+                <a:tint val="50000"/>
+                <a:satMod val="300000"/>
+              </a:schemeClr>
+            </a:gs>
+            <a:gs pos="35000">
+              <a:schemeClr val="phClr">
+                <a:tint val="37000"/>
+                <a:satMod val="300000"/>
+              </a:schemeClr>
+            </a:gs>
+            <a:gs pos="100000">
+              <a:schemeClr val="phClr">
+                <a:tint val="15000"/>
+                <a:satMod val="350000"/>
+              </a:schemeClr>
+            </a:gs>
+          </a:gsLst>
+          <a:lin ang="16200000" scaled="1"/>
+        </a:gradFill>
+        <a:gradFill rotWithShape="1">
+          <a:gsLst>
+            <a:gs pos="0">
+              <a:schemeClr val="phClr">
+                <a:tint val="100000"/>
+                <a:shade val="100000"/>
+                <a:satMod val="130000"/>
+              </a:schemeClr>
+            </a:gs>
+            <a:gs pos="100000">
+              <a:schemeClr val="phClr">
+                <a:tint val="50000"/>
+                <a:shade val="100000"/>
+                <a:satMod val="350000"/>
+              </a:schemeClr>
+            </a:gs>
+          </a:gsLst>
+          <a:lin ang="16200000" scaled="0"/>
+        </a:gradFill>
+      </a:fillStyleLst>
+      <a:lnStyleLst>
+        <a:ln w="9525" cap="flat" cmpd="sng" algn="ctr">
+          <a:solidFill>
+            <a:schemeClr val="phClr">
+              <a:shade val="95000"/>
+              <a:satMod val="105000"/>
+            </a:schemeClr>
+          </a:solidFill>
+          <a:prstDash val="solid"/>
+        </a:ln>
+        <a:ln w="25400" cap="flat" cmpd="sng" algn="ctr">
+          <a:solidFill>
+            <a:schemeClr val="phClr"/>
+          </a:solidFill>
+          <a:prstDash val="solid"/>
+        </a:ln>
+        <a:ln w="38100" cap="flat" cmpd="sng" algn="ctr">
+          <a:solidFill>
+            <a:schemeClr val="phClr"/>
+          </a:solidFill>
+          <a:prstDash val="solid"/>
+        </a:ln>
+      </a:lnStyleLst>
+      <a:effectStyleLst>
+        <a:effectStyle>
+          <a:effectLst>
+            <a:outerShdw blurRad="40000" dist="20000" dir="5400000" rotWithShape="0">
+              <a:srgbClr val="000000">
+                <a:alpha val="38000"/>
+              </a:srgbClr>
+            </a:outerShdw>
+          </a:effectLst>
+        </a:effectStyle>
+        <a:effectStyle>
+          <a:effectLst>
+            <a:outerShdw blurRad="40000" dist="23000" dir="5400000" rotWithShape="0">
+              <a:srgbClr val="000000">
+                <a:alpha val="35000"/>
+              </a:srgbClr>
+            </a:outerShdw>
+          </a:effectLst>
+        </a:effectStyle>
+        <a:effectStyle>
+          <a:effectLst>
+            <a:outerShdw blurRad="40000" dist="23000" dir="5400000" rotWithShape="0">
+              <a:srgbClr val="000000">
+                <a:alpha val="35000"/>
+              </a:srgbClr>
+            </a:outerShdw>
+          </a:effectLst>
+          <a:scene3d>
+            <a:camera prst="orthographicFront">
+              <a:rot lat="0" lon="0" rev="0"/>
+            </a:camera>
+            <a:lightRig rig="threePt" dir="t">
+              <a:rot lat="0" lon="0" rev="1200000"/>
+            </a:lightRig>
+          </a:scene3d>
+          <a:sp3d>
+            <a:bevelT w="63500" h="25400"/>
+          </a:sp3d>
+        </a:effectStyle>
+      </a:effectStyleLst>
+      <a:bgFillStyleLst>
+        <a:solidFill>
+          <a:schemeClr val="phClr"/>
+        </a:solidFill>
+        <a:gradFill rotWithShape="1">
+          <a:gsLst>
+            <a:gs pos="0">
+              <a:schemeClr val="phClr">
+                <a:tint val="40000"/>
+                <a:satMod val="350000"/>
+              </a:schemeClr>
+            </a:gs>
+            <a:gs pos="40000">
+              <a:schemeClr val="phClr">
+                <a:tint val="45000"/>
+                <a:shade val="99000"/>
+                <a:satMod val="350000"/>
+              </a:schemeClr>
+            </a:gs>
+            <a:gs pos="100000">
+              <a:schemeClr val="phClr">
+                <a:shade val="20000"/>
+                <a:satMod val="255000"/>
+              </a:schemeClr>
+            </a:gs>
+          </a:gsLst>
+          <a:path path="circle">
+            <a:fillToRect l="50000" t="-80000" r="50000" b="180000"/>
+          </a:path>
+        </a:gradFill>
+        <a:gradFill rotWithShape="1">
+          <a:gsLst>
+            <a:gs pos="0">
+              <a:schemeClr val="phClr">
+                <a:tint val="80000"/>
+                <a:satMod val="300000"/>
+              </a:schemeClr>
+            </a:gs>
+            <a:gs pos="100000">
+              <a:schemeClr val="phClr">
+                <a:shade val="30000"/>
+                <a:satMod val="200000"/>
+              </a:schemeClr>
+            </a:gs>
+          </a:gsLst>
+          <a:path path="circle">
+            <a:fillToRect l="50000" t="50000" r="50000" b="50000"/>
+          </a:path>
+        </a:gradFill>
+      </a:bgFillStyleLst>
+    </a:fmtScheme>
+  </a:themeElements>
+  <a:objectDefaults>
+    <a:spDef>
+      <a:spPr/>
+      <a:bodyPr/>
+      <a:lstStyle/>
+      <a:style>
+        <a:lnRef idx="1">
+          <a:schemeClr val="accent1"/>
+        </a:lnRef>
+        <a:fillRef idx="3">
+          <a:schemeClr val="accent1"/>
+        </a:fillRef>
+        <a:effectRef idx="2">
+          <a:schemeClr val="accent1"/>
+        </a:effectRef>
+        <a:fontRef idx="minor">
+          <a:schemeClr val="lt1"/>
+        </a:fontRef>
+      </a:style>
+    </a:spDef>
+    <a:lnDef>
+      <a:spPr/>
+      <a:bodyPr/>
+      <a:lstStyle/>
+      <a:style>
+        <a:lnRef idx="2">
+          <a:schemeClr val="accent1"/>
+        </a:lnRef>
+        <a:fillRef idx="0">
+          <a:schemeClr val="accent1"/>
+        </a:fillRef>
+        <a:effectRef idx="1">
+          <a:schemeClr val="accent1"/>
+        </a:effectRef>
+        <a:fontRef idx="minor">
+          <a:schemeClr val="tx1"/>
+        </a:fontRef>
+      </a:style>
+    </a:lnDef>
+  </a:objectDefaults>
+  <a:extraClrSchemeLst/>
+</a:theme>
 </file>
--- a/S1-CL1-Cloud-Design-Build/delivery/topic_12/Topic_12_Slides.pptx
+++ b/S1-CL1-Cloud-Design-Build/delivery/topic_12/Topic_12_Slides.pptx
@@ -534,7 +534,7 @@
           </a:p>
           <a:p>
             <a:r>
-              <a:t>  HA design. This is the doing, not the knowing.</a:t>
+              <a:t>HA design. This is the doing, not the knowing.</a:t>
             </a:r>
           </a:p>
           <a:p>
@@ -544,7 +544,7 @@
           </a:p>
           <a:p>
             <a:r>
-              <a:t>  design is what they build, we don't hand it out.</a:t>
+              <a:t>design is what they build, we don't hand it out.</a:t>
             </a:r>
           </a:p>
           <a:p>
@@ -554,7 +554,7 @@
           </a:p>
           <a:p>
             <a:r>
-              <a:t>  them out → document the design and plan the work.</a:t>
+              <a:t>them out → document the design and plan the work.</a:t>
             </a:r>
           </a:p>
           <a:p>
@@ -564,7 +564,7 @@
           </a:p>
           <a:p>
             <a:r>
-              <a:t>  now costs them next week.</a:t>
+              <a:t>now costs them next week.</a:t>
             </a:r>
           </a:p>
           <a:p>
@@ -819,7 +819,7 @@
           </a:p>
           <a:p>
             <a:r>
-              <a:t>  (what scales, how, and the trigger).</a:t>
+              <a:t>(what scales, how, and the trigger).</a:t>
             </a:r>
           </a:p>
           <a:p>
@@ -934,7 +934,7 @@
           </a:p>
           <a:p>
             <a:r>
-              <a:t>  baseline diagram (consistency reads as professional).</a:t>
+              <a:t>baseline diagram (consistency reads as professional).</a:t>
             </a:r>
           </a:p>
           <a:p>
@@ -1044,7 +1044,7 @@
           </a:p>
           <a:p>
             <a:r>
-              <a:t>  extend the ASG/ALB across it, convert the DB to Multi-AZ). In place, not a rebuild.</a:t>
+              <a:t>extend the ASG/ALB across it, convert the DB to Multi-AZ). In place, not a rebuild.</a:t>
             </a:r>
           </a:p>
           <a:p>
@@ -1054,7 +1054,7 @@
           </a:p>
           <a:p>
             <a:r>
-              <a:t>  tolerance (AZ/instance failure, database failover, resize under load).</a:t>
+              <a:t>tolerance (AZ/instance failure, database failover, resize under load).</a:t>
             </a:r>
           </a:p>
           <a:p>
@@ -1294,7 +1294,7 @@
           </a:p>
           <a:p>
             <a:r>
-              <a:t>  (web / app / database). Name the tiers on the baseline.</a:t>
+              <a:t>(web / app / database). Name the tiers on the baseline.</a:t>
             </a:r>
           </a:p>
           <a:p>
@@ -1304,7 +1304,7 @@
           </a:p>
           <a:p>
             <a:r>
-              <a:t>  one tier's failure at a time.</a:t>
+              <a:t>one tier's failure at a time.</a:t>
             </a:r>
           </a:p>
           <a:p>
@@ -1314,7 +1314,7 @@
           </a:p>
           <a:p>
             <a:r>
-              <a:t>  design out a weakness you haven't found.</a:t>
+              <a:t>design out a weakness you haven't found.</a:t>
             </a:r>
           </a:p>
           <a:p>
@@ -1419,7 +1419,7 @@
           </a:p>
           <a:p>
             <a:r>
-              <a:t>  the test for a SPOF.</a:t>
+              <a:t>the test for a SPOF.</a:t>
             </a:r>
           </a:p>
           <a:p>
@@ -1429,7 +1429,7 @@
           </a:p>
           <a:p>
             <a:r>
-              <a:t>  running instance, the one NAT. Point at each on the diagram.</a:t>
+              <a:t>running instance, the one NAT. Point at each on the diagram.</a:t>
             </a:r>
           </a:p>
           <a:p>
@@ -1539,7 +1539,7 @@
           </a:p>
           <a:p>
             <a:r>
-              <a:t>  plus testing (how long to get back up).</a:t>
+              <a:t>plus testing (how long to get back up).</a:t>
             </a:r>
           </a:p>
           <a:p>
@@ -1549,7 +1549,7 @@
           </a:p>
           <a:p>
             <a:r>
-              <a:t>  RTO 2.5 h. Make them see where each number comes from.</a:t>
+              <a:t>RTO 2.5 h. Make them see where each number comes from.</a:t>
             </a:r>
           </a:p>
           <a:p>
@@ -1559,7 +1559,7 @@
           </a:p>
           <a:p>
             <a:r>
-              <a:t>  stopping/restarting), which hurts availability.</a:t>
+              <a:t>stopping/restarting), which hurts availability.</a:t>
             </a:r>
           </a:p>
           <a:p>
@@ -1814,7 +1814,7 @@
           </a:p>
           <a:p>
             <a:r>
-              <a:t>  failure stops the service.</a:t>
+              <a:t>failure stops the service.</a:t>
             </a:r>
           </a:p>
           <a:p>
@@ -1824,7 +1824,7 @@
           </a:p>
           <a:p>
             <a:r>
-              <a:t>  one component, or one whole AZ, fails.</a:t>
+              <a:t>one component, or one whole AZ, fails.</a:t>
             </a:r>
           </a:p>
           <a:p>
@@ -1924,7 +1924,7 @@
           </a:p>
           <a:p>
             <a:r>
-              <a:t>  ASG) across AZs → a Multi-AZ database.</a:t>
+              <a:t>ASG) across AZs → a Multi-AZ database.</a:t>
             </a:r>
           </a:p>
           <a:p>
@@ -1934,7 +1934,7 @@
           </a:p>
           <a:p>
             <a:r>
-              <a:t>  database fails over automatically. Each mechanism removes a specific SPOF.</a:t>
+              <a:t>database fails over automatically. Each mechanism removes a specific SPOF.</a:t>
             </a:r>
           </a:p>
           <a:p>
@@ -2064,7 +2064,7 @@
           </a:p>
           <a:p>
             <a:r>
-              <a:t>  for its own sake.</a:t>
+              <a:t>for its own sake.</a:t>
             </a:r>
           </a:p>
           <a:p>
@@ -2169,7 +2169,7 @@
           </a:p>
           <a:p>
             <a:r>
-              <a:t>  instance failure, because failover is now automatic.</a:t>
+              <a:t>instance failure, because failover is now automatic.</a:t>
             </a:r>
           </a:p>
           <a:p>
@@ -5553,16 +5553,16 @@
             <a:r>
               <a:rPr sz="2400" b="1" i="0">
                 <a:solidFill>
-                  <a:srgbClr val="27B5CE"/>
+                  <a:srgbClr val="EDAB0C"/>
                 </a:solidFill>
                 <a:latin typeface="Roboto"/>
               </a:rPr>
               <a:t>■  </a:t>
             </a:r>
             <a:r>
-              <a:rPr sz="2400" b="1" i="0">
-                <a:solidFill>
-                  <a:srgbClr val="27B5CE"/>
+              <a:rPr sz="2400" b="0" i="0">
+                <a:solidFill>
+                  <a:srgbClr val="2A2929"/>
                 </a:solidFill>
                 <a:latin typeface="Roboto"/>
               </a:rPr>
@@ -5911,16 +5911,16 @@
             <a:r>
               <a:rPr sz="1700" b="1" i="0">
                 <a:solidFill>
-                  <a:srgbClr val="27B5CE"/>
+                  <a:srgbClr val="EDAB0C"/>
                 </a:solidFill>
                 <a:latin typeface="Roboto"/>
               </a:rPr>
               <a:t>■  </a:t>
             </a:r>
             <a:r>
-              <a:rPr sz="1700" b="1" i="0">
-                <a:solidFill>
-                  <a:srgbClr val="27B5CE"/>
+              <a:rPr sz="1700" b="0" i="0">
+                <a:solidFill>
+                  <a:srgbClr val="2A2929"/>
                 </a:solidFill>
                 <a:latin typeface="Roboto"/>
               </a:rPr>
@@ -6355,16 +6355,16 @@
             <a:r>
               <a:rPr sz="2400" b="1" i="0">
                 <a:solidFill>
-                  <a:srgbClr val="27B5CE"/>
+                  <a:srgbClr val="EDAB0C"/>
                 </a:solidFill>
                 <a:latin typeface="Roboto"/>
               </a:rPr>
               <a:t>■  </a:t>
             </a:r>
             <a:r>
-              <a:rPr sz="2400" b="1" i="0">
-                <a:solidFill>
-                  <a:srgbClr val="27B5CE"/>
+              <a:rPr sz="2400" b="0" i="0">
+                <a:solidFill>
+                  <a:srgbClr val="2A2929"/>
                 </a:solidFill>
                 <a:latin typeface="Roboto"/>
               </a:rPr>
@@ -6682,16 +6682,16 @@
             <a:r>
               <a:rPr sz="2400" b="1" i="0">
                 <a:solidFill>
-                  <a:srgbClr val="27B5CE"/>
+                  <a:srgbClr val="EDAB0C"/>
                 </a:solidFill>
                 <a:latin typeface="Roboto"/>
               </a:rPr>
               <a:t>■  </a:t>
             </a:r>
             <a:r>
-              <a:rPr sz="2400" b="1" i="0">
-                <a:solidFill>
-                  <a:srgbClr val="27B5CE"/>
+              <a:rPr sz="2400" b="0" i="0">
+                <a:solidFill>
+                  <a:srgbClr val="2A2929"/>
                 </a:solidFill>
                 <a:latin typeface="Roboto"/>
               </a:rPr>
@@ -7053,7 +7053,7 @@
               <a:t>■  </a:t>
             </a:r>
             <a:r>
-              <a:rPr sz="1700" b="1" i="0">
+              <a:rPr sz="1700" b="0" i="0">
                 <a:solidFill>
                   <a:srgbClr val="2A2929"/>
                 </a:solidFill>
@@ -8658,16 +8658,16 @@
             <a:r>
               <a:rPr sz="2400" b="1" i="0">
                 <a:solidFill>
-                  <a:srgbClr val="205F61"/>
+                  <a:srgbClr val="EDAB0C"/>
                 </a:solidFill>
                 <a:latin typeface="Roboto"/>
               </a:rPr>
               <a:t>■  </a:t>
             </a:r>
             <a:r>
-              <a:rPr sz="2400" b="1" i="0">
-                <a:solidFill>
-                  <a:srgbClr val="205F61"/>
+              <a:rPr sz="2400" b="0" i="0">
+                <a:solidFill>
+                  <a:srgbClr val="2A2929"/>
                 </a:solidFill>
                 <a:latin typeface="Roboto"/>
               </a:rPr>
@@ -9016,16 +9016,16 @@
             <a:r>
               <a:rPr sz="2400" b="1" i="0">
                 <a:solidFill>
-                  <a:srgbClr val="205F61"/>
+                  <a:srgbClr val="EDAB0C"/>
                 </a:solidFill>
                 <a:latin typeface="Roboto"/>
               </a:rPr>
               <a:t>■  </a:t>
             </a:r>
             <a:r>
-              <a:rPr sz="2400" b="1" i="0">
-                <a:solidFill>
-                  <a:srgbClr val="205F61"/>
+              <a:rPr sz="2400" b="0" i="0">
+                <a:solidFill>
+                  <a:srgbClr val="2A2929"/>
                 </a:solidFill>
                 <a:latin typeface="Roboto"/>
               </a:rPr>
@@ -9343,16 +9343,16 @@
             <a:r>
               <a:rPr sz="2400" b="1" i="0">
                 <a:solidFill>
-                  <a:srgbClr val="205F61"/>
+                  <a:srgbClr val="EDAB0C"/>
                 </a:solidFill>
                 <a:latin typeface="Roboto"/>
               </a:rPr>
               <a:t>■  </a:t>
             </a:r>
             <a:r>
-              <a:rPr sz="2400" b="1" i="0">
-                <a:solidFill>
-                  <a:srgbClr val="205F61"/>
+              <a:rPr sz="2400" b="0" i="0">
+                <a:solidFill>
+                  <a:srgbClr val="2A2929"/>
                 </a:solidFill>
                 <a:latin typeface="Roboto"/>
               </a:rPr>
@@ -9701,16 +9701,16 @@
             <a:r>
               <a:rPr sz="2400" b="1" i="0">
                 <a:solidFill>
-                  <a:srgbClr val="92268F"/>
+                  <a:srgbClr val="EDAB0C"/>
                 </a:solidFill>
                 <a:latin typeface="Roboto"/>
               </a:rPr>
               <a:t>■  </a:t>
             </a:r>
             <a:r>
-              <a:rPr sz="2400" b="1" i="0">
-                <a:solidFill>
-                  <a:srgbClr val="92268F"/>
+              <a:rPr sz="2400" b="0" i="0">
+                <a:solidFill>
+                  <a:srgbClr val="2A2929"/>
                 </a:solidFill>
                 <a:latin typeface="Roboto"/>
               </a:rPr>
@@ -10103,7 +10103,7 @@
               <a:t>■  </a:t>
             </a:r>
             <a:r>
-              <a:rPr sz="1700" b="1" i="0">
+              <a:rPr sz="1700" b="0" i="0">
                 <a:solidFill>
                   <a:srgbClr val="2A2929"/>
                 </a:solidFill>
@@ -10189,16 +10189,16 @@
             <a:r>
               <a:rPr sz="1700" b="1" i="0">
                 <a:solidFill>
-                  <a:srgbClr val="205F61"/>
+                  <a:srgbClr val="EDAB0C"/>
                 </a:solidFill>
                 <a:latin typeface="Roboto"/>
               </a:rPr>
               <a:t>■  </a:t>
             </a:r>
             <a:r>
-              <a:rPr sz="1700" b="1" i="0">
-                <a:solidFill>
-                  <a:srgbClr val="205F61"/>
+              <a:rPr sz="1700" b="0" i="0">
+                <a:solidFill>
+                  <a:srgbClr val="2A2929"/>
                 </a:solidFill>
                 <a:latin typeface="Roboto"/>
               </a:rPr>
@@ -11234,7 +11234,7 @@
             <a:r>
               <a:rPr sz="1800" b="1" i="0">
                 <a:solidFill>
-                  <a:srgbClr val="EDAB0C"/>
+                  <a:srgbClr val="205F61"/>
                 </a:solidFill>
                 <a:latin typeface="Roboto"/>
               </a:rPr>
@@ -11258,7 +11258,7 @@
             <a:avLst/>
           </a:prstGeom>
           <a:solidFill>
-            <a:srgbClr val="EDAB0C"/>
+            <a:srgbClr val="205F61"/>
           </a:solidFill>
           <a:ln>
             <a:noFill/>
@@ -11348,7 +11348,7 @@
             <a:avLst/>
           </a:prstGeom>
           <a:solidFill>
-            <a:srgbClr val="EDAB0C"/>
+            <a:srgbClr val="205F61"/>
           </a:solidFill>
           <a:ln>
             <a:noFill/>
@@ -11477,7 +11477,7 @@
             <a:avLst/>
           </a:prstGeom>
           <a:solidFill>
-            <a:srgbClr val="EDAB0C"/>
+            <a:srgbClr val="205F61"/>
           </a:solidFill>
           <a:ln>
             <a:noFill/>
@@ -11606,7 +11606,7 @@
             <a:avLst/>
           </a:prstGeom>
           <a:solidFill>
-            <a:srgbClr val="EDAB0C"/>
+            <a:srgbClr val="205F61"/>
           </a:solidFill>
           <a:ln>
             <a:noFill/>
@@ -11735,7 +11735,7 @@
             <a:avLst/>
           </a:prstGeom>
           <a:solidFill>
-            <a:srgbClr val="EDAB0C"/>
+            <a:srgbClr val="205F61"/>
           </a:solidFill>
           <a:ln>
             <a:noFill/>
@@ -11864,7 +11864,7 @@
             <a:avLst/>
           </a:prstGeom>
           <a:solidFill>
-            <a:srgbClr val="EDAB0C"/>
+            <a:srgbClr val="205F61"/>
           </a:solidFill>
           <a:ln>
             <a:noFill/>
@@ -11947,7 +11947,7 @@
             <a:avLst/>
           </a:prstGeom>
           <a:solidFill>
-            <a:srgbClr val="EDAB0C"/>
+            <a:srgbClr val="205F61"/>
           </a:solidFill>
           <a:ln>
             <a:noFill/>
@@ -12706,16 +12706,16 @@
             <a:r>
               <a:rPr sz="2400" b="1" i="0">
                 <a:solidFill>
-                  <a:srgbClr val="92268F"/>
+                  <a:srgbClr val="EDAB0C"/>
                 </a:solidFill>
                 <a:latin typeface="Roboto"/>
               </a:rPr>
               <a:t>■  </a:t>
             </a:r>
             <a:r>
-              <a:rPr sz="2400" b="1" i="0">
-                <a:solidFill>
-                  <a:srgbClr val="92268F"/>
+              <a:rPr sz="2400" b="0" i="0">
+                <a:solidFill>
+                  <a:srgbClr val="2A2929"/>
                 </a:solidFill>
                 <a:latin typeface="Roboto"/>
               </a:rPr>
@@ -13033,16 +13033,16 @@
             <a:r>
               <a:rPr sz="1700" b="1" i="0">
                 <a:solidFill>
-                  <a:srgbClr val="92268F"/>
+                  <a:srgbClr val="EDAB0C"/>
                 </a:solidFill>
                 <a:latin typeface="Roboto"/>
               </a:rPr>
               <a:t>■  </a:t>
             </a:r>
             <a:r>
-              <a:rPr sz="1700" b="1" i="0">
-                <a:solidFill>
-                  <a:srgbClr val="92268F"/>
+              <a:rPr sz="1700" b="0" i="0">
+                <a:solidFill>
+                  <a:srgbClr val="2A2929"/>
                 </a:solidFill>
                 <a:latin typeface="Roboto"/>
               </a:rPr>
@@ -13446,16 +13446,16 @@
             <a:r>
               <a:rPr sz="2400" b="1" i="0">
                 <a:solidFill>
-                  <a:srgbClr val="92268F"/>
+                  <a:srgbClr val="EDAB0C"/>
                 </a:solidFill>
                 <a:latin typeface="Roboto"/>
               </a:rPr>
               <a:t>■  </a:t>
             </a:r>
             <a:r>
-              <a:rPr sz="2400" b="1" i="0">
-                <a:solidFill>
-                  <a:srgbClr val="92268F"/>
+              <a:rPr sz="2400" b="0" i="0">
+                <a:solidFill>
+                  <a:srgbClr val="2A2929"/>
                 </a:solidFill>
                 <a:latin typeface="Roboto"/>
               </a:rPr>
@@ -13786,7 +13786,7 @@
               <a:t>■  </a:t>
             </a:r>
             <a:r>
-              <a:rPr sz="1700" b="1" i="0">
+              <a:rPr sz="1700" b="0" i="0">
                 <a:solidFill>
                   <a:srgbClr val="2A2929"/>
                 </a:solidFill>
@@ -13903,16 +13903,16 @@
             <a:r>
               <a:rPr sz="1700" b="1" i="0">
                 <a:solidFill>
-                  <a:srgbClr val="92268F"/>
+                  <a:srgbClr val="EDAB0C"/>
                 </a:solidFill>
                 <a:latin typeface="Roboto"/>
               </a:rPr>
               <a:t>■  </a:t>
             </a:r>
             <a:r>
-              <a:rPr sz="1700" b="1" i="0">
-                <a:solidFill>
-                  <a:srgbClr val="92268F"/>
+              <a:rPr sz="1700" b="0" i="0">
+                <a:solidFill>
+                  <a:srgbClr val="2A2929"/>
                 </a:solidFill>
                 <a:latin typeface="Roboto"/>
               </a:rPr>
